--- a/exports/learning/Zero-to-AI-Expert-Roadmap-Slides.pptx
+++ b/exports/learning/Zero-to-AI-Expert-Roadmap-Slides.pptx
@@ -18,6 +18,7 @@
     <p:sldId id="266" r:id="rId17"/>
     <p:sldId id="267" r:id="rId18"/>
     <p:sldId id="268" r:id="rId19"/>
+    <p:sldId id="269" r:id="rId20"/>
   </p:sldIdLst>
   <p:sldSz cx="12191695" cy="6858000" type="screen4x3"/>
   <p:notesSz cx="6858000" cy="9144000"/>
@@ -3459,7 +3460,7 @@
               </a:defRPr>
             </a:pPr>
             <a:r>
-              <a:t>10 hrs/week → job-ready · 15 hrs/week → ~9 months</a:t>
+              <a:t>10 hrs/week (8h technical + 2h Head of AI track)</a:t>
             </a:r>
           </a:p>
         </p:txBody>
@@ -3645,7 +3646,7 @@
               </a:defRPr>
             </a:pPr>
             <a:r>
-              <a:t>SYLLABUS SUMMARY</a:t>
+              <a:t>PROJECT MAP</a:t>
             </a:r>
           </a:p>
         </p:txBody>
@@ -3681,23 +3682,231 @@
               </a:defRPr>
             </a:pPr>
             <a:r>
-              <a:t>What to learn — core stack</a:t>
-            </a:r>
-          </a:p>
-        </p:txBody>
-      </p:sp>
-      <p:sp>
-        <p:nvSpPr>
-          <p:cNvPr id="7" name="Rectangle 6"/>
+              <a:t>Use banking domain as your edge</a:t>
+            </a:r>
+          </a:p>
+        </p:txBody>
+      </p:sp>
+      <p:sp>
+        <p:nvSpPr>
+          <p:cNvPr id="7" name="Rounded Rectangle 6"/>
           <p:cNvSpPr/>
           <p:nvPr/>
         </p:nvSpPr>
         <p:spPr>
           <a:xfrm>
-            <a:off x="1097280" y="1645920"/>
-            <a:ext cx="2286000" cy="658368"/>
-          </a:xfrm>
-          <a:prstGeom prst="rect">
+            <a:off x="540867" y="1737360"/>
+            <a:ext cx="3520440" cy="1325880"/>
+          </a:xfrm>
+          <a:prstGeom prst="roundRect">
+            <a:avLst/>
+          </a:prstGeom>
+          <a:solidFill>
+            <a:srgbClr val="FFFFFF"/>
+          </a:solidFill>
+          <a:ln w="12700">
+            <a:solidFill>
+              <a:srgbClr val="E8E6DC"/>
+            </a:solidFill>
+          </a:ln>
+          <a:effectLst/>
+        </p:spPr>
+        <p:style>
+          <a:lnRef idx="1">
+            <a:schemeClr val="accent1"/>
+          </a:lnRef>
+          <a:fillRef idx="3">
+            <a:schemeClr val="accent1"/>
+          </a:fillRef>
+          <a:effectRef idx="2">
+            <a:schemeClr val="accent1"/>
+          </a:effectRef>
+          <a:fontRef idx="minor">
+            <a:schemeClr val="lt1"/>
+          </a:fontRef>
+        </p:style>
+        <p:txBody>
+          <a:bodyPr rtlCol="0" anchor="ctr"/>
+          <a:lstStyle/>
+          <a:p>
+            <a:pPr algn="ctr"/>
+          </a:p>
+        </p:txBody>
+      </p:sp>
+      <p:sp>
+        <p:nvSpPr>
+          <p:cNvPr id="8" name="Rounded Rectangle 7"/>
+          <p:cNvSpPr/>
+          <p:nvPr/>
+        </p:nvSpPr>
+        <p:spPr>
+          <a:xfrm>
+            <a:off x="540867" y="1737360"/>
+            <a:ext cx="109728" cy="1325880"/>
+          </a:xfrm>
+          <a:prstGeom prst="roundRect">
+            <a:avLst/>
+          </a:prstGeom>
+          <a:solidFill>
+            <a:srgbClr val="C46686"/>
+          </a:solidFill>
+          <a:ln>
+            <a:noFill/>
+          </a:ln>
+          <a:effectLst/>
+        </p:spPr>
+        <p:style>
+          <a:lnRef idx="1">
+            <a:schemeClr val="accent1"/>
+          </a:lnRef>
+          <a:fillRef idx="3">
+            <a:schemeClr val="accent1"/>
+          </a:fillRef>
+          <a:effectRef idx="2">
+            <a:schemeClr val="accent1"/>
+          </a:effectRef>
+          <a:fontRef idx="minor">
+            <a:schemeClr val="lt1"/>
+          </a:fontRef>
+        </p:style>
+        <p:txBody>
+          <a:bodyPr rtlCol="0" anchor="ctr"/>
+          <a:lstStyle/>
+          <a:p>
+            <a:pPr algn="ctr"/>
+          </a:p>
+        </p:txBody>
+      </p:sp>
+      <p:sp>
+        <p:nvSpPr>
+          <p:cNvPr id="9" name="TextBox 8"/>
+          <p:cNvSpPr txBox="1"/>
+          <p:nvPr/>
+        </p:nvSpPr>
+        <p:spPr>
+          <a:xfrm>
+            <a:off x="796899" y="1901952"/>
+            <a:ext cx="3108960" cy="457200"/>
+          </a:xfrm>
+          <a:prstGeom prst="rect">
+            <a:avLst/>
+          </a:prstGeom>
+          <a:noFill/>
+        </p:spPr>
+        <p:txBody>
+          <a:bodyPr wrap="square" anchor="t">
+            <a:spAutoFit/>
+          </a:bodyPr>
+          <a:lstStyle/>
+          <a:p>
+            <a:pPr algn="l">
+              <a:defRPr sz="1400" b="1">
+                <a:solidFill>
+                  <a:srgbClr val="141413"/>
+                </a:solidFill>
+                <a:latin typeface="Poppins"/>
+              </a:defRPr>
+            </a:pPr>
+            <a:r>
+              <a:t>Credit PD model</a:t>
+            </a:r>
+          </a:p>
+        </p:txBody>
+      </p:sp>
+      <p:sp>
+        <p:nvSpPr>
+          <p:cNvPr id="10" name="TextBox 9"/>
+          <p:cNvSpPr txBox="1"/>
+          <p:nvPr/>
+        </p:nvSpPr>
+        <p:spPr>
+          <a:xfrm>
+            <a:off x="796899" y="2286000"/>
+            <a:ext cx="3108960" cy="704087"/>
+          </a:xfrm>
+          <a:prstGeom prst="rect">
+            <a:avLst/>
+          </a:prstGeom>
+          <a:noFill/>
+        </p:spPr>
+        <p:txBody>
+          <a:bodyPr wrap="square" anchor="t">
+            <a:spAutoFit/>
+          </a:bodyPr>
+          <a:lstStyle/>
+          <a:p>
+            <a:pPr algn="l">
+              <a:defRPr sz="1050" b="0">
+                <a:solidFill>
+                  <a:srgbClr val="5E5D59"/>
+                </a:solidFill>
+                <a:latin typeface="Lora"/>
+              </a:defRPr>
+            </a:pPr>
+            <a:r>
+              <a:t>Classical ML · Month 4–5</a:t>
+            </a:r>
+          </a:p>
+        </p:txBody>
+      </p:sp>
+      <p:sp>
+        <p:nvSpPr>
+          <p:cNvPr id="11" name="Rounded Rectangle 10"/>
+          <p:cNvSpPr/>
+          <p:nvPr/>
+        </p:nvSpPr>
+        <p:spPr>
+          <a:xfrm>
+            <a:off x="4335627" y="1737360"/>
+            <a:ext cx="3520440" cy="1325880"/>
+          </a:xfrm>
+          <a:prstGeom prst="roundRect">
+            <a:avLst/>
+          </a:prstGeom>
+          <a:solidFill>
+            <a:srgbClr val="FFFFFF"/>
+          </a:solidFill>
+          <a:ln w="12700">
+            <a:solidFill>
+              <a:srgbClr val="E8E6DC"/>
+            </a:solidFill>
+          </a:ln>
+          <a:effectLst/>
+        </p:spPr>
+        <p:style>
+          <a:lnRef idx="1">
+            <a:schemeClr val="accent1"/>
+          </a:lnRef>
+          <a:fillRef idx="3">
+            <a:schemeClr val="accent1"/>
+          </a:fillRef>
+          <a:effectRef idx="2">
+            <a:schemeClr val="accent1"/>
+          </a:effectRef>
+          <a:fontRef idx="minor">
+            <a:schemeClr val="lt1"/>
+          </a:fontRef>
+        </p:style>
+        <p:txBody>
+          <a:bodyPr rtlCol="0" anchor="ctr"/>
+          <a:lstStyle/>
+          <a:p>
+            <a:pPr algn="ctr"/>
+          </a:p>
+        </p:txBody>
+      </p:sp>
+      <p:sp>
+        <p:nvSpPr>
+          <p:cNvPr id="12" name="Rounded Rectangle 11"/>
+          <p:cNvSpPr/>
+          <p:nvPr/>
+        </p:nvSpPr>
+        <p:spPr>
+          <a:xfrm>
+            <a:off x="4335627" y="1737360"/>
+            <a:ext cx="109728" cy="1325880"/>
+          </a:xfrm>
+          <a:prstGeom prst="roundRect">
             <a:avLst/>
           </a:prstGeom>
           <a:solidFill>
@@ -3732,56 +3941,92 @@
       </p:sp>
       <p:sp>
         <p:nvSpPr>
-          <p:cNvPr id="8" name="TextBox 7"/>
-          <p:cNvSpPr txBox="1"/>
-          <p:nvPr/>
-        </p:nvSpPr>
-        <p:spPr>
-          <a:xfrm>
-            <a:off x="1234439" y="1645920"/>
-            <a:ext cx="2011680" cy="658368"/>
-          </a:xfrm>
-          <a:prstGeom prst="rect">
-            <a:avLst/>
-          </a:prstGeom>
-          <a:noFill/>
-        </p:spPr>
-        <p:txBody>
-          <a:bodyPr wrap="square" anchor="ctr">
+          <p:cNvPr id="13" name="TextBox 12"/>
+          <p:cNvSpPr txBox="1"/>
+          <p:nvPr/>
+        </p:nvSpPr>
+        <p:spPr>
+          <a:xfrm>
+            <a:off x="4591659" y="1901952"/>
+            <a:ext cx="3108960" cy="457200"/>
+          </a:xfrm>
+          <a:prstGeom prst="rect">
+            <a:avLst/>
+          </a:prstGeom>
+          <a:noFill/>
+        </p:spPr>
+        <p:txBody>
+          <a:bodyPr wrap="square" anchor="t">
             <a:spAutoFit/>
           </a:bodyPr>
           <a:lstStyle/>
           <a:p>
             <a:pPr algn="l">
-              <a:defRPr sz="1100" b="1">
-                <a:solidFill>
-                  <a:srgbClr val="FAF9F5"/>
+              <a:defRPr sz="1400" b="1">
+                <a:solidFill>
+                  <a:srgbClr val="141413"/>
+                </a:solidFill>
+                <a:latin typeface="Poppins"/>
+              </a:defRPr>
+            </a:pPr>
+            <a:r>
+              <a:t>Policy RAG copilot</a:t>
+            </a:r>
+          </a:p>
+        </p:txBody>
+      </p:sp>
+      <p:sp>
+        <p:nvSpPr>
+          <p:cNvPr id="14" name="TextBox 13"/>
+          <p:cNvSpPr txBox="1"/>
+          <p:nvPr/>
+        </p:nvSpPr>
+        <p:spPr>
+          <a:xfrm>
+            <a:off x="4591659" y="2286000"/>
+            <a:ext cx="3108960" cy="704087"/>
+          </a:xfrm>
+          <a:prstGeom prst="rect">
+            <a:avLst/>
+          </a:prstGeom>
+          <a:noFill/>
+        </p:spPr>
+        <p:txBody>
+          <a:bodyPr wrap="square" anchor="t">
+            <a:spAutoFit/>
+          </a:bodyPr>
+          <a:lstStyle/>
+          <a:p>
+            <a:pPr algn="l">
+              <a:defRPr sz="1050" b="0">
+                <a:solidFill>
+                  <a:srgbClr val="5E5D59"/>
                 </a:solidFill>
                 <a:latin typeface="Lora"/>
               </a:defRPr>
             </a:pPr>
             <a:r>
-              <a:t>Month 1–2</a:t>
-            </a:r>
-          </a:p>
-        </p:txBody>
-      </p:sp>
-      <p:sp>
-        <p:nvSpPr>
-          <p:cNvPr id="9" name="Rectangle 8"/>
+              <a:t>LangGraph · Month 7–8</a:t>
+            </a:r>
+          </a:p>
+        </p:txBody>
+      </p:sp>
+      <p:sp>
+        <p:nvSpPr>
+          <p:cNvPr id="15" name="Rounded Rectangle 14"/>
           <p:cNvSpPr/>
           <p:nvPr/>
         </p:nvSpPr>
         <p:spPr>
           <a:xfrm>
-            <a:off x="3383280" y="1645920"/>
-            <a:ext cx="7711135" cy="658368"/>
-          </a:xfrm>
-          <a:prstGeom prst="rect">
+            <a:off x="8130387" y="1737360"/>
+            <a:ext cx="3520440" cy="1325880"/>
+          </a:xfrm>
+          <a:prstGeom prst="roundRect">
             <a:avLst/>
           </a:prstGeom>
           <a:solidFill>
-            <a:srgbClr val="E8E6DC"/>
+            <a:srgbClr val="FFFFFF"/>
           </a:solidFill>
           <a:ln w="12700">
             <a:solidFill>
@@ -3814,52 +4059,16 @@
       </p:sp>
       <p:sp>
         <p:nvSpPr>
-          <p:cNvPr id="10" name="TextBox 9"/>
-          <p:cNvSpPr txBox="1"/>
-          <p:nvPr/>
-        </p:nvSpPr>
-        <p:spPr>
-          <a:xfrm>
-            <a:off x="3520439" y="1645920"/>
-            <a:ext cx="7528255" cy="658368"/>
-          </a:xfrm>
-          <a:prstGeom prst="rect">
-            <a:avLst/>
-          </a:prstGeom>
-          <a:noFill/>
-        </p:spPr>
-        <p:txBody>
-          <a:bodyPr wrap="square" anchor="ctr">
-            <a:spAutoFit/>
-          </a:bodyPr>
-          <a:lstStyle/>
-          <a:p>
-            <a:pPr algn="l">
-              <a:defRPr sz="1150" b="0">
-                <a:solidFill>
-                  <a:srgbClr val="141413"/>
-                </a:solidFill>
-                <a:latin typeface="Lora"/>
-              </a:defRPr>
-            </a:pPr>
-            <a:r>
-              <a:t>Python · Git · SQL · pandas</a:t>
-            </a:r>
-          </a:p>
-        </p:txBody>
-      </p:sp>
-      <p:sp>
-        <p:nvSpPr>
-          <p:cNvPr id="11" name="Rectangle 10"/>
+          <p:cNvPr id="16" name="Rounded Rectangle 15"/>
           <p:cNvSpPr/>
           <p:nvPr/>
         </p:nvSpPr>
         <p:spPr>
           <a:xfrm>
-            <a:off x="1097280" y="2432304"/>
-            <a:ext cx="2286000" cy="658368"/>
-          </a:xfrm>
-          <a:prstGeom prst="rect">
+            <a:off x="8130387" y="1737360"/>
+            <a:ext cx="109728" cy="1325880"/>
+          </a:xfrm>
+          <a:prstGeom prst="roundRect">
             <a:avLst/>
           </a:prstGeom>
           <a:solidFill>
@@ -3894,56 +4103,92 @@
       </p:sp>
       <p:sp>
         <p:nvSpPr>
-          <p:cNvPr id="12" name="TextBox 11"/>
-          <p:cNvSpPr txBox="1"/>
-          <p:nvPr/>
-        </p:nvSpPr>
-        <p:spPr>
-          <a:xfrm>
-            <a:off x="1234439" y="2432304"/>
-            <a:ext cx="2011680" cy="658368"/>
-          </a:xfrm>
-          <a:prstGeom prst="rect">
-            <a:avLst/>
-          </a:prstGeom>
-          <a:noFill/>
-        </p:spPr>
-        <p:txBody>
-          <a:bodyPr wrap="square" anchor="ctr">
+          <p:cNvPr id="17" name="TextBox 16"/>
+          <p:cNvSpPr txBox="1"/>
+          <p:nvPr/>
+        </p:nvSpPr>
+        <p:spPr>
+          <a:xfrm>
+            <a:off x="8386419" y="1901952"/>
+            <a:ext cx="3108960" cy="457200"/>
+          </a:xfrm>
+          <a:prstGeom prst="rect">
+            <a:avLst/>
+          </a:prstGeom>
+          <a:noFill/>
+        </p:spPr>
+        <p:txBody>
+          <a:bodyPr wrap="square" anchor="t">
             <a:spAutoFit/>
           </a:bodyPr>
           <a:lstStyle/>
           <a:p>
             <a:pPr algn="l">
-              <a:defRPr sz="1100" b="1">
-                <a:solidFill>
-                  <a:srgbClr val="FAF9F5"/>
+              <a:defRPr sz="1400" b="1">
+                <a:solidFill>
+                  <a:srgbClr val="141413"/>
+                </a:solidFill>
+                <a:latin typeface="Poppins"/>
+              </a:defRPr>
+            </a:pPr>
+            <a:r>
+              <a:t>Loan doc classifier</a:t>
+            </a:r>
+          </a:p>
+        </p:txBody>
+      </p:sp>
+      <p:sp>
+        <p:nvSpPr>
+          <p:cNvPr id="18" name="TextBox 17"/>
+          <p:cNvSpPr txBox="1"/>
+          <p:nvPr/>
+        </p:nvSpPr>
+        <p:spPr>
+          <a:xfrm>
+            <a:off x="8386419" y="2286000"/>
+            <a:ext cx="3108960" cy="704087"/>
+          </a:xfrm>
+          <a:prstGeom prst="rect">
+            <a:avLst/>
+          </a:prstGeom>
+          <a:noFill/>
+        </p:spPr>
+        <p:txBody>
+          <a:bodyPr wrap="square" anchor="t">
+            <a:spAutoFit/>
+          </a:bodyPr>
+          <a:lstStyle/>
+          <a:p>
+            <a:pPr algn="l">
+              <a:defRPr sz="1050" b="0">
+                <a:solidFill>
+                  <a:srgbClr val="5E5D59"/>
                 </a:solidFill>
                 <a:latin typeface="Lora"/>
               </a:defRPr>
             </a:pPr>
             <a:r>
-              <a:t>Month 3–5</a:t>
-            </a:r>
-          </a:p>
-        </p:txBody>
-      </p:sp>
-      <p:sp>
-        <p:nvSpPr>
-          <p:cNvPr id="13" name="Rectangle 12"/>
+              <a:t>NLP · Month 6</a:t>
+            </a:r>
+          </a:p>
+        </p:txBody>
+      </p:sp>
+      <p:sp>
+        <p:nvSpPr>
+          <p:cNvPr id="19" name="Rounded Rectangle 18"/>
           <p:cNvSpPr/>
           <p:nvPr/>
         </p:nvSpPr>
         <p:spPr>
           <a:xfrm>
-            <a:off x="3383280" y="2432304"/>
-            <a:ext cx="7711135" cy="658368"/>
-          </a:xfrm>
-          <a:prstGeom prst="rect">
+            <a:off x="540867" y="3337560"/>
+            <a:ext cx="3520440" cy="1325880"/>
+          </a:xfrm>
+          <a:prstGeom prst="roundRect">
             <a:avLst/>
           </a:prstGeom>
           <a:solidFill>
-            <a:srgbClr val="E8E6DC"/>
+            <a:srgbClr val="FFFFFF"/>
           </a:solidFill>
           <a:ln w="12700">
             <a:solidFill>
@@ -3976,52 +4221,178 @@
       </p:sp>
       <p:sp>
         <p:nvSpPr>
-          <p:cNvPr id="14" name="TextBox 13"/>
-          <p:cNvSpPr txBox="1"/>
-          <p:nvPr/>
-        </p:nvSpPr>
-        <p:spPr>
-          <a:xfrm>
-            <a:off x="3520439" y="2432304"/>
-            <a:ext cx="7528255" cy="658368"/>
-          </a:xfrm>
-          <a:prstGeom prst="rect">
-            <a:avLst/>
-          </a:prstGeom>
-          <a:noFill/>
-        </p:spPr>
-        <p:txBody>
-          <a:bodyPr wrap="square" anchor="ctr">
+          <p:cNvPr id="20" name="Rounded Rectangle 19"/>
+          <p:cNvSpPr/>
+          <p:nvPr/>
+        </p:nvSpPr>
+        <p:spPr>
+          <a:xfrm>
+            <a:off x="540867" y="3337560"/>
+            <a:ext cx="109728" cy="1325880"/>
+          </a:xfrm>
+          <a:prstGeom prst="roundRect">
+            <a:avLst/>
+          </a:prstGeom>
+          <a:solidFill>
+            <a:srgbClr val="D97757"/>
+          </a:solidFill>
+          <a:ln>
+            <a:noFill/>
+          </a:ln>
+          <a:effectLst/>
+        </p:spPr>
+        <p:style>
+          <a:lnRef idx="1">
+            <a:schemeClr val="accent1"/>
+          </a:lnRef>
+          <a:fillRef idx="3">
+            <a:schemeClr val="accent1"/>
+          </a:fillRef>
+          <a:effectRef idx="2">
+            <a:schemeClr val="accent1"/>
+          </a:effectRef>
+          <a:fontRef idx="minor">
+            <a:schemeClr val="lt1"/>
+          </a:fontRef>
+        </p:style>
+        <p:txBody>
+          <a:bodyPr rtlCol="0" anchor="ctr"/>
+          <a:lstStyle/>
+          <a:p>
+            <a:pPr algn="ctr"/>
+          </a:p>
+        </p:txBody>
+      </p:sp>
+      <p:sp>
+        <p:nvSpPr>
+          <p:cNvPr id="21" name="TextBox 20"/>
+          <p:cNvSpPr txBox="1"/>
+          <p:nvPr/>
+        </p:nvSpPr>
+        <p:spPr>
+          <a:xfrm>
+            <a:off x="796899" y="3502152"/>
+            <a:ext cx="3108960" cy="457200"/>
+          </a:xfrm>
+          <a:prstGeom prst="rect">
+            <a:avLst/>
+          </a:prstGeom>
+          <a:noFill/>
+        </p:spPr>
+        <p:txBody>
+          <a:bodyPr wrap="square" anchor="t">
             <a:spAutoFit/>
           </a:bodyPr>
           <a:lstStyle/>
           <a:p>
             <a:pPr algn="l">
-              <a:defRPr sz="1150" b="0">
+              <a:defRPr sz="1400" b="1">
                 <a:solidFill>
                   <a:srgbClr val="141413"/>
                 </a:solidFill>
+                <a:latin typeface="Poppins"/>
+              </a:defRPr>
+            </a:pPr>
+            <a:r>
+              <a:t>AML triage agent</a:t>
+            </a:r>
+          </a:p>
+        </p:txBody>
+      </p:sp>
+      <p:sp>
+        <p:nvSpPr>
+          <p:cNvPr id="22" name="TextBox 21"/>
+          <p:cNvSpPr txBox="1"/>
+          <p:nvPr/>
+        </p:nvSpPr>
+        <p:spPr>
+          <a:xfrm>
+            <a:off x="796899" y="3886200"/>
+            <a:ext cx="3108960" cy="704087"/>
+          </a:xfrm>
+          <a:prstGeom prst="rect">
+            <a:avLst/>
+          </a:prstGeom>
+          <a:noFill/>
+        </p:spPr>
+        <p:txBody>
+          <a:bodyPr wrap="square" anchor="t">
+            <a:spAutoFit/>
+          </a:bodyPr>
+          <a:lstStyle/>
+          <a:p>
+            <a:pPr algn="l">
+              <a:defRPr sz="1050" b="0">
+                <a:solidFill>
+                  <a:srgbClr val="5E5D59"/>
+                </a:solidFill>
                 <a:latin typeface="Lora"/>
               </a:defRPr>
             </a:pPr>
             <a:r>
-              <a:t>scikit-learn · XGBoost · SHAP</a:t>
-            </a:r>
-          </a:p>
-        </p:txBody>
-      </p:sp>
-      <p:sp>
-        <p:nvSpPr>
-          <p:cNvPr id="15" name="Rectangle 14"/>
+              <a:t>Optional · Month 11</a:t>
+            </a:r>
+          </a:p>
+        </p:txBody>
+      </p:sp>
+      <p:sp>
+        <p:nvSpPr>
+          <p:cNvPr id="23" name="Rounded Rectangle 22"/>
           <p:cNvSpPr/>
           <p:nvPr/>
         </p:nvSpPr>
         <p:spPr>
           <a:xfrm>
-            <a:off x="1097280" y="3218688"/>
-            <a:ext cx="2286000" cy="658368"/>
-          </a:xfrm>
-          <a:prstGeom prst="rect">
+            <a:off x="4335627" y="3337560"/>
+            <a:ext cx="3520440" cy="1325880"/>
+          </a:xfrm>
+          <a:prstGeom prst="roundRect">
+            <a:avLst/>
+          </a:prstGeom>
+          <a:solidFill>
+            <a:srgbClr val="FFFFFF"/>
+          </a:solidFill>
+          <a:ln w="12700">
+            <a:solidFill>
+              <a:srgbClr val="E8E6DC"/>
+            </a:solidFill>
+          </a:ln>
+          <a:effectLst/>
+        </p:spPr>
+        <p:style>
+          <a:lnRef idx="1">
+            <a:schemeClr val="accent1"/>
+          </a:lnRef>
+          <a:fillRef idx="3">
+            <a:schemeClr val="accent1"/>
+          </a:fillRef>
+          <a:effectRef idx="2">
+            <a:schemeClr val="accent1"/>
+          </a:effectRef>
+          <a:fontRef idx="minor">
+            <a:schemeClr val="lt1"/>
+          </a:fontRef>
+        </p:style>
+        <p:txBody>
+          <a:bodyPr rtlCol="0" anchor="ctr"/>
+          <a:lstStyle/>
+          <a:p>
+            <a:pPr algn="ctr"/>
+          </a:p>
+        </p:txBody>
+      </p:sp>
+      <p:sp>
+        <p:nvSpPr>
+          <p:cNvPr id="24" name="Rounded Rectangle 23"/>
+          <p:cNvSpPr/>
+          <p:nvPr/>
+        </p:nvSpPr>
+        <p:spPr>
+          <a:xfrm>
+            <a:off x="4335627" y="3337560"/>
+            <a:ext cx="109728" cy="1325880"/>
+          </a:xfrm>
+          <a:prstGeom prst="roundRect">
             <a:avLst/>
           </a:prstGeom>
           <a:solidFill>
@@ -4056,56 +4427,92 @@
       </p:sp>
       <p:sp>
         <p:nvSpPr>
-          <p:cNvPr id="16" name="TextBox 15"/>
-          <p:cNvSpPr txBox="1"/>
-          <p:nvPr/>
-        </p:nvSpPr>
-        <p:spPr>
-          <a:xfrm>
-            <a:off x="1234439" y="3218688"/>
-            <a:ext cx="2011680" cy="658368"/>
-          </a:xfrm>
-          <a:prstGeom prst="rect">
-            <a:avLst/>
-          </a:prstGeom>
-          <a:noFill/>
-        </p:spPr>
-        <p:txBody>
-          <a:bodyPr wrap="square" anchor="ctr">
+          <p:cNvPr id="25" name="TextBox 24"/>
+          <p:cNvSpPr txBox="1"/>
+          <p:nvPr/>
+        </p:nvSpPr>
+        <p:spPr>
+          <a:xfrm>
+            <a:off x="4591659" y="3502152"/>
+            <a:ext cx="3108960" cy="457200"/>
+          </a:xfrm>
+          <a:prstGeom prst="rect">
+            <a:avLst/>
+          </a:prstGeom>
+          <a:noFill/>
+        </p:spPr>
+        <p:txBody>
+          <a:bodyPr wrap="square" anchor="t">
             <a:spAutoFit/>
           </a:bodyPr>
           <a:lstStyle/>
           <a:p>
             <a:pPr algn="l">
-              <a:defRPr sz="1100" b="1">
-                <a:solidFill>
-                  <a:srgbClr val="FAF9F5"/>
+              <a:defRPr sz="1400" b="1">
+                <a:solidFill>
+                  <a:srgbClr val="141413"/>
+                </a:solidFill>
+                <a:latin typeface="Poppins"/>
+              </a:defRPr>
+            </a:pPr>
+            <a:r>
+              <a:t>BRD quality scorer</a:t>
+            </a:r>
+          </a:p>
+        </p:txBody>
+      </p:sp>
+      <p:sp>
+        <p:nvSpPr>
+          <p:cNvPr id="26" name="TextBox 25"/>
+          <p:cNvSpPr txBox="1"/>
+          <p:nvPr/>
+        </p:nvSpPr>
+        <p:spPr>
+          <a:xfrm>
+            <a:off x="4591659" y="3886200"/>
+            <a:ext cx="3108960" cy="704087"/>
+          </a:xfrm>
+          <a:prstGeom prst="rect">
+            <a:avLst/>
+          </a:prstGeom>
+          <a:noFill/>
+        </p:spPr>
+        <p:txBody>
+          <a:bodyPr wrap="square" anchor="t">
+            <a:spAutoFit/>
+          </a:bodyPr>
+          <a:lstStyle/>
+          <a:p>
+            <a:pPr algn="l">
+              <a:defRPr sz="1050" b="0">
+                <a:solidFill>
+                  <a:srgbClr val="5E5D59"/>
                 </a:solidFill>
                 <a:latin typeface="Lora"/>
               </a:defRPr>
             </a:pPr>
             <a:r>
-              <a:t>Month 5–6</a:t>
-            </a:r>
-          </a:p>
-        </p:txBody>
-      </p:sp>
-      <p:sp>
-        <p:nvSpPr>
-          <p:cNvPr id="17" name="Rectangle 16"/>
+              <a:t>Python · Month 1</a:t>
+            </a:r>
+          </a:p>
+        </p:txBody>
+      </p:sp>
+      <p:sp>
+        <p:nvSpPr>
+          <p:cNvPr id="27" name="Rounded Rectangle 26"/>
           <p:cNvSpPr/>
           <p:nvPr/>
         </p:nvSpPr>
         <p:spPr>
           <a:xfrm>
-            <a:off x="3383280" y="3218688"/>
-            <a:ext cx="7711135" cy="658368"/>
-          </a:xfrm>
-          <a:prstGeom prst="rect">
+            <a:off x="8130387" y="3337560"/>
+            <a:ext cx="3520440" cy="1325880"/>
+          </a:xfrm>
+          <a:prstGeom prst="roundRect">
             <a:avLst/>
           </a:prstGeom>
           <a:solidFill>
-            <a:srgbClr val="E8E6DC"/>
+            <a:srgbClr val="FFFFFF"/>
           </a:solidFill>
           <a:ln w="12700">
             <a:solidFill>
@@ -4138,56 +4545,20 @@
       </p:sp>
       <p:sp>
         <p:nvSpPr>
-          <p:cNvPr id="18" name="TextBox 17"/>
-          <p:cNvSpPr txBox="1"/>
-          <p:nvPr/>
-        </p:nvSpPr>
-        <p:spPr>
-          <a:xfrm>
-            <a:off x="3520439" y="3218688"/>
-            <a:ext cx="7528255" cy="658368"/>
-          </a:xfrm>
-          <a:prstGeom prst="rect">
-            <a:avLst/>
-          </a:prstGeom>
-          <a:noFill/>
-        </p:spPr>
-        <p:txBody>
-          <a:bodyPr wrap="square" anchor="ctr">
-            <a:spAutoFit/>
-          </a:bodyPr>
-          <a:lstStyle/>
-          <a:p>
-            <a:pPr algn="l">
-              <a:defRPr sz="1150" b="0">
-                <a:solidFill>
-                  <a:srgbClr val="141413"/>
-                </a:solidFill>
-                <a:latin typeface="Lora"/>
-              </a:defRPr>
-            </a:pPr>
-            <a:r>
-              <a:t>Embeddings · vector DB · NLP</a:t>
-            </a:r>
-          </a:p>
-        </p:txBody>
-      </p:sp>
-      <p:sp>
-        <p:nvSpPr>
-          <p:cNvPr id="19" name="Rectangle 18"/>
+          <p:cNvPr id="28" name="Rounded Rectangle 27"/>
           <p:cNvSpPr/>
           <p:nvPr/>
         </p:nvSpPr>
         <p:spPr>
           <a:xfrm>
-            <a:off x="1097280" y="4005072"/>
-            <a:ext cx="2286000" cy="658368"/>
-          </a:xfrm>
-          <a:prstGeom prst="rect">
+            <a:off x="8130387" y="3337560"/>
+            <a:ext cx="109728" cy="1325880"/>
+          </a:xfrm>
+          <a:prstGeom prst="roundRect">
             <a:avLst/>
           </a:prstGeom>
           <a:solidFill>
-            <a:srgbClr val="C46686"/>
+            <a:srgbClr val="6A9BCC"/>
           </a:solidFill>
           <a:ln>
             <a:noFill/>
@@ -4218,442 +4589,72 @@
       </p:sp>
       <p:sp>
         <p:nvSpPr>
-          <p:cNvPr id="20" name="TextBox 19"/>
-          <p:cNvSpPr txBox="1"/>
-          <p:nvPr/>
-        </p:nvSpPr>
-        <p:spPr>
-          <a:xfrm>
-            <a:off x="1234439" y="4005072"/>
-            <a:ext cx="2011680" cy="658368"/>
-          </a:xfrm>
-          <a:prstGeom prst="rect">
-            <a:avLst/>
-          </a:prstGeom>
-          <a:noFill/>
-        </p:spPr>
-        <p:txBody>
-          <a:bodyPr wrap="square" anchor="ctr">
+          <p:cNvPr id="29" name="TextBox 28"/>
+          <p:cNvSpPr txBox="1"/>
+          <p:nvPr/>
+        </p:nvSpPr>
+        <p:spPr>
+          <a:xfrm>
+            <a:off x="8386419" y="3502152"/>
+            <a:ext cx="3108960" cy="457200"/>
+          </a:xfrm>
+          <a:prstGeom prst="rect">
+            <a:avLst/>
+          </a:prstGeom>
+          <a:noFill/>
+        </p:spPr>
+        <p:txBody>
+          <a:bodyPr wrap="square" anchor="t">
             <a:spAutoFit/>
           </a:bodyPr>
           <a:lstStyle/>
           <a:p>
             <a:pPr algn="l">
-              <a:defRPr sz="1100" b="1">
-                <a:solidFill>
-                  <a:srgbClr val="FAF9F5"/>
+              <a:defRPr sz="1400" b="1">
+                <a:solidFill>
+                  <a:srgbClr val="141413"/>
+                </a:solidFill>
+                <a:latin typeface="Poppins"/>
+              </a:defRPr>
+            </a:pPr>
+            <a:r>
+              <a:t>Lending KPI SQL</a:t>
+            </a:r>
+          </a:p>
+        </p:txBody>
+      </p:sp>
+      <p:sp>
+        <p:nvSpPr>
+          <p:cNvPr id="30" name="TextBox 29"/>
+          <p:cNvSpPr txBox="1"/>
+          <p:nvPr/>
+        </p:nvSpPr>
+        <p:spPr>
+          <a:xfrm>
+            <a:off x="8386419" y="3886200"/>
+            <a:ext cx="3108960" cy="704087"/>
+          </a:xfrm>
+          <a:prstGeom prst="rect">
+            <a:avLst/>
+          </a:prstGeom>
+          <a:noFill/>
+        </p:spPr>
+        <p:txBody>
+          <a:bodyPr wrap="square" anchor="t">
+            <a:spAutoFit/>
+          </a:bodyPr>
+          <a:lstStyle/>
+          <a:p>
+            <a:pPr algn="l">
+              <a:defRPr sz="1050" b="0">
+                <a:solidFill>
+                  <a:srgbClr val="5E5D59"/>
                 </a:solidFill>
                 <a:latin typeface="Lora"/>
               </a:defRPr>
             </a:pPr>
             <a:r>
-              <a:t>Month 7–8</a:t>
-            </a:r>
-          </a:p>
-        </p:txBody>
-      </p:sp>
-      <p:sp>
-        <p:nvSpPr>
-          <p:cNvPr id="21" name="Rectangle 20"/>
-          <p:cNvSpPr/>
-          <p:nvPr/>
-        </p:nvSpPr>
-        <p:spPr>
-          <a:xfrm>
-            <a:off x="3383280" y="4005072"/>
-            <a:ext cx="7711135" cy="658368"/>
-          </a:xfrm>
-          <a:prstGeom prst="rect">
-            <a:avLst/>
-          </a:prstGeom>
-          <a:solidFill>
-            <a:srgbClr val="E8E6DC"/>
-          </a:solidFill>
-          <a:ln w="12700">
-            <a:solidFill>
-              <a:srgbClr val="E8E6DC"/>
-            </a:solidFill>
-          </a:ln>
-          <a:effectLst/>
-        </p:spPr>
-        <p:style>
-          <a:lnRef idx="1">
-            <a:schemeClr val="accent1"/>
-          </a:lnRef>
-          <a:fillRef idx="3">
-            <a:schemeClr val="accent1"/>
-          </a:fillRef>
-          <a:effectRef idx="2">
-            <a:schemeClr val="accent1"/>
-          </a:effectRef>
-          <a:fontRef idx="minor">
-            <a:schemeClr val="lt1"/>
-          </a:fontRef>
-        </p:style>
-        <p:txBody>
-          <a:bodyPr rtlCol="0" anchor="ctr"/>
-          <a:lstStyle/>
-          <a:p>
-            <a:pPr algn="ctr"/>
-          </a:p>
-        </p:txBody>
-      </p:sp>
-      <p:sp>
-        <p:nvSpPr>
-          <p:cNvPr id="22" name="TextBox 21"/>
-          <p:cNvSpPr txBox="1"/>
-          <p:nvPr/>
-        </p:nvSpPr>
-        <p:spPr>
-          <a:xfrm>
-            <a:off x="3520439" y="4005072"/>
-            <a:ext cx="7528255" cy="658368"/>
-          </a:xfrm>
-          <a:prstGeom prst="rect">
-            <a:avLst/>
-          </a:prstGeom>
-          <a:noFill/>
-        </p:spPr>
-        <p:txBody>
-          <a:bodyPr wrap="square" anchor="ctr">
-            <a:spAutoFit/>
-          </a:bodyPr>
-          <a:lstStyle/>
-          <a:p>
-            <a:pPr algn="l">
-              <a:defRPr sz="1150" b="0">
-                <a:solidFill>
-                  <a:srgbClr val="141413"/>
-                </a:solidFill>
-                <a:latin typeface="Lora"/>
-              </a:defRPr>
-            </a:pPr>
-            <a:r>
-              <a:t>LLM · RAG · LangGraph · eval</a:t>
-            </a:r>
-          </a:p>
-        </p:txBody>
-      </p:sp>
-      <p:sp>
-        <p:nvSpPr>
-          <p:cNvPr id="23" name="Rectangle 22"/>
-          <p:cNvSpPr/>
-          <p:nvPr/>
-        </p:nvSpPr>
-        <p:spPr>
-          <a:xfrm>
-            <a:off x="1097280" y="4791456"/>
-            <a:ext cx="2286000" cy="658368"/>
-          </a:xfrm>
-          <a:prstGeom prst="rect">
-            <a:avLst/>
-          </a:prstGeom>
-          <a:solidFill>
-            <a:srgbClr val="D97757"/>
-          </a:solidFill>
-          <a:ln>
-            <a:noFill/>
-          </a:ln>
-          <a:effectLst/>
-        </p:spPr>
-        <p:style>
-          <a:lnRef idx="1">
-            <a:schemeClr val="accent1"/>
-          </a:lnRef>
-          <a:fillRef idx="3">
-            <a:schemeClr val="accent1"/>
-          </a:fillRef>
-          <a:effectRef idx="2">
-            <a:schemeClr val="accent1"/>
-          </a:effectRef>
-          <a:fontRef idx="minor">
-            <a:schemeClr val="lt1"/>
-          </a:fontRef>
-        </p:style>
-        <p:txBody>
-          <a:bodyPr rtlCol="0" anchor="ctr"/>
-          <a:lstStyle/>
-          <a:p>
-            <a:pPr algn="ctr"/>
-          </a:p>
-        </p:txBody>
-      </p:sp>
-      <p:sp>
-        <p:nvSpPr>
-          <p:cNvPr id="24" name="TextBox 23"/>
-          <p:cNvSpPr txBox="1"/>
-          <p:nvPr/>
-        </p:nvSpPr>
-        <p:spPr>
-          <a:xfrm>
-            <a:off x="1234439" y="4791456"/>
-            <a:ext cx="2011680" cy="658368"/>
-          </a:xfrm>
-          <a:prstGeom prst="rect">
-            <a:avLst/>
-          </a:prstGeom>
-          <a:noFill/>
-        </p:spPr>
-        <p:txBody>
-          <a:bodyPr wrap="square" anchor="ctr">
-            <a:spAutoFit/>
-          </a:bodyPr>
-          <a:lstStyle/>
-          <a:p>
-            <a:pPr algn="l">
-              <a:defRPr sz="1100" b="1">
-                <a:solidFill>
-                  <a:srgbClr val="FAF9F5"/>
-                </a:solidFill>
-                <a:latin typeface="Lora"/>
-              </a:defRPr>
-            </a:pPr>
-            <a:r>
-              <a:t>Month 9–10</a:t>
-            </a:r>
-          </a:p>
-        </p:txBody>
-      </p:sp>
-      <p:sp>
-        <p:nvSpPr>
-          <p:cNvPr id="25" name="Rectangle 24"/>
-          <p:cNvSpPr/>
-          <p:nvPr/>
-        </p:nvSpPr>
-        <p:spPr>
-          <a:xfrm>
-            <a:off x="3383280" y="4791456"/>
-            <a:ext cx="7711135" cy="658368"/>
-          </a:xfrm>
-          <a:prstGeom prst="rect">
-            <a:avLst/>
-          </a:prstGeom>
-          <a:solidFill>
-            <a:srgbClr val="E8E6DC"/>
-          </a:solidFill>
-          <a:ln w="12700">
-            <a:solidFill>
-              <a:srgbClr val="E8E6DC"/>
-            </a:solidFill>
-          </a:ln>
-          <a:effectLst/>
-        </p:spPr>
-        <p:style>
-          <a:lnRef idx="1">
-            <a:schemeClr val="accent1"/>
-          </a:lnRef>
-          <a:fillRef idx="3">
-            <a:schemeClr val="accent1"/>
-          </a:fillRef>
-          <a:effectRef idx="2">
-            <a:schemeClr val="accent1"/>
-          </a:effectRef>
-          <a:fontRef idx="minor">
-            <a:schemeClr val="lt1"/>
-          </a:fontRef>
-        </p:style>
-        <p:txBody>
-          <a:bodyPr rtlCol="0" anchor="ctr"/>
-          <a:lstStyle/>
-          <a:p>
-            <a:pPr algn="ctr"/>
-          </a:p>
-        </p:txBody>
-      </p:sp>
-      <p:sp>
-        <p:nvSpPr>
-          <p:cNvPr id="26" name="TextBox 25"/>
-          <p:cNvSpPr txBox="1"/>
-          <p:nvPr/>
-        </p:nvSpPr>
-        <p:spPr>
-          <a:xfrm>
-            <a:off x="3520439" y="4791456"/>
-            <a:ext cx="7528255" cy="658368"/>
-          </a:xfrm>
-          <a:prstGeom prst="rect">
-            <a:avLst/>
-          </a:prstGeom>
-          <a:noFill/>
-        </p:spPr>
-        <p:txBody>
-          <a:bodyPr wrap="square" anchor="ctr">
-            <a:spAutoFit/>
-          </a:bodyPr>
-          <a:lstStyle/>
-          <a:p>
-            <a:pPr algn="l">
-              <a:defRPr sz="1150" b="0">
-                <a:solidFill>
-                  <a:srgbClr val="141413"/>
-                </a:solidFill>
-                <a:latin typeface="Lora"/>
-              </a:defRPr>
-            </a:pPr>
-            <a:r>
-              <a:t>FastAPI · Docker · guardrails</a:t>
-            </a:r>
-          </a:p>
-        </p:txBody>
-      </p:sp>
-      <p:sp>
-        <p:nvSpPr>
-          <p:cNvPr id="27" name="Rectangle 26"/>
-          <p:cNvSpPr/>
-          <p:nvPr/>
-        </p:nvSpPr>
-        <p:spPr>
-          <a:xfrm>
-            <a:off x="1097280" y="5577840"/>
-            <a:ext cx="2286000" cy="658368"/>
-          </a:xfrm>
-          <a:prstGeom prst="rect">
-            <a:avLst/>
-          </a:prstGeom>
-          <a:solidFill>
-            <a:srgbClr val="141413"/>
-          </a:solidFill>
-          <a:ln>
-            <a:noFill/>
-          </a:ln>
-          <a:effectLst/>
-        </p:spPr>
-        <p:style>
-          <a:lnRef idx="1">
-            <a:schemeClr val="accent1"/>
-          </a:lnRef>
-          <a:fillRef idx="3">
-            <a:schemeClr val="accent1"/>
-          </a:fillRef>
-          <a:effectRef idx="2">
-            <a:schemeClr val="accent1"/>
-          </a:effectRef>
-          <a:fontRef idx="minor">
-            <a:schemeClr val="lt1"/>
-          </a:fontRef>
-        </p:style>
-        <p:txBody>
-          <a:bodyPr rtlCol="0" anchor="ctr"/>
-          <a:lstStyle/>
-          <a:p>
-            <a:pPr algn="ctr"/>
-          </a:p>
-        </p:txBody>
-      </p:sp>
-      <p:sp>
-        <p:nvSpPr>
-          <p:cNvPr id="28" name="TextBox 27"/>
-          <p:cNvSpPr txBox="1"/>
-          <p:nvPr/>
-        </p:nvSpPr>
-        <p:spPr>
-          <a:xfrm>
-            <a:off x="1234439" y="5577840"/>
-            <a:ext cx="2011680" cy="658368"/>
-          </a:xfrm>
-          <a:prstGeom prst="rect">
-            <a:avLst/>
-          </a:prstGeom>
-          <a:noFill/>
-        </p:spPr>
-        <p:txBody>
-          <a:bodyPr wrap="square" anchor="ctr">
-            <a:spAutoFit/>
-          </a:bodyPr>
-          <a:lstStyle/>
-          <a:p>
-            <a:pPr algn="l">
-              <a:defRPr sz="1100" b="1">
-                <a:solidFill>
-                  <a:srgbClr val="FAF9F5"/>
-                </a:solidFill>
-                <a:latin typeface="Lora"/>
-              </a:defRPr>
-            </a:pPr>
-            <a:r>
-              <a:t>Always</a:t>
-            </a:r>
-          </a:p>
-        </p:txBody>
-      </p:sp>
-      <p:sp>
-        <p:nvSpPr>
-          <p:cNvPr id="29" name="Rectangle 28"/>
-          <p:cNvSpPr/>
-          <p:nvPr/>
-        </p:nvSpPr>
-        <p:spPr>
-          <a:xfrm>
-            <a:off x="3383280" y="5577840"/>
-            <a:ext cx="7711135" cy="658368"/>
-          </a:xfrm>
-          <a:prstGeom prst="rect">
-            <a:avLst/>
-          </a:prstGeom>
-          <a:solidFill>
-            <a:srgbClr val="E8E6DC"/>
-          </a:solidFill>
-          <a:ln w="12700">
-            <a:solidFill>
-              <a:srgbClr val="E8E6DC"/>
-            </a:solidFill>
-          </a:ln>
-          <a:effectLst/>
-        </p:spPr>
-        <p:style>
-          <a:lnRef idx="1">
-            <a:schemeClr val="accent1"/>
-          </a:lnRef>
-          <a:fillRef idx="3">
-            <a:schemeClr val="accent1"/>
-          </a:fillRef>
-          <a:effectRef idx="2">
-            <a:schemeClr val="accent1"/>
-          </a:effectRef>
-          <a:fontRef idx="minor">
-            <a:schemeClr val="lt1"/>
-          </a:fontRef>
-        </p:style>
-        <p:txBody>
-          <a:bodyPr rtlCol="0" anchor="ctr"/>
-          <a:lstStyle/>
-          <a:p>
-            <a:pPr algn="ctr"/>
-          </a:p>
-        </p:txBody>
-      </p:sp>
-      <p:sp>
-        <p:nvSpPr>
-          <p:cNvPr id="30" name="TextBox 29"/>
-          <p:cNvSpPr txBox="1"/>
-          <p:nvPr/>
-        </p:nvSpPr>
-        <p:spPr>
-          <a:xfrm>
-            <a:off x="3520439" y="5577840"/>
-            <a:ext cx="7528255" cy="658368"/>
-          </a:xfrm>
-          <a:prstGeom prst="rect">
-            <a:avLst/>
-          </a:prstGeom>
-          <a:noFill/>
-        </p:spPr>
-        <p:txBody>
-          <a:bodyPr wrap="square" anchor="ctr">
-            <a:spAutoFit/>
-          </a:bodyPr>
-          <a:lstStyle/>
-          <a:p>
-            <a:pPr algn="l">
-              <a:defRPr sz="1150" b="0">
-                <a:solidFill>
-                  <a:srgbClr val="141413"/>
-                </a:solidFill>
-                <a:latin typeface="Lora"/>
-              </a:defRPr>
-            </a:pPr>
-            <a:r>
-              <a:t>Banking metrics · governance · English</a:t>
+              <a:t>SQL · Month 2</a:t>
             </a:r>
           </a:p>
         </p:txBody>
@@ -4911,7 +4912,7 @@
               </a:defRPr>
             </a:pPr>
             <a:r>
-              <a:t>KNOW WHEN YOU'RE READY TO APPLY</a:t>
+              <a:t>SYLLABUS SUMMARY</a:t>
             </a:r>
           </a:p>
         </p:txBody>
@@ -4947,23 +4948,185 @@
               </a:defRPr>
             </a:pPr>
             <a:r>
-              <a:t>Milestone checklist</a:t>
-            </a:r>
-          </a:p>
-        </p:txBody>
-      </p:sp>
-      <p:sp>
-        <p:nvSpPr>
-          <p:cNvPr id="7" name="Rounded Rectangle 6"/>
+              <a:t>What to learn — core stack</a:t>
+            </a:r>
+          </a:p>
+        </p:txBody>
+      </p:sp>
+      <p:sp>
+        <p:nvSpPr>
+          <p:cNvPr id="7" name="Rectangle 6"/>
           <p:cNvSpPr/>
           <p:nvPr/>
         </p:nvSpPr>
         <p:spPr>
           <a:xfrm>
-            <a:off x="495147" y="1783080"/>
-            <a:ext cx="3520440" cy="1508760"/>
-          </a:xfrm>
-          <a:prstGeom prst="roundRect">
+            <a:off x="1097280" y="1645920"/>
+            <a:ext cx="2286000" cy="658368"/>
+          </a:xfrm>
+          <a:prstGeom prst="rect">
+            <a:avLst/>
+          </a:prstGeom>
+          <a:solidFill>
+            <a:srgbClr val="6A9BCC"/>
+          </a:solidFill>
+          <a:ln>
+            <a:noFill/>
+          </a:ln>
+          <a:effectLst/>
+        </p:spPr>
+        <p:style>
+          <a:lnRef idx="1">
+            <a:schemeClr val="accent1"/>
+          </a:lnRef>
+          <a:fillRef idx="3">
+            <a:schemeClr val="accent1"/>
+          </a:fillRef>
+          <a:effectRef idx="2">
+            <a:schemeClr val="accent1"/>
+          </a:effectRef>
+          <a:fontRef idx="minor">
+            <a:schemeClr val="lt1"/>
+          </a:fontRef>
+        </p:style>
+        <p:txBody>
+          <a:bodyPr rtlCol="0" anchor="ctr"/>
+          <a:lstStyle/>
+          <a:p>
+            <a:pPr algn="ctr"/>
+          </a:p>
+        </p:txBody>
+      </p:sp>
+      <p:sp>
+        <p:nvSpPr>
+          <p:cNvPr id="8" name="TextBox 7"/>
+          <p:cNvSpPr txBox="1"/>
+          <p:nvPr/>
+        </p:nvSpPr>
+        <p:spPr>
+          <a:xfrm>
+            <a:off x="1234439" y="1645920"/>
+            <a:ext cx="2011680" cy="658368"/>
+          </a:xfrm>
+          <a:prstGeom prst="rect">
+            <a:avLst/>
+          </a:prstGeom>
+          <a:noFill/>
+        </p:spPr>
+        <p:txBody>
+          <a:bodyPr wrap="square" anchor="ctr">
+            <a:spAutoFit/>
+          </a:bodyPr>
+          <a:lstStyle/>
+          <a:p>
+            <a:pPr algn="l">
+              <a:defRPr sz="1100" b="1">
+                <a:solidFill>
+                  <a:srgbClr val="FAF9F5"/>
+                </a:solidFill>
+                <a:latin typeface="Lora"/>
+              </a:defRPr>
+            </a:pPr>
+            <a:r>
+              <a:t>Month 1–2</a:t>
+            </a:r>
+          </a:p>
+        </p:txBody>
+      </p:sp>
+      <p:sp>
+        <p:nvSpPr>
+          <p:cNvPr id="9" name="Rectangle 8"/>
+          <p:cNvSpPr/>
+          <p:nvPr/>
+        </p:nvSpPr>
+        <p:spPr>
+          <a:xfrm>
+            <a:off x="3383280" y="1645920"/>
+            <a:ext cx="7711135" cy="658368"/>
+          </a:xfrm>
+          <a:prstGeom prst="rect">
+            <a:avLst/>
+          </a:prstGeom>
+          <a:solidFill>
+            <a:srgbClr val="E8E6DC"/>
+          </a:solidFill>
+          <a:ln w="12700">
+            <a:solidFill>
+              <a:srgbClr val="E8E6DC"/>
+            </a:solidFill>
+          </a:ln>
+          <a:effectLst/>
+        </p:spPr>
+        <p:style>
+          <a:lnRef idx="1">
+            <a:schemeClr val="accent1"/>
+          </a:lnRef>
+          <a:fillRef idx="3">
+            <a:schemeClr val="accent1"/>
+          </a:fillRef>
+          <a:effectRef idx="2">
+            <a:schemeClr val="accent1"/>
+          </a:effectRef>
+          <a:fontRef idx="minor">
+            <a:schemeClr val="lt1"/>
+          </a:fontRef>
+        </p:style>
+        <p:txBody>
+          <a:bodyPr rtlCol="0" anchor="ctr"/>
+          <a:lstStyle/>
+          <a:p>
+            <a:pPr algn="ctr"/>
+          </a:p>
+        </p:txBody>
+      </p:sp>
+      <p:sp>
+        <p:nvSpPr>
+          <p:cNvPr id="10" name="TextBox 9"/>
+          <p:cNvSpPr txBox="1"/>
+          <p:nvPr/>
+        </p:nvSpPr>
+        <p:spPr>
+          <a:xfrm>
+            <a:off x="3520439" y="1645920"/>
+            <a:ext cx="7528255" cy="658368"/>
+          </a:xfrm>
+          <a:prstGeom prst="rect">
+            <a:avLst/>
+          </a:prstGeom>
+          <a:noFill/>
+        </p:spPr>
+        <p:txBody>
+          <a:bodyPr wrap="square" anchor="ctr">
+            <a:spAutoFit/>
+          </a:bodyPr>
+          <a:lstStyle/>
+          <a:p>
+            <a:pPr algn="l">
+              <a:defRPr sz="1150" b="0">
+                <a:solidFill>
+                  <a:srgbClr val="141413"/>
+                </a:solidFill>
+                <a:latin typeface="Lora"/>
+              </a:defRPr>
+            </a:pPr>
+            <a:r>
+              <a:t>Python · Git · SQL · pandas</a:t>
+            </a:r>
+          </a:p>
+        </p:txBody>
+      </p:sp>
+      <p:sp>
+        <p:nvSpPr>
+          <p:cNvPr id="11" name="Rectangle 10"/>
+          <p:cNvSpPr/>
+          <p:nvPr/>
+        </p:nvSpPr>
+        <p:spPr>
+          <a:xfrm>
+            <a:off x="1097280" y="2432304"/>
+            <a:ext cx="2286000" cy="658368"/>
+          </a:xfrm>
+          <a:prstGeom prst="rect">
             <a:avLst/>
           </a:prstGeom>
           <a:solidFill>
@@ -4998,128 +5161,138 @@
       </p:sp>
       <p:sp>
         <p:nvSpPr>
-          <p:cNvPr id="8" name="TextBox 7"/>
-          <p:cNvSpPr txBox="1"/>
-          <p:nvPr/>
-        </p:nvSpPr>
-        <p:spPr>
-          <a:xfrm>
-            <a:off x="723747" y="1920240"/>
-            <a:ext cx="3063240" cy="640080"/>
-          </a:xfrm>
-          <a:prstGeom prst="rect">
-            <a:avLst/>
-          </a:prstGeom>
-          <a:noFill/>
-        </p:spPr>
-        <p:txBody>
-          <a:bodyPr wrap="square" anchor="t">
+          <p:cNvPr id="12" name="TextBox 11"/>
+          <p:cNvSpPr txBox="1"/>
+          <p:nvPr/>
+        </p:nvSpPr>
+        <p:spPr>
+          <a:xfrm>
+            <a:off x="1234439" y="2432304"/>
+            <a:ext cx="2011680" cy="658368"/>
+          </a:xfrm>
+          <a:prstGeom prst="rect">
+            <a:avLst/>
+          </a:prstGeom>
+          <a:noFill/>
+        </p:spPr>
+        <p:txBody>
+          <a:bodyPr wrap="square" anchor="ctr">
             <a:spAutoFit/>
           </a:bodyPr>
           <a:lstStyle/>
           <a:p>
             <a:pPr algn="l">
-              <a:defRPr sz="2800" b="1">
+              <a:defRPr sz="1100" b="1">
                 <a:solidFill>
                   <a:srgbClr val="FAF9F5"/>
                 </a:solidFill>
-                <a:latin typeface="Poppins"/>
-              </a:defRPr>
-            </a:pPr>
-            <a:r>
-              <a:t>✓</a:t>
-            </a:r>
-          </a:p>
-        </p:txBody>
-      </p:sp>
-      <p:sp>
-        <p:nvSpPr>
-          <p:cNvPr id="9" name="TextBox 8"/>
-          <p:cNvSpPr txBox="1"/>
-          <p:nvPr/>
-        </p:nvSpPr>
-        <p:spPr>
-          <a:xfrm>
-            <a:off x="723747" y="2560320"/>
-            <a:ext cx="3063240" cy="365760"/>
-          </a:xfrm>
-          <a:prstGeom prst="rect">
-            <a:avLst/>
-          </a:prstGeom>
-          <a:noFill/>
-        </p:spPr>
-        <p:txBody>
-          <a:bodyPr wrap="square" anchor="t">
+                <a:latin typeface="Lora"/>
+              </a:defRPr>
+            </a:pPr>
+            <a:r>
+              <a:t>Month 3–5</a:t>
+            </a:r>
+          </a:p>
+        </p:txBody>
+      </p:sp>
+      <p:sp>
+        <p:nvSpPr>
+          <p:cNvPr id="13" name="Rectangle 12"/>
+          <p:cNvSpPr/>
+          <p:nvPr/>
+        </p:nvSpPr>
+        <p:spPr>
+          <a:xfrm>
+            <a:off x="3383280" y="2432304"/>
+            <a:ext cx="7711135" cy="658368"/>
+          </a:xfrm>
+          <a:prstGeom prst="rect">
+            <a:avLst/>
+          </a:prstGeom>
+          <a:solidFill>
+            <a:srgbClr val="E8E6DC"/>
+          </a:solidFill>
+          <a:ln w="12700">
+            <a:solidFill>
+              <a:srgbClr val="E8E6DC"/>
+            </a:solidFill>
+          </a:ln>
+          <a:effectLst/>
+        </p:spPr>
+        <p:style>
+          <a:lnRef idx="1">
+            <a:schemeClr val="accent1"/>
+          </a:lnRef>
+          <a:fillRef idx="3">
+            <a:schemeClr val="accent1"/>
+          </a:fillRef>
+          <a:effectRef idx="2">
+            <a:schemeClr val="accent1"/>
+          </a:effectRef>
+          <a:fontRef idx="minor">
+            <a:schemeClr val="lt1"/>
+          </a:fontRef>
+        </p:style>
+        <p:txBody>
+          <a:bodyPr rtlCol="0" anchor="ctr"/>
+          <a:lstStyle/>
+          <a:p>
+            <a:pPr algn="ctr"/>
+          </a:p>
+        </p:txBody>
+      </p:sp>
+      <p:sp>
+        <p:nvSpPr>
+          <p:cNvPr id="14" name="TextBox 13"/>
+          <p:cNvSpPr txBox="1"/>
+          <p:nvPr/>
+        </p:nvSpPr>
+        <p:spPr>
+          <a:xfrm>
+            <a:off x="3520439" y="2432304"/>
+            <a:ext cx="7528255" cy="658368"/>
+          </a:xfrm>
+          <a:prstGeom prst="rect">
+            <a:avLst/>
+          </a:prstGeom>
+          <a:noFill/>
+        </p:spPr>
+        <p:txBody>
+          <a:bodyPr wrap="square" anchor="ctr">
             <a:spAutoFit/>
           </a:bodyPr>
           <a:lstStyle/>
           <a:p>
             <a:pPr algn="l">
-              <a:defRPr sz="1300" b="1">
-                <a:solidFill>
-                  <a:srgbClr val="FAF9F5"/>
+              <a:defRPr sz="1150" b="0">
+                <a:solidFill>
+                  <a:srgbClr val="141413"/>
                 </a:solidFill>
                 <a:latin typeface="Lora"/>
               </a:defRPr>
             </a:pPr>
             <a:r>
-              <a:t>Python + SQL</a:t>
-            </a:r>
-          </a:p>
-        </p:txBody>
-      </p:sp>
-      <p:sp>
-        <p:nvSpPr>
-          <p:cNvPr id="10" name="TextBox 9"/>
-          <p:cNvSpPr txBox="1"/>
-          <p:nvPr/>
-        </p:nvSpPr>
-        <p:spPr>
-          <a:xfrm>
-            <a:off x="723747" y="2926080"/>
-            <a:ext cx="3063240" cy="320040"/>
-          </a:xfrm>
-          <a:prstGeom prst="rect">
-            <a:avLst/>
-          </a:prstGeom>
-          <a:noFill/>
-        </p:spPr>
-        <p:txBody>
-          <a:bodyPr wrap="square" anchor="t">
-            <a:spAutoFit/>
-          </a:bodyPr>
-          <a:lstStyle/>
-          <a:p>
-            <a:pPr algn="l">
-              <a:defRPr sz="1000" b="0">
-                <a:solidFill>
-                  <a:srgbClr val="B0AEA5"/>
-                </a:solidFill>
-                <a:latin typeface="Lora"/>
-              </a:defRPr>
-            </a:pPr>
-            <a:r>
-              <a:t>Month 2</a:t>
-            </a:r>
-          </a:p>
-        </p:txBody>
-      </p:sp>
-      <p:sp>
-        <p:nvSpPr>
-          <p:cNvPr id="11" name="Rounded Rectangle 10"/>
+              <a:t>scikit-learn · XGBoost · SHAP</a:t>
+            </a:r>
+          </a:p>
+        </p:txBody>
+      </p:sp>
+      <p:sp>
+        <p:nvSpPr>
+          <p:cNvPr id="15" name="Rectangle 14"/>
           <p:cNvSpPr/>
           <p:nvPr/>
         </p:nvSpPr>
         <p:spPr>
           <a:xfrm>
-            <a:off x="4335627" y="1783080"/>
-            <a:ext cx="3520440" cy="1508760"/>
-          </a:xfrm>
-          <a:prstGeom prst="roundRect">
+            <a:off x="1097280" y="3218688"/>
+            <a:ext cx="2286000" cy="658368"/>
+          </a:xfrm>
+          <a:prstGeom prst="rect">
             <a:avLst/>
           </a:prstGeom>
           <a:solidFill>
-            <a:srgbClr val="6A9BCC"/>
+            <a:srgbClr val="BCD1CA"/>
           </a:solidFill>
           <a:ln>
             <a:noFill/>
@@ -5150,124 +5323,134 @@
       </p:sp>
       <p:sp>
         <p:nvSpPr>
-          <p:cNvPr id="12" name="TextBox 11"/>
-          <p:cNvSpPr txBox="1"/>
-          <p:nvPr/>
-        </p:nvSpPr>
-        <p:spPr>
-          <a:xfrm>
-            <a:off x="4564227" y="1920240"/>
-            <a:ext cx="3063240" cy="640080"/>
-          </a:xfrm>
-          <a:prstGeom prst="rect">
-            <a:avLst/>
-          </a:prstGeom>
-          <a:noFill/>
-        </p:spPr>
-        <p:txBody>
-          <a:bodyPr wrap="square" anchor="t">
+          <p:cNvPr id="16" name="TextBox 15"/>
+          <p:cNvSpPr txBox="1"/>
+          <p:nvPr/>
+        </p:nvSpPr>
+        <p:spPr>
+          <a:xfrm>
+            <a:off x="1234439" y="3218688"/>
+            <a:ext cx="2011680" cy="658368"/>
+          </a:xfrm>
+          <a:prstGeom prst="rect">
+            <a:avLst/>
+          </a:prstGeom>
+          <a:noFill/>
+        </p:spPr>
+        <p:txBody>
+          <a:bodyPr wrap="square" anchor="ctr">
             <a:spAutoFit/>
           </a:bodyPr>
           <a:lstStyle/>
           <a:p>
             <a:pPr algn="l">
-              <a:defRPr sz="2800" b="1">
+              <a:defRPr sz="1100" b="1">
                 <a:solidFill>
                   <a:srgbClr val="FAF9F5"/>
                 </a:solidFill>
-                <a:latin typeface="Poppins"/>
-              </a:defRPr>
-            </a:pPr>
-            <a:r>
-              <a:t>✓</a:t>
-            </a:r>
-          </a:p>
-        </p:txBody>
-      </p:sp>
-      <p:sp>
-        <p:nvSpPr>
-          <p:cNvPr id="13" name="TextBox 12"/>
-          <p:cNvSpPr txBox="1"/>
-          <p:nvPr/>
-        </p:nvSpPr>
-        <p:spPr>
-          <a:xfrm>
-            <a:off x="4564227" y="2560320"/>
-            <a:ext cx="3063240" cy="365760"/>
-          </a:xfrm>
-          <a:prstGeom prst="rect">
-            <a:avLst/>
-          </a:prstGeom>
-          <a:noFill/>
-        </p:spPr>
-        <p:txBody>
-          <a:bodyPr wrap="square" anchor="t">
+                <a:latin typeface="Lora"/>
+              </a:defRPr>
+            </a:pPr>
+            <a:r>
+              <a:t>Month 5–6</a:t>
+            </a:r>
+          </a:p>
+        </p:txBody>
+      </p:sp>
+      <p:sp>
+        <p:nvSpPr>
+          <p:cNvPr id="17" name="Rectangle 16"/>
+          <p:cNvSpPr/>
+          <p:nvPr/>
+        </p:nvSpPr>
+        <p:spPr>
+          <a:xfrm>
+            <a:off x="3383280" y="3218688"/>
+            <a:ext cx="7711135" cy="658368"/>
+          </a:xfrm>
+          <a:prstGeom prst="rect">
+            <a:avLst/>
+          </a:prstGeom>
+          <a:solidFill>
+            <a:srgbClr val="E8E6DC"/>
+          </a:solidFill>
+          <a:ln w="12700">
+            <a:solidFill>
+              <a:srgbClr val="E8E6DC"/>
+            </a:solidFill>
+          </a:ln>
+          <a:effectLst/>
+        </p:spPr>
+        <p:style>
+          <a:lnRef idx="1">
+            <a:schemeClr val="accent1"/>
+          </a:lnRef>
+          <a:fillRef idx="3">
+            <a:schemeClr val="accent1"/>
+          </a:fillRef>
+          <a:effectRef idx="2">
+            <a:schemeClr val="accent1"/>
+          </a:effectRef>
+          <a:fontRef idx="minor">
+            <a:schemeClr val="lt1"/>
+          </a:fontRef>
+        </p:style>
+        <p:txBody>
+          <a:bodyPr rtlCol="0" anchor="ctr"/>
+          <a:lstStyle/>
+          <a:p>
+            <a:pPr algn="ctr"/>
+          </a:p>
+        </p:txBody>
+      </p:sp>
+      <p:sp>
+        <p:nvSpPr>
+          <p:cNvPr id="18" name="TextBox 17"/>
+          <p:cNvSpPr txBox="1"/>
+          <p:nvPr/>
+        </p:nvSpPr>
+        <p:spPr>
+          <a:xfrm>
+            <a:off x="3520439" y="3218688"/>
+            <a:ext cx="7528255" cy="658368"/>
+          </a:xfrm>
+          <a:prstGeom prst="rect">
+            <a:avLst/>
+          </a:prstGeom>
+          <a:noFill/>
+        </p:spPr>
+        <p:txBody>
+          <a:bodyPr wrap="square" anchor="ctr">
             <a:spAutoFit/>
           </a:bodyPr>
           <a:lstStyle/>
           <a:p>
             <a:pPr algn="l">
-              <a:defRPr sz="1300" b="1">
-                <a:solidFill>
-                  <a:srgbClr val="FAF9F5"/>
+              <a:defRPr sz="1150" b="0">
+                <a:solidFill>
+                  <a:srgbClr val="141413"/>
                 </a:solidFill>
                 <a:latin typeface="Lora"/>
               </a:defRPr>
             </a:pPr>
             <a:r>
-              <a:t>ML + metrics</a:t>
-            </a:r>
-          </a:p>
-        </p:txBody>
-      </p:sp>
-      <p:sp>
-        <p:nvSpPr>
-          <p:cNvPr id="14" name="TextBox 13"/>
-          <p:cNvSpPr txBox="1"/>
-          <p:nvPr/>
-        </p:nvSpPr>
-        <p:spPr>
-          <a:xfrm>
-            <a:off x="4564227" y="2926080"/>
-            <a:ext cx="3063240" cy="320040"/>
-          </a:xfrm>
-          <a:prstGeom prst="rect">
-            <a:avLst/>
-          </a:prstGeom>
-          <a:noFill/>
-        </p:spPr>
-        <p:txBody>
-          <a:bodyPr wrap="square" anchor="t">
-            <a:spAutoFit/>
-          </a:bodyPr>
-          <a:lstStyle/>
-          <a:p>
-            <a:pPr algn="l">
-              <a:defRPr sz="1000" b="0">
-                <a:solidFill>
-                  <a:srgbClr val="B0AEA5"/>
-                </a:solidFill>
-                <a:latin typeface="Lora"/>
-              </a:defRPr>
-            </a:pPr>
-            <a:r>
-              <a:t>Month 5</a:t>
-            </a:r>
-          </a:p>
-        </p:txBody>
-      </p:sp>
-      <p:sp>
-        <p:nvSpPr>
-          <p:cNvPr id="15" name="Rounded Rectangle 14"/>
+              <a:t>Embeddings · vector DB · NLP</a:t>
+            </a:r>
+          </a:p>
+        </p:txBody>
+      </p:sp>
+      <p:sp>
+        <p:nvSpPr>
+          <p:cNvPr id="19" name="Rectangle 18"/>
           <p:cNvSpPr/>
           <p:nvPr/>
         </p:nvSpPr>
         <p:spPr>
           <a:xfrm>
-            <a:off x="8176107" y="1783080"/>
-            <a:ext cx="3520440" cy="1508760"/>
-          </a:xfrm>
-          <a:prstGeom prst="roundRect">
+            <a:off x="1097280" y="4005072"/>
+            <a:ext cx="2286000" cy="658368"/>
+          </a:xfrm>
+          <a:prstGeom prst="rect">
             <a:avLst/>
           </a:prstGeom>
           <a:solidFill>
@@ -5302,124 +5485,134 @@
       </p:sp>
       <p:sp>
         <p:nvSpPr>
-          <p:cNvPr id="16" name="TextBox 15"/>
-          <p:cNvSpPr txBox="1"/>
-          <p:nvPr/>
-        </p:nvSpPr>
-        <p:spPr>
-          <a:xfrm>
-            <a:off x="8404707" y="1920240"/>
-            <a:ext cx="3063240" cy="640080"/>
-          </a:xfrm>
-          <a:prstGeom prst="rect">
-            <a:avLst/>
-          </a:prstGeom>
-          <a:noFill/>
-        </p:spPr>
-        <p:txBody>
-          <a:bodyPr wrap="square" anchor="t">
+          <p:cNvPr id="20" name="TextBox 19"/>
+          <p:cNvSpPr txBox="1"/>
+          <p:nvPr/>
+        </p:nvSpPr>
+        <p:spPr>
+          <a:xfrm>
+            <a:off x="1234439" y="4005072"/>
+            <a:ext cx="2011680" cy="658368"/>
+          </a:xfrm>
+          <a:prstGeom prst="rect">
+            <a:avLst/>
+          </a:prstGeom>
+          <a:noFill/>
+        </p:spPr>
+        <p:txBody>
+          <a:bodyPr wrap="square" anchor="ctr">
             <a:spAutoFit/>
           </a:bodyPr>
           <a:lstStyle/>
           <a:p>
             <a:pPr algn="l">
-              <a:defRPr sz="2800" b="1">
+              <a:defRPr sz="1100" b="1">
                 <a:solidFill>
                   <a:srgbClr val="FAF9F5"/>
                 </a:solidFill>
-                <a:latin typeface="Poppins"/>
-              </a:defRPr>
-            </a:pPr>
-            <a:r>
-              <a:t>✓</a:t>
-            </a:r>
-          </a:p>
-        </p:txBody>
-      </p:sp>
-      <p:sp>
-        <p:nvSpPr>
-          <p:cNvPr id="17" name="TextBox 16"/>
-          <p:cNvSpPr txBox="1"/>
-          <p:nvPr/>
-        </p:nvSpPr>
-        <p:spPr>
-          <a:xfrm>
-            <a:off x="8404707" y="2560320"/>
-            <a:ext cx="3063240" cy="365760"/>
-          </a:xfrm>
-          <a:prstGeom prst="rect">
-            <a:avLst/>
-          </a:prstGeom>
-          <a:noFill/>
-        </p:spPr>
-        <p:txBody>
-          <a:bodyPr wrap="square" anchor="t">
+                <a:latin typeface="Lora"/>
+              </a:defRPr>
+            </a:pPr>
+            <a:r>
+              <a:t>Month 7–8</a:t>
+            </a:r>
+          </a:p>
+        </p:txBody>
+      </p:sp>
+      <p:sp>
+        <p:nvSpPr>
+          <p:cNvPr id="21" name="Rectangle 20"/>
+          <p:cNvSpPr/>
+          <p:nvPr/>
+        </p:nvSpPr>
+        <p:spPr>
+          <a:xfrm>
+            <a:off x="3383280" y="4005072"/>
+            <a:ext cx="7711135" cy="658368"/>
+          </a:xfrm>
+          <a:prstGeom prst="rect">
+            <a:avLst/>
+          </a:prstGeom>
+          <a:solidFill>
+            <a:srgbClr val="E8E6DC"/>
+          </a:solidFill>
+          <a:ln w="12700">
+            <a:solidFill>
+              <a:srgbClr val="E8E6DC"/>
+            </a:solidFill>
+          </a:ln>
+          <a:effectLst/>
+        </p:spPr>
+        <p:style>
+          <a:lnRef idx="1">
+            <a:schemeClr val="accent1"/>
+          </a:lnRef>
+          <a:fillRef idx="3">
+            <a:schemeClr val="accent1"/>
+          </a:fillRef>
+          <a:effectRef idx="2">
+            <a:schemeClr val="accent1"/>
+          </a:effectRef>
+          <a:fontRef idx="minor">
+            <a:schemeClr val="lt1"/>
+          </a:fontRef>
+        </p:style>
+        <p:txBody>
+          <a:bodyPr rtlCol="0" anchor="ctr"/>
+          <a:lstStyle/>
+          <a:p>
+            <a:pPr algn="ctr"/>
+          </a:p>
+        </p:txBody>
+      </p:sp>
+      <p:sp>
+        <p:nvSpPr>
+          <p:cNvPr id="22" name="TextBox 21"/>
+          <p:cNvSpPr txBox="1"/>
+          <p:nvPr/>
+        </p:nvSpPr>
+        <p:spPr>
+          <a:xfrm>
+            <a:off x="3520439" y="4005072"/>
+            <a:ext cx="7528255" cy="658368"/>
+          </a:xfrm>
+          <a:prstGeom prst="rect">
+            <a:avLst/>
+          </a:prstGeom>
+          <a:noFill/>
+        </p:spPr>
+        <p:txBody>
+          <a:bodyPr wrap="square" anchor="ctr">
             <a:spAutoFit/>
           </a:bodyPr>
           <a:lstStyle/>
           <a:p>
             <a:pPr algn="l">
-              <a:defRPr sz="1300" b="1">
-                <a:solidFill>
-                  <a:srgbClr val="FAF9F5"/>
+              <a:defRPr sz="1150" b="0">
+                <a:solidFill>
+                  <a:srgbClr val="141413"/>
                 </a:solidFill>
                 <a:latin typeface="Lora"/>
               </a:defRPr>
             </a:pPr>
             <a:r>
-              <a:t>RAG + LangGraph</a:t>
-            </a:r>
-          </a:p>
-        </p:txBody>
-      </p:sp>
-      <p:sp>
-        <p:nvSpPr>
-          <p:cNvPr id="18" name="TextBox 17"/>
-          <p:cNvSpPr txBox="1"/>
-          <p:nvPr/>
-        </p:nvSpPr>
-        <p:spPr>
-          <a:xfrm>
-            <a:off x="8404707" y="2926080"/>
-            <a:ext cx="3063240" cy="320040"/>
-          </a:xfrm>
-          <a:prstGeom prst="rect">
-            <a:avLst/>
-          </a:prstGeom>
-          <a:noFill/>
-        </p:spPr>
-        <p:txBody>
-          <a:bodyPr wrap="square" anchor="t">
-            <a:spAutoFit/>
-          </a:bodyPr>
-          <a:lstStyle/>
-          <a:p>
-            <a:pPr algn="l">
-              <a:defRPr sz="1000" b="0">
-                <a:solidFill>
-                  <a:srgbClr val="B0AEA5"/>
-                </a:solidFill>
-                <a:latin typeface="Lora"/>
-              </a:defRPr>
-            </a:pPr>
-            <a:r>
-              <a:t>Month 8</a:t>
-            </a:r>
-          </a:p>
-        </p:txBody>
-      </p:sp>
-      <p:sp>
-        <p:nvSpPr>
-          <p:cNvPr id="19" name="Rounded Rectangle 18"/>
+              <a:t>LLM · RAG · LangGraph · eval</a:t>
+            </a:r>
+          </a:p>
+        </p:txBody>
+      </p:sp>
+      <p:sp>
+        <p:nvSpPr>
+          <p:cNvPr id="23" name="Rectangle 22"/>
           <p:cNvSpPr/>
           <p:nvPr/>
         </p:nvSpPr>
         <p:spPr>
           <a:xfrm>
-            <a:off x="495147" y="3611880"/>
-            <a:ext cx="3520440" cy="1508760"/>
-          </a:xfrm>
-          <a:prstGeom prst="roundRect">
+            <a:off x="1097280" y="4791456"/>
+            <a:ext cx="2286000" cy="658368"/>
+          </a:xfrm>
+          <a:prstGeom prst="rect">
             <a:avLst/>
           </a:prstGeom>
           <a:solidFill>
@@ -5454,131 +5647,61 @@
       </p:sp>
       <p:sp>
         <p:nvSpPr>
-          <p:cNvPr id="20" name="TextBox 19"/>
-          <p:cNvSpPr txBox="1"/>
-          <p:nvPr/>
-        </p:nvSpPr>
-        <p:spPr>
-          <a:xfrm>
-            <a:off x="723747" y="3749040"/>
-            <a:ext cx="3063240" cy="640080"/>
-          </a:xfrm>
-          <a:prstGeom prst="rect">
-            <a:avLst/>
-          </a:prstGeom>
-          <a:noFill/>
-        </p:spPr>
-        <p:txBody>
-          <a:bodyPr wrap="square" anchor="t">
+          <p:cNvPr id="24" name="TextBox 23"/>
+          <p:cNvSpPr txBox="1"/>
+          <p:nvPr/>
+        </p:nvSpPr>
+        <p:spPr>
+          <a:xfrm>
+            <a:off x="1234439" y="4791456"/>
+            <a:ext cx="2011680" cy="658368"/>
+          </a:xfrm>
+          <a:prstGeom prst="rect">
+            <a:avLst/>
+          </a:prstGeom>
+          <a:noFill/>
+        </p:spPr>
+        <p:txBody>
+          <a:bodyPr wrap="square" anchor="ctr">
             <a:spAutoFit/>
           </a:bodyPr>
           <a:lstStyle/>
           <a:p>
             <a:pPr algn="l">
-              <a:defRPr sz="2800" b="1">
+              <a:defRPr sz="1100" b="1">
                 <a:solidFill>
                   <a:srgbClr val="FAF9F5"/>
                 </a:solidFill>
-                <a:latin typeface="Poppins"/>
-              </a:defRPr>
-            </a:pPr>
-            <a:r>
-              <a:t>✓</a:t>
-            </a:r>
-          </a:p>
-        </p:txBody>
-      </p:sp>
-      <p:sp>
-        <p:nvSpPr>
-          <p:cNvPr id="21" name="TextBox 20"/>
-          <p:cNvSpPr txBox="1"/>
-          <p:nvPr/>
-        </p:nvSpPr>
-        <p:spPr>
-          <a:xfrm>
-            <a:off x="723747" y="4389120"/>
-            <a:ext cx="3063240" cy="365760"/>
-          </a:xfrm>
-          <a:prstGeom prst="rect">
-            <a:avLst/>
-          </a:prstGeom>
-          <a:noFill/>
-        </p:spPr>
-        <p:txBody>
-          <a:bodyPr wrap="square" anchor="t">
-            <a:spAutoFit/>
-          </a:bodyPr>
-          <a:lstStyle/>
-          <a:p>
-            <a:pPr algn="l">
-              <a:defRPr sz="1300" b="1">
-                <a:solidFill>
-                  <a:srgbClr val="FAF9F5"/>
-                </a:solidFill>
                 <a:latin typeface="Lora"/>
               </a:defRPr>
             </a:pPr>
             <a:r>
-              <a:t>API + Docker</a:t>
-            </a:r>
-          </a:p>
-        </p:txBody>
-      </p:sp>
-      <p:sp>
-        <p:nvSpPr>
-          <p:cNvPr id="22" name="TextBox 21"/>
-          <p:cNvSpPr txBox="1"/>
-          <p:nvPr/>
-        </p:nvSpPr>
-        <p:spPr>
-          <a:xfrm>
-            <a:off x="723747" y="4754880"/>
-            <a:ext cx="3063240" cy="320040"/>
-          </a:xfrm>
-          <a:prstGeom prst="rect">
-            <a:avLst/>
-          </a:prstGeom>
-          <a:noFill/>
-        </p:spPr>
-        <p:txBody>
-          <a:bodyPr wrap="square" anchor="t">
-            <a:spAutoFit/>
-          </a:bodyPr>
-          <a:lstStyle/>
-          <a:p>
-            <a:pPr algn="l">
-              <a:defRPr sz="1000" b="0">
-                <a:solidFill>
-                  <a:srgbClr val="B0AEA5"/>
-                </a:solidFill>
-                <a:latin typeface="Lora"/>
-              </a:defRPr>
-            </a:pPr>
-            <a:r>
-              <a:t>Month 10</a:t>
-            </a:r>
-          </a:p>
-        </p:txBody>
-      </p:sp>
-      <p:sp>
-        <p:nvSpPr>
-          <p:cNvPr id="23" name="Rounded Rectangle 22"/>
+              <a:t>Month 9–10</a:t>
+            </a:r>
+          </a:p>
+        </p:txBody>
+      </p:sp>
+      <p:sp>
+        <p:nvSpPr>
+          <p:cNvPr id="25" name="Rectangle 24"/>
           <p:cNvSpPr/>
           <p:nvPr/>
         </p:nvSpPr>
         <p:spPr>
           <a:xfrm>
-            <a:off x="4335627" y="3611880"/>
-            <a:ext cx="3520440" cy="1508760"/>
-          </a:xfrm>
-          <a:prstGeom prst="roundRect">
+            <a:off x="3383280" y="4791456"/>
+            <a:ext cx="7711135" cy="658368"/>
+          </a:xfrm>
+          <a:prstGeom prst="rect">
             <a:avLst/>
           </a:prstGeom>
           <a:solidFill>
-            <a:srgbClr val="BCD1CA"/>
+            <a:srgbClr val="E8E6DC"/>
           </a:solidFill>
-          <a:ln>
-            <a:noFill/>
+          <a:ln w="12700">
+            <a:solidFill>
+              <a:srgbClr val="E8E6DC"/>
+            </a:solidFill>
           </a:ln>
           <a:effectLst/>
         </p:spPr>
@@ -5606,124 +5729,52 @@
       </p:sp>
       <p:sp>
         <p:nvSpPr>
-          <p:cNvPr id="24" name="TextBox 23"/>
-          <p:cNvSpPr txBox="1"/>
-          <p:nvPr/>
-        </p:nvSpPr>
-        <p:spPr>
-          <a:xfrm>
-            <a:off x="4564227" y="3749040"/>
-            <a:ext cx="3063240" cy="640080"/>
-          </a:xfrm>
-          <a:prstGeom prst="rect">
-            <a:avLst/>
-          </a:prstGeom>
-          <a:noFill/>
-        </p:spPr>
-        <p:txBody>
-          <a:bodyPr wrap="square" anchor="t">
+          <p:cNvPr id="26" name="TextBox 25"/>
+          <p:cNvSpPr txBox="1"/>
+          <p:nvPr/>
+        </p:nvSpPr>
+        <p:spPr>
+          <a:xfrm>
+            <a:off x="3520439" y="4791456"/>
+            <a:ext cx="7528255" cy="658368"/>
+          </a:xfrm>
+          <a:prstGeom prst="rect">
+            <a:avLst/>
+          </a:prstGeom>
+          <a:noFill/>
+        </p:spPr>
+        <p:txBody>
+          <a:bodyPr wrap="square" anchor="ctr">
             <a:spAutoFit/>
           </a:bodyPr>
           <a:lstStyle/>
           <a:p>
             <a:pPr algn="l">
-              <a:defRPr sz="2800" b="1">
-                <a:solidFill>
-                  <a:srgbClr val="FAF9F5"/>
-                </a:solidFill>
-                <a:latin typeface="Poppins"/>
-              </a:defRPr>
-            </a:pPr>
-            <a:r>
-              <a:t>✓</a:t>
-            </a:r>
-          </a:p>
-        </p:txBody>
-      </p:sp>
-      <p:sp>
-        <p:nvSpPr>
-          <p:cNvPr id="25" name="TextBox 24"/>
-          <p:cNvSpPr txBox="1"/>
-          <p:nvPr/>
-        </p:nvSpPr>
-        <p:spPr>
-          <a:xfrm>
-            <a:off x="4564227" y="4389120"/>
-            <a:ext cx="3063240" cy="365760"/>
-          </a:xfrm>
-          <a:prstGeom prst="rect">
-            <a:avLst/>
-          </a:prstGeom>
-          <a:noFill/>
-        </p:spPr>
-        <p:txBody>
-          <a:bodyPr wrap="square" anchor="t">
-            <a:spAutoFit/>
-          </a:bodyPr>
-          <a:lstStyle/>
-          <a:p>
-            <a:pPr algn="l">
-              <a:defRPr sz="1300" b="1">
-                <a:solidFill>
-                  <a:srgbClr val="FAF9F5"/>
+              <a:defRPr sz="1150" b="0">
+                <a:solidFill>
+                  <a:srgbClr val="141413"/>
                 </a:solidFill>
                 <a:latin typeface="Lora"/>
               </a:defRPr>
             </a:pPr>
             <a:r>
-              <a:t>2 bank use cases</a:t>
-            </a:r>
-          </a:p>
-        </p:txBody>
-      </p:sp>
-      <p:sp>
-        <p:nvSpPr>
-          <p:cNvPr id="26" name="TextBox 25"/>
-          <p:cNvSpPr txBox="1"/>
-          <p:nvPr/>
-        </p:nvSpPr>
-        <p:spPr>
-          <a:xfrm>
-            <a:off x="4564227" y="4754880"/>
-            <a:ext cx="3063240" cy="320040"/>
-          </a:xfrm>
-          <a:prstGeom prst="rect">
-            <a:avLst/>
-          </a:prstGeom>
-          <a:noFill/>
-        </p:spPr>
-        <p:txBody>
-          <a:bodyPr wrap="square" anchor="t">
-            <a:spAutoFit/>
-          </a:bodyPr>
-          <a:lstStyle/>
-          <a:p>
-            <a:pPr algn="l">
-              <a:defRPr sz="1000" b="0">
-                <a:solidFill>
-                  <a:srgbClr val="B0AEA5"/>
-                </a:solidFill>
-                <a:latin typeface="Lora"/>
-              </a:defRPr>
-            </a:pPr>
-            <a:r>
-              <a:t>Month 11</a:t>
-            </a:r>
-          </a:p>
-        </p:txBody>
-      </p:sp>
-      <p:sp>
-        <p:nvSpPr>
-          <p:cNvPr id="27" name="Rounded Rectangle 26"/>
+              <a:t>FastAPI · Docker · guardrails</a:t>
+            </a:r>
+          </a:p>
+        </p:txBody>
+      </p:sp>
+      <p:sp>
+        <p:nvSpPr>
+          <p:cNvPr id="27" name="Rectangle 26"/>
           <p:cNvSpPr/>
           <p:nvPr/>
         </p:nvSpPr>
         <p:spPr>
           <a:xfrm>
-            <a:off x="8176107" y="3611880"/>
-            <a:ext cx="3520440" cy="1508760"/>
-          </a:xfrm>
-          <a:prstGeom prst="roundRect">
+            <a:off x="1097280" y="5577840"/>
+            <a:ext cx="2286000" cy="658368"/>
+          </a:xfrm>
+          <a:prstGeom prst="rect">
             <a:avLst/>
           </a:prstGeom>
           <a:solidFill>
@@ -5764,102 +5815,112 @@
         </p:nvSpPr>
         <p:spPr>
           <a:xfrm>
-            <a:off x="8404707" y="3749040"/>
-            <a:ext cx="3063240" cy="640080"/>
-          </a:xfrm>
-          <a:prstGeom prst="rect">
-            <a:avLst/>
-          </a:prstGeom>
-          <a:noFill/>
-        </p:spPr>
-        <p:txBody>
-          <a:bodyPr wrap="square" anchor="t">
+            <a:off x="1234439" y="5577840"/>
+            <a:ext cx="2011680" cy="658368"/>
+          </a:xfrm>
+          <a:prstGeom prst="rect">
+            <a:avLst/>
+          </a:prstGeom>
+          <a:noFill/>
+        </p:spPr>
+        <p:txBody>
+          <a:bodyPr wrap="square" anchor="ctr">
             <a:spAutoFit/>
           </a:bodyPr>
           <a:lstStyle/>
           <a:p>
             <a:pPr algn="l">
-              <a:defRPr sz="2800" b="1">
+              <a:defRPr sz="1100" b="1">
                 <a:solidFill>
                   <a:srgbClr val="FAF9F5"/>
                 </a:solidFill>
-                <a:latin typeface="Poppins"/>
-              </a:defRPr>
-            </a:pPr>
-            <a:r>
-              <a:t>✓</a:t>
-            </a:r>
-          </a:p>
-        </p:txBody>
-      </p:sp>
-      <p:sp>
-        <p:nvSpPr>
-          <p:cNvPr id="29" name="TextBox 28"/>
-          <p:cNvSpPr txBox="1"/>
-          <p:nvPr/>
-        </p:nvSpPr>
-        <p:spPr>
-          <a:xfrm>
-            <a:off x="8404707" y="4389120"/>
-            <a:ext cx="3063240" cy="365760"/>
-          </a:xfrm>
-          <a:prstGeom prst="rect">
-            <a:avLst/>
-          </a:prstGeom>
-          <a:noFill/>
-        </p:spPr>
-        <p:txBody>
-          <a:bodyPr wrap="square" anchor="t">
+                <a:latin typeface="Lora"/>
+              </a:defRPr>
+            </a:pPr>
+            <a:r>
+              <a:t>Always</a:t>
+            </a:r>
+          </a:p>
+        </p:txBody>
+      </p:sp>
+      <p:sp>
+        <p:nvSpPr>
+          <p:cNvPr id="29" name="Rectangle 28"/>
+          <p:cNvSpPr/>
+          <p:nvPr/>
+        </p:nvSpPr>
+        <p:spPr>
+          <a:xfrm>
+            <a:off x="3383280" y="5577840"/>
+            <a:ext cx="7711135" cy="658368"/>
+          </a:xfrm>
+          <a:prstGeom prst="rect">
+            <a:avLst/>
+          </a:prstGeom>
+          <a:solidFill>
+            <a:srgbClr val="E8E6DC"/>
+          </a:solidFill>
+          <a:ln w="12700">
+            <a:solidFill>
+              <a:srgbClr val="E8E6DC"/>
+            </a:solidFill>
+          </a:ln>
+          <a:effectLst/>
+        </p:spPr>
+        <p:style>
+          <a:lnRef idx="1">
+            <a:schemeClr val="accent1"/>
+          </a:lnRef>
+          <a:fillRef idx="3">
+            <a:schemeClr val="accent1"/>
+          </a:fillRef>
+          <a:effectRef idx="2">
+            <a:schemeClr val="accent1"/>
+          </a:effectRef>
+          <a:fontRef idx="minor">
+            <a:schemeClr val="lt1"/>
+          </a:fontRef>
+        </p:style>
+        <p:txBody>
+          <a:bodyPr rtlCol="0" anchor="ctr"/>
+          <a:lstStyle/>
+          <a:p>
+            <a:pPr algn="ctr"/>
+          </a:p>
+        </p:txBody>
+      </p:sp>
+      <p:sp>
+        <p:nvSpPr>
+          <p:cNvPr id="30" name="TextBox 29"/>
+          <p:cNvSpPr txBox="1"/>
+          <p:nvPr/>
+        </p:nvSpPr>
+        <p:spPr>
+          <a:xfrm>
+            <a:off x="3520439" y="5577840"/>
+            <a:ext cx="7528255" cy="658368"/>
+          </a:xfrm>
+          <a:prstGeom prst="rect">
+            <a:avLst/>
+          </a:prstGeom>
+          <a:noFill/>
+        </p:spPr>
+        <p:txBody>
+          <a:bodyPr wrap="square" anchor="ctr">
             <a:spAutoFit/>
           </a:bodyPr>
           <a:lstStyle/>
           <a:p>
             <a:pPr algn="l">
-              <a:defRPr sz="1300" b="1">
-                <a:solidFill>
-                  <a:srgbClr val="FAF9F5"/>
+              <a:defRPr sz="1150" b="0">
+                <a:solidFill>
+                  <a:srgbClr val="141413"/>
                 </a:solidFill>
                 <a:latin typeface="Lora"/>
               </a:defRPr>
             </a:pPr>
             <a:r>
-              <a:t>CV + GitHub</a:t>
-            </a:r>
-          </a:p>
-        </p:txBody>
-      </p:sp>
-      <p:sp>
-        <p:nvSpPr>
-          <p:cNvPr id="30" name="TextBox 29"/>
-          <p:cNvSpPr txBox="1"/>
-          <p:nvPr/>
-        </p:nvSpPr>
-        <p:spPr>
-          <a:xfrm>
-            <a:off x="8404707" y="4754880"/>
-            <a:ext cx="3063240" cy="320040"/>
-          </a:xfrm>
-          <a:prstGeom prst="rect">
-            <a:avLst/>
-          </a:prstGeom>
-          <a:noFill/>
-        </p:spPr>
-        <p:txBody>
-          <a:bodyPr wrap="square" anchor="t">
-            <a:spAutoFit/>
-          </a:bodyPr>
-          <a:lstStyle/>
-          <a:p>
-            <a:pPr algn="l">
-              <a:defRPr sz="1000" b="0">
-                <a:solidFill>
-                  <a:srgbClr val="B0AEA5"/>
-                </a:solidFill>
-                <a:latin typeface="Lora"/>
-              </a:defRPr>
-            </a:pPr>
-            <a:r>
-              <a:t>Month 12</a:t>
+              <a:t>Banking metrics · governance · English</a:t>
             </a:r>
           </a:p>
         </p:txBody>
@@ -6117,7 +6178,7 @@
               </a:defRPr>
             </a:pPr>
             <a:r>
-              <a:t>ACTION PLAN</a:t>
+              <a:t>KNOW WHEN YOU'RE READY TO APPLY</a:t>
             </a:r>
           </a:p>
         </p:txBody>
@@ -6153,27 +6214,27 @@
               </a:defRPr>
             </a:pPr>
             <a:r>
-              <a:t>First 30 days — start tomorrow</a:t>
-            </a:r>
-          </a:p>
-        </p:txBody>
-      </p:sp>
-      <p:sp>
-        <p:nvSpPr>
-          <p:cNvPr id="7" name="Rectangle 6"/>
+              <a:t>Milestone checklist</a:t>
+            </a:r>
+          </a:p>
+        </p:txBody>
+      </p:sp>
+      <p:sp>
+        <p:nvSpPr>
+          <p:cNvPr id="7" name="Rounded Rectangle 6"/>
           <p:cNvSpPr/>
           <p:nvPr/>
         </p:nvSpPr>
         <p:spPr>
           <a:xfrm>
-            <a:off x="472287" y="1737360"/>
-            <a:ext cx="11247120" cy="73152"/>
-          </a:xfrm>
-          <a:prstGeom prst="rect">
+            <a:off x="495147" y="1783080"/>
+            <a:ext cx="3520440" cy="1508760"/>
+          </a:xfrm>
+          <a:prstGeom prst="roundRect">
             <a:avLst/>
           </a:prstGeom>
           <a:solidFill>
-            <a:srgbClr val="B0AEA5"/>
+            <a:srgbClr val="788C5D"/>
           </a:solidFill>
           <a:ln>
             <a:noFill/>
@@ -6204,16 +6265,124 @@
       </p:sp>
       <p:sp>
         <p:nvSpPr>
-          <p:cNvPr id="8" name="Oval 7"/>
+          <p:cNvPr id="8" name="TextBox 7"/>
+          <p:cNvSpPr txBox="1"/>
+          <p:nvPr/>
+        </p:nvSpPr>
+        <p:spPr>
+          <a:xfrm>
+            <a:off x="723747" y="1920240"/>
+            <a:ext cx="3063240" cy="640080"/>
+          </a:xfrm>
+          <a:prstGeom prst="rect">
+            <a:avLst/>
+          </a:prstGeom>
+          <a:noFill/>
+        </p:spPr>
+        <p:txBody>
+          <a:bodyPr wrap="square" anchor="t">
+            <a:spAutoFit/>
+          </a:bodyPr>
+          <a:lstStyle/>
+          <a:p>
+            <a:pPr algn="l">
+              <a:defRPr sz="2800" b="1">
+                <a:solidFill>
+                  <a:srgbClr val="FAF9F5"/>
+                </a:solidFill>
+                <a:latin typeface="Poppins"/>
+              </a:defRPr>
+            </a:pPr>
+            <a:r>
+              <a:t>✓</a:t>
+            </a:r>
+          </a:p>
+        </p:txBody>
+      </p:sp>
+      <p:sp>
+        <p:nvSpPr>
+          <p:cNvPr id="9" name="TextBox 8"/>
+          <p:cNvSpPr txBox="1"/>
+          <p:nvPr/>
+        </p:nvSpPr>
+        <p:spPr>
+          <a:xfrm>
+            <a:off x="723747" y="2560320"/>
+            <a:ext cx="3063240" cy="365760"/>
+          </a:xfrm>
+          <a:prstGeom prst="rect">
+            <a:avLst/>
+          </a:prstGeom>
+          <a:noFill/>
+        </p:spPr>
+        <p:txBody>
+          <a:bodyPr wrap="square" anchor="t">
+            <a:spAutoFit/>
+          </a:bodyPr>
+          <a:lstStyle/>
+          <a:p>
+            <a:pPr algn="l">
+              <a:defRPr sz="1300" b="1">
+                <a:solidFill>
+                  <a:srgbClr val="FAF9F5"/>
+                </a:solidFill>
+                <a:latin typeface="Lora"/>
+              </a:defRPr>
+            </a:pPr>
+            <a:r>
+              <a:t>Python + SQL</a:t>
+            </a:r>
+          </a:p>
+        </p:txBody>
+      </p:sp>
+      <p:sp>
+        <p:nvSpPr>
+          <p:cNvPr id="10" name="TextBox 9"/>
+          <p:cNvSpPr txBox="1"/>
+          <p:nvPr/>
+        </p:nvSpPr>
+        <p:spPr>
+          <a:xfrm>
+            <a:off x="723747" y="2926080"/>
+            <a:ext cx="3063240" cy="320040"/>
+          </a:xfrm>
+          <a:prstGeom prst="rect">
+            <a:avLst/>
+          </a:prstGeom>
+          <a:noFill/>
+        </p:spPr>
+        <p:txBody>
+          <a:bodyPr wrap="square" anchor="t">
+            <a:spAutoFit/>
+          </a:bodyPr>
+          <a:lstStyle/>
+          <a:p>
+            <a:pPr algn="l">
+              <a:defRPr sz="1000" b="0">
+                <a:solidFill>
+                  <a:srgbClr val="B0AEA5"/>
+                </a:solidFill>
+                <a:latin typeface="Lora"/>
+              </a:defRPr>
+            </a:pPr>
+            <a:r>
+              <a:t>Month 2</a:t>
+            </a:r>
+          </a:p>
+        </p:txBody>
+      </p:sp>
+      <p:sp>
+        <p:nvSpPr>
+          <p:cNvPr id="11" name="Rounded Rectangle 10"/>
           <p:cNvSpPr/>
           <p:nvPr/>
         </p:nvSpPr>
         <p:spPr>
           <a:xfrm>
-            <a:off x="1629003" y="1664208"/>
-            <a:ext cx="292608" cy="292608"/>
-          </a:xfrm>
-          <a:prstGeom prst="ellipse">
+            <a:off x="4335627" y="1783080"/>
+            <a:ext cx="3520440" cy="1508760"/>
+          </a:xfrm>
+          <a:prstGeom prst="roundRect">
             <a:avLst/>
           </a:prstGeom>
           <a:solidFill>
@@ -6248,25 +6417,131 @@
       </p:sp>
       <p:sp>
         <p:nvSpPr>
-          <p:cNvPr id="9" name="Rounded Rectangle 8"/>
+          <p:cNvPr id="12" name="TextBox 11"/>
+          <p:cNvSpPr txBox="1"/>
+          <p:nvPr/>
+        </p:nvSpPr>
+        <p:spPr>
+          <a:xfrm>
+            <a:off x="4564227" y="1920240"/>
+            <a:ext cx="3063240" cy="640080"/>
+          </a:xfrm>
+          <a:prstGeom prst="rect">
+            <a:avLst/>
+          </a:prstGeom>
+          <a:noFill/>
+        </p:spPr>
+        <p:txBody>
+          <a:bodyPr wrap="square" anchor="t">
+            <a:spAutoFit/>
+          </a:bodyPr>
+          <a:lstStyle/>
+          <a:p>
+            <a:pPr algn="l">
+              <a:defRPr sz="2800" b="1">
+                <a:solidFill>
+                  <a:srgbClr val="FAF9F5"/>
+                </a:solidFill>
+                <a:latin typeface="Poppins"/>
+              </a:defRPr>
+            </a:pPr>
+            <a:r>
+              <a:t>✓</a:t>
+            </a:r>
+          </a:p>
+        </p:txBody>
+      </p:sp>
+      <p:sp>
+        <p:nvSpPr>
+          <p:cNvPr id="13" name="TextBox 12"/>
+          <p:cNvSpPr txBox="1"/>
+          <p:nvPr/>
+        </p:nvSpPr>
+        <p:spPr>
+          <a:xfrm>
+            <a:off x="4564227" y="2560320"/>
+            <a:ext cx="3063240" cy="365760"/>
+          </a:xfrm>
+          <a:prstGeom prst="rect">
+            <a:avLst/>
+          </a:prstGeom>
+          <a:noFill/>
+        </p:spPr>
+        <p:txBody>
+          <a:bodyPr wrap="square" anchor="t">
+            <a:spAutoFit/>
+          </a:bodyPr>
+          <a:lstStyle/>
+          <a:p>
+            <a:pPr algn="l">
+              <a:defRPr sz="1300" b="1">
+                <a:solidFill>
+                  <a:srgbClr val="FAF9F5"/>
+                </a:solidFill>
+                <a:latin typeface="Lora"/>
+              </a:defRPr>
+            </a:pPr>
+            <a:r>
+              <a:t>ML + metrics</a:t>
+            </a:r>
+          </a:p>
+        </p:txBody>
+      </p:sp>
+      <p:sp>
+        <p:nvSpPr>
+          <p:cNvPr id="14" name="TextBox 13"/>
+          <p:cNvSpPr txBox="1"/>
+          <p:nvPr/>
+        </p:nvSpPr>
+        <p:spPr>
+          <a:xfrm>
+            <a:off x="4564227" y="2926080"/>
+            <a:ext cx="3063240" cy="320040"/>
+          </a:xfrm>
+          <a:prstGeom prst="rect">
+            <a:avLst/>
+          </a:prstGeom>
+          <a:noFill/>
+        </p:spPr>
+        <p:txBody>
+          <a:bodyPr wrap="square" anchor="t">
+            <a:spAutoFit/>
+          </a:bodyPr>
+          <a:lstStyle/>
+          <a:p>
+            <a:pPr algn="l">
+              <a:defRPr sz="1000" b="0">
+                <a:solidFill>
+                  <a:srgbClr val="B0AEA5"/>
+                </a:solidFill>
+                <a:latin typeface="Lora"/>
+              </a:defRPr>
+            </a:pPr>
+            <a:r>
+              <a:t>Month 5</a:t>
+            </a:r>
+          </a:p>
+        </p:txBody>
+      </p:sp>
+      <p:sp>
+        <p:nvSpPr>
+          <p:cNvPr id="15" name="Rounded Rectangle 14"/>
           <p:cNvSpPr/>
           <p:nvPr/>
         </p:nvSpPr>
         <p:spPr>
           <a:xfrm>
-            <a:off x="472287" y="2194560"/>
-            <a:ext cx="2606040" cy="2286000"/>
+            <a:off x="8176107" y="1783080"/>
+            <a:ext cx="3520440" cy="1508760"/>
           </a:xfrm>
           <a:prstGeom prst="roundRect">
             <a:avLst/>
           </a:prstGeom>
           <a:solidFill>
-            <a:srgbClr val="FFFFFF"/>
+            <a:srgbClr val="C46686"/>
           </a:solidFill>
-          <a:ln w="12700">
-            <a:solidFill>
-              <a:srgbClr val="E8E6DC"/>
-            </a:solidFill>
+          <a:ln>
+            <a:noFill/>
           </a:ln>
           <a:effectLst/>
         </p:spPr>
@@ -6294,20 +6569,128 @@
       </p:sp>
       <p:sp>
         <p:nvSpPr>
-          <p:cNvPr id="10" name="Rectangle 9"/>
+          <p:cNvPr id="16" name="TextBox 15"/>
+          <p:cNvSpPr txBox="1"/>
+          <p:nvPr/>
+        </p:nvSpPr>
+        <p:spPr>
+          <a:xfrm>
+            <a:off x="8404707" y="1920240"/>
+            <a:ext cx="3063240" cy="640080"/>
+          </a:xfrm>
+          <a:prstGeom prst="rect">
+            <a:avLst/>
+          </a:prstGeom>
+          <a:noFill/>
+        </p:spPr>
+        <p:txBody>
+          <a:bodyPr wrap="square" anchor="t">
+            <a:spAutoFit/>
+          </a:bodyPr>
+          <a:lstStyle/>
+          <a:p>
+            <a:pPr algn="l">
+              <a:defRPr sz="2800" b="1">
+                <a:solidFill>
+                  <a:srgbClr val="FAF9F5"/>
+                </a:solidFill>
+                <a:latin typeface="Poppins"/>
+              </a:defRPr>
+            </a:pPr>
+            <a:r>
+              <a:t>✓</a:t>
+            </a:r>
+          </a:p>
+        </p:txBody>
+      </p:sp>
+      <p:sp>
+        <p:nvSpPr>
+          <p:cNvPr id="17" name="TextBox 16"/>
+          <p:cNvSpPr txBox="1"/>
+          <p:nvPr/>
+        </p:nvSpPr>
+        <p:spPr>
+          <a:xfrm>
+            <a:off x="8404707" y="2560320"/>
+            <a:ext cx="3063240" cy="365760"/>
+          </a:xfrm>
+          <a:prstGeom prst="rect">
+            <a:avLst/>
+          </a:prstGeom>
+          <a:noFill/>
+        </p:spPr>
+        <p:txBody>
+          <a:bodyPr wrap="square" anchor="t">
+            <a:spAutoFit/>
+          </a:bodyPr>
+          <a:lstStyle/>
+          <a:p>
+            <a:pPr algn="l">
+              <a:defRPr sz="1300" b="1">
+                <a:solidFill>
+                  <a:srgbClr val="FAF9F5"/>
+                </a:solidFill>
+                <a:latin typeface="Lora"/>
+              </a:defRPr>
+            </a:pPr>
+            <a:r>
+              <a:t>RAG + LangGraph</a:t>
+            </a:r>
+          </a:p>
+        </p:txBody>
+      </p:sp>
+      <p:sp>
+        <p:nvSpPr>
+          <p:cNvPr id="18" name="TextBox 17"/>
+          <p:cNvSpPr txBox="1"/>
+          <p:nvPr/>
+        </p:nvSpPr>
+        <p:spPr>
+          <a:xfrm>
+            <a:off x="8404707" y="2926080"/>
+            <a:ext cx="3063240" cy="320040"/>
+          </a:xfrm>
+          <a:prstGeom prst="rect">
+            <a:avLst/>
+          </a:prstGeom>
+          <a:noFill/>
+        </p:spPr>
+        <p:txBody>
+          <a:bodyPr wrap="square" anchor="t">
+            <a:spAutoFit/>
+          </a:bodyPr>
+          <a:lstStyle/>
+          <a:p>
+            <a:pPr algn="l">
+              <a:defRPr sz="1000" b="0">
+                <a:solidFill>
+                  <a:srgbClr val="B0AEA5"/>
+                </a:solidFill>
+                <a:latin typeface="Lora"/>
+              </a:defRPr>
+            </a:pPr>
+            <a:r>
+              <a:t>Month 8</a:t>
+            </a:r>
+          </a:p>
+        </p:txBody>
+      </p:sp>
+      <p:sp>
+        <p:nvSpPr>
+          <p:cNvPr id="19" name="Rounded Rectangle 18"/>
           <p:cNvSpPr/>
           <p:nvPr/>
         </p:nvSpPr>
         <p:spPr>
           <a:xfrm>
-            <a:off x="472287" y="2194560"/>
-            <a:ext cx="2606040" cy="594360"/>
-          </a:xfrm>
-          <a:prstGeom prst="rect">
+            <a:off x="495147" y="3611880"/>
+            <a:ext cx="3520440" cy="1508760"/>
+          </a:xfrm>
+          <a:prstGeom prst="roundRect">
             <a:avLst/>
           </a:prstGeom>
           <a:solidFill>
-            <a:srgbClr val="6A9BCC"/>
+            <a:srgbClr val="D97757"/>
           </a:solidFill>
           <a:ln>
             <a:noFill/>
@@ -6338,28 +6721,28 @@
       </p:sp>
       <p:sp>
         <p:nvSpPr>
-          <p:cNvPr id="11" name="TextBox 10"/>
-          <p:cNvSpPr txBox="1"/>
-          <p:nvPr/>
-        </p:nvSpPr>
-        <p:spPr>
-          <a:xfrm>
-            <a:off x="472287" y="2258568"/>
-            <a:ext cx="2606040" cy="457200"/>
-          </a:xfrm>
-          <a:prstGeom prst="rect">
-            <a:avLst/>
-          </a:prstGeom>
-          <a:noFill/>
-        </p:spPr>
-        <p:txBody>
-          <a:bodyPr wrap="square" anchor="t">
-            <a:spAutoFit/>
-          </a:bodyPr>
-          <a:lstStyle/>
-          <a:p>
-            <a:pPr algn="ctr">
-              <a:defRPr sz="1400" b="1">
+          <p:cNvPr id="20" name="TextBox 19"/>
+          <p:cNvSpPr txBox="1"/>
+          <p:nvPr/>
+        </p:nvSpPr>
+        <p:spPr>
+          <a:xfrm>
+            <a:off x="723747" y="3749040"/>
+            <a:ext cx="3063240" cy="640080"/>
+          </a:xfrm>
+          <a:prstGeom prst="rect">
+            <a:avLst/>
+          </a:prstGeom>
+          <a:noFill/>
+        </p:spPr>
+        <p:txBody>
+          <a:bodyPr wrap="square" anchor="t">
+            <a:spAutoFit/>
+          </a:bodyPr>
+          <a:lstStyle/>
+          <a:p>
+            <a:pPr algn="l">
+              <a:defRPr sz="2800" b="1">
                 <a:solidFill>
                   <a:srgbClr val="FAF9F5"/>
                 </a:solidFill>
@@ -6367,21 +6750,21 @@
               </a:defRPr>
             </a:pPr>
             <a:r>
-              <a:t>Week 1</a:t>
-            </a:r>
-          </a:p>
-        </p:txBody>
-      </p:sp>
-      <p:sp>
-        <p:nvSpPr>
-          <p:cNvPr id="12" name="TextBox 11"/>
-          <p:cNvSpPr txBox="1"/>
-          <p:nvPr/>
-        </p:nvSpPr>
-        <p:spPr>
-          <a:xfrm>
-            <a:off x="655167" y="2926080"/>
-            <a:ext cx="2240280" cy="1371600"/>
+              <a:t>✓</a:t>
+            </a:r>
+          </a:p>
+        </p:txBody>
+      </p:sp>
+      <p:sp>
+        <p:nvSpPr>
+          <p:cNvPr id="21" name="TextBox 20"/>
+          <p:cNvSpPr txBox="1"/>
+          <p:nvPr/>
+        </p:nvSpPr>
+        <p:spPr>
+          <a:xfrm>
+            <a:off x="723747" y="4389120"/>
+            <a:ext cx="3063240" cy="365760"/>
           </a:xfrm>
           <a:prstGeom prst="rect">
             <a:avLst/>
@@ -6395,31 +6778,67 @@
           <a:lstStyle/>
           <a:p>
             <a:pPr algn="l">
-              <a:defRPr sz="1050" b="0">
-                <a:solidFill>
-                  <a:srgbClr val="141413"/>
+              <a:defRPr sz="1300" b="1">
+                <a:solidFill>
+                  <a:srgbClr val="FAF9F5"/>
                 </a:solidFill>
                 <a:latin typeface="Lora"/>
               </a:defRPr>
             </a:pPr>
             <a:r>
-              <a:t>Install Python, Git, VS Code · Python tutorial §1–4 · GitHub repo</a:t>
-            </a:r>
-          </a:p>
-        </p:txBody>
-      </p:sp>
-      <p:sp>
-        <p:nvSpPr>
-          <p:cNvPr id="13" name="Oval 12"/>
+              <a:t>API + Docker</a:t>
+            </a:r>
+          </a:p>
+        </p:txBody>
+      </p:sp>
+      <p:sp>
+        <p:nvSpPr>
+          <p:cNvPr id="22" name="TextBox 21"/>
+          <p:cNvSpPr txBox="1"/>
+          <p:nvPr/>
+        </p:nvSpPr>
+        <p:spPr>
+          <a:xfrm>
+            <a:off x="723747" y="4754880"/>
+            <a:ext cx="3063240" cy="320040"/>
+          </a:xfrm>
+          <a:prstGeom prst="rect">
+            <a:avLst/>
+          </a:prstGeom>
+          <a:noFill/>
+        </p:spPr>
+        <p:txBody>
+          <a:bodyPr wrap="square" anchor="t">
+            <a:spAutoFit/>
+          </a:bodyPr>
+          <a:lstStyle/>
+          <a:p>
+            <a:pPr algn="l">
+              <a:defRPr sz="1000" b="0">
+                <a:solidFill>
+                  <a:srgbClr val="B0AEA5"/>
+                </a:solidFill>
+                <a:latin typeface="Lora"/>
+              </a:defRPr>
+            </a:pPr>
+            <a:r>
+              <a:t>Month 10</a:t>
+            </a:r>
+          </a:p>
+        </p:txBody>
+      </p:sp>
+      <p:sp>
+        <p:nvSpPr>
+          <p:cNvPr id="23" name="Rounded Rectangle 22"/>
           <p:cNvSpPr/>
           <p:nvPr/>
         </p:nvSpPr>
         <p:spPr>
           <a:xfrm>
-            <a:off x="4509363" y="1664208"/>
-            <a:ext cx="292608" cy="292608"/>
-          </a:xfrm>
-          <a:prstGeom prst="ellipse">
+            <a:off x="4335627" y="3611880"/>
+            <a:ext cx="3520440" cy="1508760"/>
+          </a:xfrm>
+          <a:prstGeom prst="roundRect">
             <a:avLst/>
           </a:prstGeom>
           <a:solidFill>
@@ -6454,25 +6873,131 @@
       </p:sp>
       <p:sp>
         <p:nvSpPr>
-          <p:cNvPr id="14" name="Rounded Rectangle 13"/>
+          <p:cNvPr id="24" name="TextBox 23"/>
+          <p:cNvSpPr txBox="1"/>
+          <p:nvPr/>
+        </p:nvSpPr>
+        <p:spPr>
+          <a:xfrm>
+            <a:off x="4564227" y="3749040"/>
+            <a:ext cx="3063240" cy="640080"/>
+          </a:xfrm>
+          <a:prstGeom prst="rect">
+            <a:avLst/>
+          </a:prstGeom>
+          <a:noFill/>
+        </p:spPr>
+        <p:txBody>
+          <a:bodyPr wrap="square" anchor="t">
+            <a:spAutoFit/>
+          </a:bodyPr>
+          <a:lstStyle/>
+          <a:p>
+            <a:pPr algn="l">
+              <a:defRPr sz="2800" b="1">
+                <a:solidFill>
+                  <a:srgbClr val="FAF9F5"/>
+                </a:solidFill>
+                <a:latin typeface="Poppins"/>
+              </a:defRPr>
+            </a:pPr>
+            <a:r>
+              <a:t>✓</a:t>
+            </a:r>
+          </a:p>
+        </p:txBody>
+      </p:sp>
+      <p:sp>
+        <p:nvSpPr>
+          <p:cNvPr id="25" name="TextBox 24"/>
+          <p:cNvSpPr txBox="1"/>
+          <p:nvPr/>
+        </p:nvSpPr>
+        <p:spPr>
+          <a:xfrm>
+            <a:off x="4564227" y="4389120"/>
+            <a:ext cx="3063240" cy="365760"/>
+          </a:xfrm>
+          <a:prstGeom prst="rect">
+            <a:avLst/>
+          </a:prstGeom>
+          <a:noFill/>
+        </p:spPr>
+        <p:txBody>
+          <a:bodyPr wrap="square" anchor="t">
+            <a:spAutoFit/>
+          </a:bodyPr>
+          <a:lstStyle/>
+          <a:p>
+            <a:pPr algn="l">
+              <a:defRPr sz="1300" b="1">
+                <a:solidFill>
+                  <a:srgbClr val="FAF9F5"/>
+                </a:solidFill>
+                <a:latin typeface="Lora"/>
+              </a:defRPr>
+            </a:pPr>
+            <a:r>
+              <a:t>2 bank use cases</a:t>
+            </a:r>
+          </a:p>
+        </p:txBody>
+      </p:sp>
+      <p:sp>
+        <p:nvSpPr>
+          <p:cNvPr id="26" name="TextBox 25"/>
+          <p:cNvSpPr txBox="1"/>
+          <p:nvPr/>
+        </p:nvSpPr>
+        <p:spPr>
+          <a:xfrm>
+            <a:off x="4564227" y="4754880"/>
+            <a:ext cx="3063240" cy="320040"/>
+          </a:xfrm>
+          <a:prstGeom prst="rect">
+            <a:avLst/>
+          </a:prstGeom>
+          <a:noFill/>
+        </p:spPr>
+        <p:txBody>
+          <a:bodyPr wrap="square" anchor="t">
+            <a:spAutoFit/>
+          </a:bodyPr>
+          <a:lstStyle/>
+          <a:p>
+            <a:pPr algn="l">
+              <a:defRPr sz="1000" b="0">
+                <a:solidFill>
+                  <a:srgbClr val="B0AEA5"/>
+                </a:solidFill>
+                <a:latin typeface="Lora"/>
+              </a:defRPr>
+            </a:pPr>
+            <a:r>
+              <a:t>Month 11</a:t>
+            </a:r>
+          </a:p>
+        </p:txBody>
+      </p:sp>
+      <p:sp>
+        <p:nvSpPr>
+          <p:cNvPr id="27" name="Rounded Rectangle 26"/>
           <p:cNvSpPr/>
           <p:nvPr/>
         </p:nvSpPr>
         <p:spPr>
           <a:xfrm>
-            <a:off x="3352647" y="2194560"/>
-            <a:ext cx="2606040" cy="2286000"/>
+            <a:off x="8176107" y="3611880"/>
+            <a:ext cx="3520440" cy="1508760"/>
           </a:xfrm>
           <a:prstGeom prst="roundRect">
             <a:avLst/>
           </a:prstGeom>
           <a:solidFill>
-            <a:srgbClr val="FFFFFF"/>
+            <a:srgbClr val="141413"/>
           </a:solidFill>
-          <a:ln w="12700">
-            <a:solidFill>
-              <a:srgbClr val="E8E6DC"/>
-            </a:solidFill>
+          <a:ln>
+            <a:noFill/>
           </a:ln>
           <a:effectLst/>
         </p:spPr>
@@ -6500,72 +7025,28 @@
       </p:sp>
       <p:sp>
         <p:nvSpPr>
-          <p:cNvPr id="15" name="Rectangle 14"/>
-          <p:cNvSpPr/>
-          <p:nvPr/>
-        </p:nvSpPr>
-        <p:spPr>
-          <a:xfrm>
-            <a:off x="3352647" y="2194560"/>
-            <a:ext cx="2606040" cy="594360"/>
-          </a:xfrm>
-          <a:prstGeom prst="rect">
-            <a:avLst/>
-          </a:prstGeom>
-          <a:solidFill>
-            <a:srgbClr val="BCD1CA"/>
-          </a:solidFill>
-          <a:ln>
-            <a:noFill/>
-          </a:ln>
-          <a:effectLst/>
-        </p:spPr>
-        <p:style>
-          <a:lnRef idx="1">
-            <a:schemeClr val="accent1"/>
-          </a:lnRef>
-          <a:fillRef idx="3">
-            <a:schemeClr val="accent1"/>
-          </a:fillRef>
-          <a:effectRef idx="2">
-            <a:schemeClr val="accent1"/>
-          </a:effectRef>
-          <a:fontRef idx="minor">
-            <a:schemeClr val="lt1"/>
-          </a:fontRef>
-        </p:style>
-        <p:txBody>
-          <a:bodyPr rtlCol="0" anchor="ctr"/>
-          <a:lstStyle/>
-          <a:p>
-            <a:pPr algn="ctr"/>
-          </a:p>
-        </p:txBody>
-      </p:sp>
-      <p:sp>
-        <p:nvSpPr>
-          <p:cNvPr id="16" name="TextBox 15"/>
-          <p:cNvSpPr txBox="1"/>
-          <p:nvPr/>
-        </p:nvSpPr>
-        <p:spPr>
-          <a:xfrm>
-            <a:off x="3352647" y="2258568"/>
-            <a:ext cx="2606040" cy="457200"/>
-          </a:xfrm>
-          <a:prstGeom prst="rect">
-            <a:avLst/>
-          </a:prstGeom>
-          <a:noFill/>
-        </p:spPr>
-        <p:txBody>
-          <a:bodyPr wrap="square" anchor="t">
-            <a:spAutoFit/>
-          </a:bodyPr>
-          <a:lstStyle/>
-          <a:p>
-            <a:pPr algn="ctr">
-              <a:defRPr sz="1400" b="1">
+          <p:cNvPr id="28" name="TextBox 27"/>
+          <p:cNvSpPr txBox="1"/>
+          <p:nvPr/>
+        </p:nvSpPr>
+        <p:spPr>
+          <a:xfrm>
+            <a:off x="8404707" y="3749040"/>
+            <a:ext cx="3063240" cy="640080"/>
+          </a:xfrm>
+          <a:prstGeom prst="rect">
+            <a:avLst/>
+          </a:prstGeom>
+          <a:noFill/>
+        </p:spPr>
+        <p:txBody>
+          <a:bodyPr wrap="square" anchor="t">
+            <a:spAutoFit/>
+          </a:bodyPr>
+          <a:lstStyle/>
+          <a:p>
+            <a:pPr algn="l">
+              <a:defRPr sz="2800" b="1">
                 <a:solidFill>
                   <a:srgbClr val="FAF9F5"/>
                 </a:solidFill>
@@ -6573,21 +7054,21 @@
               </a:defRPr>
             </a:pPr>
             <a:r>
-              <a:t>Week 2</a:t>
-            </a:r>
-          </a:p>
-        </p:txBody>
-      </p:sp>
-      <p:sp>
-        <p:nvSpPr>
-          <p:cNvPr id="17" name="TextBox 16"/>
-          <p:cNvSpPr txBox="1"/>
-          <p:nvPr/>
-        </p:nvSpPr>
-        <p:spPr>
-          <a:xfrm>
-            <a:off x="3535527" y="2926080"/>
-            <a:ext cx="2240280" cy="1371600"/>
+              <a:t>✓</a:t>
+            </a:r>
+          </a:p>
+        </p:txBody>
+      </p:sp>
+      <p:sp>
+        <p:nvSpPr>
+          <p:cNvPr id="29" name="TextBox 28"/>
+          <p:cNvSpPr txBox="1"/>
+          <p:nvPr/>
+        </p:nvSpPr>
+        <p:spPr>
+          <a:xfrm>
+            <a:off x="8404707" y="4389120"/>
+            <a:ext cx="3063240" cy="365760"/>
           </a:xfrm>
           <a:prstGeom prst="rect">
             <a:avLst/>
@@ -6601,199 +7082,29 @@
           <a:lstStyle/>
           <a:p>
             <a:pPr algn="l">
-              <a:defRPr sz="1050" b="0">
-                <a:solidFill>
-                  <a:srgbClr val="141413"/>
+              <a:defRPr sz="1300" b="1">
+                <a:solidFill>
+                  <a:srgbClr val="FAF9F5"/>
                 </a:solidFill>
                 <a:latin typeface="Lora"/>
               </a:defRPr>
             </a:pPr>
             <a:r>
-              <a:t>Functions + files · BRD section checker (5 sections)</a:t>
-            </a:r>
-          </a:p>
-        </p:txBody>
-      </p:sp>
-      <p:sp>
-        <p:nvSpPr>
-          <p:cNvPr id="18" name="Oval 17"/>
-          <p:cNvSpPr/>
-          <p:nvPr/>
-        </p:nvSpPr>
-        <p:spPr>
-          <a:xfrm>
-            <a:off x="7389723" y="1664208"/>
-            <a:ext cx="292608" cy="292608"/>
-          </a:xfrm>
-          <a:prstGeom prst="ellipse">
-            <a:avLst/>
-          </a:prstGeom>
-          <a:solidFill>
-            <a:srgbClr val="788C5D"/>
-          </a:solidFill>
-          <a:ln>
-            <a:noFill/>
-          </a:ln>
-          <a:effectLst/>
-        </p:spPr>
-        <p:style>
-          <a:lnRef idx="1">
-            <a:schemeClr val="accent1"/>
-          </a:lnRef>
-          <a:fillRef idx="3">
-            <a:schemeClr val="accent1"/>
-          </a:fillRef>
-          <a:effectRef idx="2">
-            <a:schemeClr val="accent1"/>
-          </a:effectRef>
-          <a:fontRef idx="minor">
-            <a:schemeClr val="lt1"/>
-          </a:fontRef>
-        </p:style>
-        <p:txBody>
-          <a:bodyPr rtlCol="0" anchor="ctr"/>
-          <a:lstStyle/>
-          <a:p>
-            <a:pPr algn="ctr"/>
-          </a:p>
-        </p:txBody>
-      </p:sp>
-      <p:sp>
-        <p:nvSpPr>
-          <p:cNvPr id="19" name="Rounded Rectangle 18"/>
-          <p:cNvSpPr/>
-          <p:nvPr/>
-        </p:nvSpPr>
-        <p:spPr>
-          <a:xfrm>
-            <a:off x="6233007" y="2194560"/>
-            <a:ext cx="2606040" cy="2286000"/>
-          </a:xfrm>
-          <a:prstGeom prst="roundRect">
-            <a:avLst/>
-          </a:prstGeom>
-          <a:solidFill>
-            <a:srgbClr val="FFFFFF"/>
-          </a:solidFill>
-          <a:ln w="12700">
-            <a:solidFill>
-              <a:srgbClr val="E8E6DC"/>
-            </a:solidFill>
-          </a:ln>
-          <a:effectLst/>
-        </p:spPr>
-        <p:style>
-          <a:lnRef idx="1">
-            <a:schemeClr val="accent1"/>
-          </a:lnRef>
-          <a:fillRef idx="3">
-            <a:schemeClr val="accent1"/>
-          </a:fillRef>
-          <a:effectRef idx="2">
-            <a:schemeClr val="accent1"/>
-          </a:effectRef>
-          <a:fontRef idx="minor">
-            <a:schemeClr val="lt1"/>
-          </a:fontRef>
-        </p:style>
-        <p:txBody>
-          <a:bodyPr rtlCol="0" anchor="ctr"/>
-          <a:lstStyle/>
-          <a:p>
-            <a:pPr algn="ctr"/>
-          </a:p>
-        </p:txBody>
-      </p:sp>
-      <p:sp>
-        <p:nvSpPr>
-          <p:cNvPr id="20" name="Rectangle 19"/>
-          <p:cNvSpPr/>
-          <p:nvPr/>
-        </p:nvSpPr>
-        <p:spPr>
-          <a:xfrm>
-            <a:off x="6233007" y="2194560"/>
-            <a:ext cx="2606040" cy="594360"/>
-          </a:xfrm>
-          <a:prstGeom prst="rect">
-            <a:avLst/>
-          </a:prstGeom>
-          <a:solidFill>
-            <a:srgbClr val="788C5D"/>
-          </a:solidFill>
-          <a:ln>
-            <a:noFill/>
-          </a:ln>
-          <a:effectLst/>
-        </p:spPr>
-        <p:style>
-          <a:lnRef idx="1">
-            <a:schemeClr val="accent1"/>
-          </a:lnRef>
-          <a:fillRef idx="3">
-            <a:schemeClr val="accent1"/>
-          </a:fillRef>
-          <a:effectRef idx="2">
-            <a:schemeClr val="accent1"/>
-          </a:effectRef>
-          <a:fontRef idx="minor">
-            <a:schemeClr val="lt1"/>
-          </a:fontRef>
-        </p:style>
-        <p:txBody>
-          <a:bodyPr rtlCol="0" anchor="ctr"/>
-          <a:lstStyle/>
-          <a:p>
-            <a:pPr algn="ctr"/>
-          </a:p>
-        </p:txBody>
-      </p:sp>
-      <p:sp>
-        <p:nvSpPr>
-          <p:cNvPr id="21" name="TextBox 20"/>
-          <p:cNvSpPr txBox="1"/>
-          <p:nvPr/>
-        </p:nvSpPr>
-        <p:spPr>
-          <a:xfrm>
-            <a:off x="6233007" y="2258568"/>
-            <a:ext cx="2606040" cy="457200"/>
-          </a:xfrm>
-          <a:prstGeom prst="rect">
-            <a:avLst/>
-          </a:prstGeom>
-          <a:noFill/>
-        </p:spPr>
-        <p:txBody>
-          <a:bodyPr wrap="square" anchor="t">
-            <a:spAutoFit/>
-          </a:bodyPr>
-          <a:lstStyle/>
-          <a:p>
-            <a:pPr algn="ctr">
-              <a:defRPr sz="1400" b="1">
-                <a:solidFill>
-                  <a:srgbClr val="FAF9F5"/>
-                </a:solidFill>
-                <a:latin typeface="Poppins"/>
-              </a:defRPr>
-            </a:pPr>
-            <a:r>
-              <a:t>Week 3</a:t>
-            </a:r>
-          </a:p>
-        </p:txBody>
-      </p:sp>
-      <p:sp>
-        <p:nvSpPr>
-          <p:cNvPr id="22" name="TextBox 21"/>
-          <p:cNvSpPr txBox="1"/>
-          <p:nvPr/>
-        </p:nvSpPr>
-        <p:spPr>
-          <a:xfrm>
-            <a:off x="6415887" y="2926080"/>
-            <a:ext cx="2240280" cy="1371600"/>
+              <a:t>CV + GitHub</a:t>
+            </a:r>
+          </a:p>
+        </p:txBody>
+      </p:sp>
+      <p:sp>
+        <p:nvSpPr>
+          <p:cNvPr id="30" name="TextBox 29"/>
+          <p:cNvSpPr txBox="1"/>
+          <p:nvPr/>
+        </p:nvSpPr>
+        <p:spPr>
+          <a:xfrm>
+            <a:off x="8404707" y="4754880"/>
+            <a:ext cx="3063240" cy="320040"/>
           </a:xfrm>
           <a:prstGeom prst="rect">
             <a:avLst/>
@@ -6807,264 +7118,22 @@
           <a:lstStyle/>
           <a:p>
             <a:pPr algn="l">
-              <a:defRPr sz="1050" b="0">
-                <a:solidFill>
-                  <a:srgbClr val="141413"/>
+              <a:defRPr sz="1000" b="0">
+                <a:solidFill>
+                  <a:srgbClr val="B0AEA5"/>
                 </a:solidFill>
                 <a:latin typeface="Lora"/>
               </a:defRPr>
             </a:pPr>
             <a:r>
-              <a:t>SQLBolt 1–12 · SQLite + Python query</a:t>
-            </a:r>
-          </a:p>
-        </p:txBody>
-      </p:sp>
-      <p:sp>
-        <p:nvSpPr>
-          <p:cNvPr id="23" name="Oval 22"/>
-          <p:cNvSpPr/>
-          <p:nvPr/>
-        </p:nvSpPr>
-        <p:spPr>
-          <a:xfrm>
-            <a:off x="10270083" y="1664208"/>
-            <a:ext cx="292608" cy="292608"/>
-          </a:xfrm>
-          <a:prstGeom prst="ellipse">
-            <a:avLst/>
-          </a:prstGeom>
-          <a:solidFill>
-            <a:srgbClr val="C46686"/>
-          </a:solidFill>
-          <a:ln>
-            <a:noFill/>
-          </a:ln>
-          <a:effectLst/>
-        </p:spPr>
-        <p:style>
-          <a:lnRef idx="1">
-            <a:schemeClr val="accent1"/>
-          </a:lnRef>
-          <a:fillRef idx="3">
-            <a:schemeClr val="accent1"/>
-          </a:fillRef>
-          <a:effectRef idx="2">
-            <a:schemeClr val="accent1"/>
-          </a:effectRef>
-          <a:fontRef idx="minor">
-            <a:schemeClr val="lt1"/>
-          </a:fontRef>
-        </p:style>
-        <p:txBody>
-          <a:bodyPr rtlCol="0" anchor="ctr"/>
-          <a:lstStyle/>
-          <a:p>
-            <a:pPr algn="ctr"/>
-          </a:p>
-        </p:txBody>
-      </p:sp>
-      <p:sp>
-        <p:nvSpPr>
-          <p:cNvPr id="24" name="Rounded Rectangle 23"/>
-          <p:cNvSpPr/>
-          <p:nvPr/>
-        </p:nvSpPr>
-        <p:spPr>
-          <a:xfrm>
-            <a:off x="9113367" y="2194560"/>
-            <a:ext cx="2606040" cy="2286000"/>
-          </a:xfrm>
-          <a:prstGeom prst="roundRect">
-            <a:avLst/>
-          </a:prstGeom>
-          <a:solidFill>
-            <a:srgbClr val="FFFFFF"/>
-          </a:solidFill>
-          <a:ln w="12700">
-            <a:solidFill>
-              <a:srgbClr val="E8E6DC"/>
-            </a:solidFill>
-          </a:ln>
-          <a:effectLst/>
-        </p:spPr>
-        <p:style>
-          <a:lnRef idx="1">
-            <a:schemeClr val="accent1"/>
-          </a:lnRef>
-          <a:fillRef idx="3">
-            <a:schemeClr val="accent1"/>
-          </a:fillRef>
-          <a:effectRef idx="2">
-            <a:schemeClr val="accent1"/>
-          </a:effectRef>
-          <a:fontRef idx="minor">
-            <a:schemeClr val="lt1"/>
-          </a:fontRef>
-        </p:style>
-        <p:txBody>
-          <a:bodyPr rtlCol="0" anchor="ctr"/>
-          <a:lstStyle/>
-          <a:p>
-            <a:pPr algn="ctr"/>
-          </a:p>
-        </p:txBody>
-      </p:sp>
-      <p:sp>
-        <p:nvSpPr>
-          <p:cNvPr id="25" name="Rectangle 24"/>
-          <p:cNvSpPr/>
-          <p:nvPr/>
-        </p:nvSpPr>
-        <p:spPr>
-          <a:xfrm>
-            <a:off x="9113367" y="2194560"/>
-            <a:ext cx="2606040" cy="594360"/>
-          </a:xfrm>
-          <a:prstGeom prst="rect">
-            <a:avLst/>
-          </a:prstGeom>
-          <a:solidFill>
-            <a:srgbClr val="C46686"/>
-          </a:solidFill>
-          <a:ln>
-            <a:noFill/>
-          </a:ln>
-          <a:effectLst/>
-        </p:spPr>
-        <p:style>
-          <a:lnRef idx="1">
-            <a:schemeClr val="accent1"/>
-          </a:lnRef>
-          <a:fillRef idx="3">
-            <a:schemeClr val="accent1"/>
-          </a:fillRef>
-          <a:effectRef idx="2">
-            <a:schemeClr val="accent1"/>
-          </a:effectRef>
-          <a:fontRef idx="minor">
-            <a:schemeClr val="lt1"/>
-          </a:fontRef>
-        </p:style>
-        <p:txBody>
-          <a:bodyPr rtlCol="0" anchor="ctr"/>
-          <a:lstStyle/>
-          <a:p>
-            <a:pPr algn="ctr"/>
-          </a:p>
-        </p:txBody>
-      </p:sp>
-      <p:sp>
-        <p:nvSpPr>
-          <p:cNvPr id="26" name="TextBox 25"/>
-          <p:cNvSpPr txBox="1"/>
-          <p:nvPr/>
-        </p:nvSpPr>
-        <p:spPr>
-          <a:xfrm>
-            <a:off x="9113367" y="2258568"/>
-            <a:ext cx="2606040" cy="457200"/>
-          </a:xfrm>
-          <a:prstGeom prst="rect">
-            <a:avLst/>
-          </a:prstGeom>
-          <a:noFill/>
-        </p:spPr>
-        <p:txBody>
-          <a:bodyPr wrap="square" anchor="t">
-            <a:spAutoFit/>
-          </a:bodyPr>
-          <a:lstStyle/>
-          <a:p>
-            <a:pPr algn="ctr">
-              <a:defRPr sz="1400" b="1">
-                <a:solidFill>
-                  <a:srgbClr val="FAF9F5"/>
-                </a:solidFill>
-                <a:latin typeface="Poppins"/>
-              </a:defRPr>
-            </a:pPr>
-            <a:r>
-              <a:t>Week 4</a:t>
-            </a:r>
-          </a:p>
-        </p:txBody>
-      </p:sp>
-      <p:sp>
-        <p:nvSpPr>
-          <p:cNvPr id="27" name="TextBox 26"/>
-          <p:cNvSpPr txBox="1"/>
-          <p:nvPr/>
-        </p:nvSpPr>
-        <p:spPr>
-          <a:xfrm>
-            <a:off x="9296247" y="2926080"/>
-            <a:ext cx="2240280" cy="1371600"/>
-          </a:xfrm>
-          <a:prstGeom prst="rect">
-            <a:avLst/>
-          </a:prstGeom>
-          <a:noFill/>
-        </p:spPr>
-        <p:txBody>
-          <a:bodyPr wrap="square" anchor="t">
-            <a:spAutoFit/>
-          </a:bodyPr>
-          <a:lstStyle/>
-          <a:p>
-            <a:pPr algn="l">
-              <a:defRPr sz="1050" b="0">
-                <a:solidFill>
-                  <a:srgbClr val="141413"/>
-                </a:solidFill>
-                <a:latin typeface="Lora"/>
-              </a:defRPr>
-            </a:pPr>
-            <a:r>
-              <a:t>pandas read_csv · one lending KPI chart</a:t>
-            </a:r>
-          </a:p>
-        </p:txBody>
-      </p:sp>
-      <p:sp>
-        <p:nvSpPr>
-          <p:cNvPr id="28" name="TextBox 27"/>
-          <p:cNvSpPr txBox="1"/>
-          <p:nvPr/>
-        </p:nvSpPr>
-        <p:spPr>
-          <a:xfrm>
-            <a:off x="502920" y="4663440"/>
-            <a:ext cx="11155680" cy="457200"/>
-          </a:xfrm>
-          <a:prstGeom prst="rect">
-            <a:avLst/>
-          </a:prstGeom>
-          <a:noFill/>
-        </p:spPr>
-        <p:txBody>
-          <a:bodyPr wrap="square" anchor="t">
-            <a:spAutoFit/>
-          </a:bodyPr>
-          <a:lstStyle/>
-          <a:p>
-            <a:pPr algn="ctr">
-              <a:defRPr sz="1200" b="1">
-                <a:solidFill>
-                  <a:srgbClr val="141413"/>
-                </a:solidFill>
-                <a:latin typeface="Lora"/>
-              </a:defRPr>
-            </a:pPr>
-            <a:r>
-              <a:t>Full syllabus: ai-factory/zero-to-ai-expert-syllabus.md</a:t>
-            </a:r>
-          </a:p>
-        </p:txBody>
-      </p:sp>
-      <p:sp>
-        <p:nvSpPr>
-          <p:cNvPr id="29" name="TextBox 28"/>
+              <a:t>Month 12</a:t>
+            </a:r>
+          </a:p>
+        </p:txBody>
+      </p:sp>
+      <p:sp>
+        <p:nvSpPr>
+          <p:cNvPr id="31" name="TextBox 30"/>
           <p:cNvSpPr txBox="1"/>
           <p:nvPr/>
         </p:nvSpPr>
@@ -7100,7 +7169,7 @@
       </p:sp>
       <p:sp>
         <p:nvSpPr>
-          <p:cNvPr id="30" name="TextBox 29"/>
+          <p:cNvPr id="32" name="TextBox 31"/>
           <p:cNvSpPr txBox="1"/>
           <p:nvPr/>
         </p:nvSpPr>
@@ -7167,6 +7236,1204 @@
             <a:avLst/>
           </a:prstGeom>
           <a:solidFill>
+            <a:srgbClr val="FAF9F5"/>
+          </a:solidFill>
+          <a:ln>
+            <a:noFill/>
+          </a:ln>
+          <a:effectLst/>
+        </p:spPr>
+        <p:style>
+          <a:lnRef idx="1">
+            <a:schemeClr val="accent1"/>
+          </a:lnRef>
+          <a:fillRef idx="3">
+            <a:schemeClr val="accent1"/>
+          </a:fillRef>
+          <a:effectRef idx="2">
+            <a:schemeClr val="accent1"/>
+          </a:effectRef>
+          <a:fontRef idx="minor">
+            <a:schemeClr val="lt1"/>
+          </a:fontRef>
+        </p:style>
+        <p:txBody>
+          <a:bodyPr rtlCol="0" anchor="ctr"/>
+          <a:lstStyle/>
+          <a:p>
+            <a:pPr algn="ctr"/>
+          </a:p>
+        </p:txBody>
+      </p:sp>
+      <p:sp>
+        <p:nvSpPr>
+          <p:cNvPr id="3" name="Rectangle 2"/>
+          <p:cNvSpPr/>
+          <p:nvPr/>
+        </p:nvSpPr>
+        <p:spPr>
+          <a:xfrm>
+            <a:off x="0" y="0"/>
+            <a:ext cx="12191695" cy="1051560"/>
+          </a:xfrm>
+          <a:prstGeom prst="rect">
+            <a:avLst/>
+          </a:prstGeom>
+          <a:solidFill>
+            <a:srgbClr val="141413"/>
+          </a:solidFill>
+          <a:ln>
+            <a:noFill/>
+          </a:ln>
+          <a:effectLst/>
+        </p:spPr>
+        <p:style>
+          <a:lnRef idx="1">
+            <a:schemeClr val="accent1"/>
+          </a:lnRef>
+          <a:fillRef idx="3">
+            <a:schemeClr val="accent1"/>
+          </a:fillRef>
+          <a:effectRef idx="2">
+            <a:schemeClr val="accent1"/>
+          </a:effectRef>
+          <a:fontRef idx="minor">
+            <a:schemeClr val="lt1"/>
+          </a:fontRef>
+        </p:style>
+        <p:txBody>
+          <a:bodyPr rtlCol="0" anchor="ctr"/>
+          <a:lstStyle/>
+          <a:p>
+            <a:pPr algn="ctr"/>
+          </a:p>
+        </p:txBody>
+      </p:sp>
+      <p:sp>
+        <p:nvSpPr>
+          <p:cNvPr id="4" name="Rectangle 3"/>
+          <p:cNvSpPr/>
+          <p:nvPr/>
+        </p:nvSpPr>
+        <p:spPr>
+          <a:xfrm>
+            <a:off x="0" y="1051560"/>
+            <a:ext cx="12191695" cy="54864"/>
+          </a:xfrm>
+          <a:prstGeom prst="rect">
+            <a:avLst/>
+          </a:prstGeom>
+          <a:solidFill>
+            <a:srgbClr val="D97757"/>
+          </a:solidFill>
+          <a:ln>
+            <a:noFill/>
+          </a:ln>
+          <a:effectLst/>
+        </p:spPr>
+        <p:style>
+          <a:lnRef idx="1">
+            <a:schemeClr val="accent1"/>
+          </a:lnRef>
+          <a:fillRef idx="3">
+            <a:schemeClr val="accent1"/>
+          </a:fillRef>
+          <a:effectRef idx="2">
+            <a:schemeClr val="accent1"/>
+          </a:effectRef>
+          <a:fontRef idx="minor">
+            <a:schemeClr val="lt1"/>
+          </a:fontRef>
+        </p:style>
+        <p:txBody>
+          <a:bodyPr rtlCol="0" anchor="ctr"/>
+          <a:lstStyle/>
+          <a:p>
+            <a:pPr algn="ctr"/>
+          </a:p>
+        </p:txBody>
+      </p:sp>
+      <p:sp>
+        <p:nvSpPr>
+          <p:cNvPr id="5" name="TextBox 4"/>
+          <p:cNvSpPr txBox="1"/>
+          <p:nvPr/>
+        </p:nvSpPr>
+        <p:spPr>
+          <a:xfrm>
+            <a:off x="502920" y="146304"/>
+            <a:ext cx="11155680" cy="274320"/>
+          </a:xfrm>
+          <a:prstGeom prst="rect">
+            <a:avLst/>
+          </a:prstGeom>
+          <a:noFill/>
+        </p:spPr>
+        <p:txBody>
+          <a:bodyPr wrap="square" anchor="t">
+            <a:spAutoFit/>
+          </a:bodyPr>
+          <a:lstStyle/>
+          <a:p>
+            <a:pPr algn="l">
+              <a:defRPr sz="1100" b="1">
+                <a:solidFill>
+                  <a:srgbClr val="D97757"/>
+                </a:solidFill>
+                <a:latin typeface="Lora"/>
+              </a:defRPr>
+            </a:pPr>
+            <a:r>
+              <a:t>ACTION PLAN</a:t>
+            </a:r>
+          </a:p>
+        </p:txBody>
+      </p:sp>
+      <p:sp>
+        <p:nvSpPr>
+          <p:cNvPr id="6" name="TextBox 5"/>
+          <p:cNvSpPr txBox="1"/>
+          <p:nvPr/>
+        </p:nvSpPr>
+        <p:spPr>
+          <a:xfrm>
+            <a:off x="502920" y="384048"/>
+            <a:ext cx="11155680" cy="548640"/>
+          </a:xfrm>
+          <a:prstGeom prst="rect">
+            <a:avLst/>
+          </a:prstGeom>
+          <a:noFill/>
+        </p:spPr>
+        <p:txBody>
+          <a:bodyPr wrap="square" anchor="t">
+            <a:spAutoFit/>
+          </a:bodyPr>
+          <a:lstStyle/>
+          <a:p>
+            <a:pPr algn="l">
+              <a:defRPr sz="2300" b="1">
+                <a:solidFill>
+                  <a:srgbClr val="FAF9F5"/>
+                </a:solidFill>
+                <a:latin typeface="Poppins"/>
+              </a:defRPr>
+            </a:pPr>
+            <a:r>
+              <a:t>First 30 days — start tomorrow</a:t>
+            </a:r>
+          </a:p>
+        </p:txBody>
+      </p:sp>
+      <p:sp>
+        <p:nvSpPr>
+          <p:cNvPr id="7" name="Rectangle 6"/>
+          <p:cNvSpPr/>
+          <p:nvPr/>
+        </p:nvSpPr>
+        <p:spPr>
+          <a:xfrm>
+            <a:off x="472287" y="1737360"/>
+            <a:ext cx="11247120" cy="73152"/>
+          </a:xfrm>
+          <a:prstGeom prst="rect">
+            <a:avLst/>
+          </a:prstGeom>
+          <a:solidFill>
+            <a:srgbClr val="B0AEA5"/>
+          </a:solidFill>
+          <a:ln>
+            <a:noFill/>
+          </a:ln>
+          <a:effectLst/>
+        </p:spPr>
+        <p:style>
+          <a:lnRef idx="1">
+            <a:schemeClr val="accent1"/>
+          </a:lnRef>
+          <a:fillRef idx="3">
+            <a:schemeClr val="accent1"/>
+          </a:fillRef>
+          <a:effectRef idx="2">
+            <a:schemeClr val="accent1"/>
+          </a:effectRef>
+          <a:fontRef idx="minor">
+            <a:schemeClr val="lt1"/>
+          </a:fontRef>
+        </p:style>
+        <p:txBody>
+          <a:bodyPr rtlCol="0" anchor="ctr"/>
+          <a:lstStyle/>
+          <a:p>
+            <a:pPr algn="ctr"/>
+          </a:p>
+        </p:txBody>
+      </p:sp>
+      <p:sp>
+        <p:nvSpPr>
+          <p:cNvPr id="8" name="Oval 7"/>
+          <p:cNvSpPr/>
+          <p:nvPr/>
+        </p:nvSpPr>
+        <p:spPr>
+          <a:xfrm>
+            <a:off x="1629003" y="1664208"/>
+            <a:ext cx="292608" cy="292608"/>
+          </a:xfrm>
+          <a:prstGeom prst="ellipse">
+            <a:avLst/>
+          </a:prstGeom>
+          <a:solidFill>
+            <a:srgbClr val="6A9BCC"/>
+          </a:solidFill>
+          <a:ln>
+            <a:noFill/>
+          </a:ln>
+          <a:effectLst/>
+        </p:spPr>
+        <p:style>
+          <a:lnRef idx="1">
+            <a:schemeClr val="accent1"/>
+          </a:lnRef>
+          <a:fillRef idx="3">
+            <a:schemeClr val="accent1"/>
+          </a:fillRef>
+          <a:effectRef idx="2">
+            <a:schemeClr val="accent1"/>
+          </a:effectRef>
+          <a:fontRef idx="minor">
+            <a:schemeClr val="lt1"/>
+          </a:fontRef>
+        </p:style>
+        <p:txBody>
+          <a:bodyPr rtlCol="0" anchor="ctr"/>
+          <a:lstStyle/>
+          <a:p>
+            <a:pPr algn="ctr"/>
+          </a:p>
+        </p:txBody>
+      </p:sp>
+      <p:sp>
+        <p:nvSpPr>
+          <p:cNvPr id="9" name="Rounded Rectangle 8"/>
+          <p:cNvSpPr/>
+          <p:nvPr/>
+        </p:nvSpPr>
+        <p:spPr>
+          <a:xfrm>
+            <a:off x="472287" y="2194560"/>
+            <a:ext cx="2606040" cy="2286000"/>
+          </a:xfrm>
+          <a:prstGeom prst="roundRect">
+            <a:avLst/>
+          </a:prstGeom>
+          <a:solidFill>
+            <a:srgbClr val="FFFFFF"/>
+          </a:solidFill>
+          <a:ln w="12700">
+            <a:solidFill>
+              <a:srgbClr val="E8E6DC"/>
+            </a:solidFill>
+          </a:ln>
+          <a:effectLst/>
+        </p:spPr>
+        <p:style>
+          <a:lnRef idx="1">
+            <a:schemeClr val="accent1"/>
+          </a:lnRef>
+          <a:fillRef idx="3">
+            <a:schemeClr val="accent1"/>
+          </a:fillRef>
+          <a:effectRef idx="2">
+            <a:schemeClr val="accent1"/>
+          </a:effectRef>
+          <a:fontRef idx="minor">
+            <a:schemeClr val="lt1"/>
+          </a:fontRef>
+        </p:style>
+        <p:txBody>
+          <a:bodyPr rtlCol="0" anchor="ctr"/>
+          <a:lstStyle/>
+          <a:p>
+            <a:pPr algn="ctr"/>
+          </a:p>
+        </p:txBody>
+      </p:sp>
+      <p:sp>
+        <p:nvSpPr>
+          <p:cNvPr id="10" name="Rectangle 9"/>
+          <p:cNvSpPr/>
+          <p:nvPr/>
+        </p:nvSpPr>
+        <p:spPr>
+          <a:xfrm>
+            <a:off x="472287" y="2194560"/>
+            <a:ext cx="2606040" cy="594360"/>
+          </a:xfrm>
+          <a:prstGeom prst="rect">
+            <a:avLst/>
+          </a:prstGeom>
+          <a:solidFill>
+            <a:srgbClr val="6A9BCC"/>
+          </a:solidFill>
+          <a:ln>
+            <a:noFill/>
+          </a:ln>
+          <a:effectLst/>
+        </p:spPr>
+        <p:style>
+          <a:lnRef idx="1">
+            <a:schemeClr val="accent1"/>
+          </a:lnRef>
+          <a:fillRef idx="3">
+            <a:schemeClr val="accent1"/>
+          </a:fillRef>
+          <a:effectRef idx="2">
+            <a:schemeClr val="accent1"/>
+          </a:effectRef>
+          <a:fontRef idx="minor">
+            <a:schemeClr val="lt1"/>
+          </a:fontRef>
+        </p:style>
+        <p:txBody>
+          <a:bodyPr rtlCol="0" anchor="ctr"/>
+          <a:lstStyle/>
+          <a:p>
+            <a:pPr algn="ctr"/>
+          </a:p>
+        </p:txBody>
+      </p:sp>
+      <p:sp>
+        <p:nvSpPr>
+          <p:cNvPr id="11" name="TextBox 10"/>
+          <p:cNvSpPr txBox="1"/>
+          <p:nvPr/>
+        </p:nvSpPr>
+        <p:spPr>
+          <a:xfrm>
+            <a:off x="472287" y="2258568"/>
+            <a:ext cx="2606040" cy="457200"/>
+          </a:xfrm>
+          <a:prstGeom prst="rect">
+            <a:avLst/>
+          </a:prstGeom>
+          <a:noFill/>
+        </p:spPr>
+        <p:txBody>
+          <a:bodyPr wrap="square" anchor="t">
+            <a:spAutoFit/>
+          </a:bodyPr>
+          <a:lstStyle/>
+          <a:p>
+            <a:pPr algn="ctr">
+              <a:defRPr sz="1400" b="1">
+                <a:solidFill>
+                  <a:srgbClr val="FAF9F5"/>
+                </a:solidFill>
+                <a:latin typeface="Poppins"/>
+              </a:defRPr>
+            </a:pPr>
+            <a:r>
+              <a:t>Week 1</a:t>
+            </a:r>
+          </a:p>
+        </p:txBody>
+      </p:sp>
+      <p:sp>
+        <p:nvSpPr>
+          <p:cNvPr id="12" name="TextBox 11"/>
+          <p:cNvSpPr txBox="1"/>
+          <p:nvPr/>
+        </p:nvSpPr>
+        <p:spPr>
+          <a:xfrm>
+            <a:off x="655167" y="2926080"/>
+            <a:ext cx="2240280" cy="1371600"/>
+          </a:xfrm>
+          <a:prstGeom prst="rect">
+            <a:avLst/>
+          </a:prstGeom>
+          <a:noFill/>
+        </p:spPr>
+        <p:txBody>
+          <a:bodyPr wrap="square" anchor="t">
+            <a:spAutoFit/>
+          </a:bodyPr>
+          <a:lstStyle/>
+          <a:p>
+            <a:pPr algn="l">
+              <a:defRPr sz="1050" b="0">
+                <a:solidFill>
+                  <a:srgbClr val="141413"/>
+                </a:solidFill>
+                <a:latin typeface="Lora"/>
+              </a:defRPr>
+            </a:pPr>
+            <a:r>
+              <a:t>Install Python, Git, VS Code · Python tutorial §1–4 · GitHub repo</a:t>
+            </a:r>
+          </a:p>
+        </p:txBody>
+      </p:sp>
+      <p:sp>
+        <p:nvSpPr>
+          <p:cNvPr id="13" name="Oval 12"/>
+          <p:cNvSpPr/>
+          <p:nvPr/>
+        </p:nvSpPr>
+        <p:spPr>
+          <a:xfrm>
+            <a:off x="4509363" y="1664208"/>
+            <a:ext cx="292608" cy="292608"/>
+          </a:xfrm>
+          <a:prstGeom prst="ellipse">
+            <a:avLst/>
+          </a:prstGeom>
+          <a:solidFill>
+            <a:srgbClr val="BCD1CA"/>
+          </a:solidFill>
+          <a:ln>
+            <a:noFill/>
+          </a:ln>
+          <a:effectLst/>
+        </p:spPr>
+        <p:style>
+          <a:lnRef idx="1">
+            <a:schemeClr val="accent1"/>
+          </a:lnRef>
+          <a:fillRef idx="3">
+            <a:schemeClr val="accent1"/>
+          </a:fillRef>
+          <a:effectRef idx="2">
+            <a:schemeClr val="accent1"/>
+          </a:effectRef>
+          <a:fontRef idx="minor">
+            <a:schemeClr val="lt1"/>
+          </a:fontRef>
+        </p:style>
+        <p:txBody>
+          <a:bodyPr rtlCol="0" anchor="ctr"/>
+          <a:lstStyle/>
+          <a:p>
+            <a:pPr algn="ctr"/>
+          </a:p>
+        </p:txBody>
+      </p:sp>
+      <p:sp>
+        <p:nvSpPr>
+          <p:cNvPr id="14" name="Rounded Rectangle 13"/>
+          <p:cNvSpPr/>
+          <p:nvPr/>
+        </p:nvSpPr>
+        <p:spPr>
+          <a:xfrm>
+            <a:off x="3352647" y="2194560"/>
+            <a:ext cx="2606040" cy="2286000"/>
+          </a:xfrm>
+          <a:prstGeom prst="roundRect">
+            <a:avLst/>
+          </a:prstGeom>
+          <a:solidFill>
+            <a:srgbClr val="FFFFFF"/>
+          </a:solidFill>
+          <a:ln w="12700">
+            <a:solidFill>
+              <a:srgbClr val="E8E6DC"/>
+            </a:solidFill>
+          </a:ln>
+          <a:effectLst/>
+        </p:spPr>
+        <p:style>
+          <a:lnRef idx="1">
+            <a:schemeClr val="accent1"/>
+          </a:lnRef>
+          <a:fillRef idx="3">
+            <a:schemeClr val="accent1"/>
+          </a:fillRef>
+          <a:effectRef idx="2">
+            <a:schemeClr val="accent1"/>
+          </a:effectRef>
+          <a:fontRef idx="minor">
+            <a:schemeClr val="lt1"/>
+          </a:fontRef>
+        </p:style>
+        <p:txBody>
+          <a:bodyPr rtlCol="0" anchor="ctr"/>
+          <a:lstStyle/>
+          <a:p>
+            <a:pPr algn="ctr"/>
+          </a:p>
+        </p:txBody>
+      </p:sp>
+      <p:sp>
+        <p:nvSpPr>
+          <p:cNvPr id="15" name="Rectangle 14"/>
+          <p:cNvSpPr/>
+          <p:nvPr/>
+        </p:nvSpPr>
+        <p:spPr>
+          <a:xfrm>
+            <a:off x="3352647" y="2194560"/>
+            <a:ext cx="2606040" cy="594360"/>
+          </a:xfrm>
+          <a:prstGeom prst="rect">
+            <a:avLst/>
+          </a:prstGeom>
+          <a:solidFill>
+            <a:srgbClr val="BCD1CA"/>
+          </a:solidFill>
+          <a:ln>
+            <a:noFill/>
+          </a:ln>
+          <a:effectLst/>
+        </p:spPr>
+        <p:style>
+          <a:lnRef idx="1">
+            <a:schemeClr val="accent1"/>
+          </a:lnRef>
+          <a:fillRef idx="3">
+            <a:schemeClr val="accent1"/>
+          </a:fillRef>
+          <a:effectRef idx="2">
+            <a:schemeClr val="accent1"/>
+          </a:effectRef>
+          <a:fontRef idx="minor">
+            <a:schemeClr val="lt1"/>
+          </a:fontRef>
+        </p:style>
+        <p:txBody>
+          <a:bodyPr rtlCol="0" anchor="ctr"/>
+          <a:lstStyle/>
+          <a:p>
+            <a:pPr algn="ctr"/>
+          </a:p>
+        </p:txBody>
+      </p:sp>
+      <p:sp>
+        <p:nvSpPr>
+          <p:cNvPr id="16" name="TextBox 15"/>
+          <p:cNvSpPr txBox="1"/>
+          <p:nvPr/>
+        </p:nvSpPr>
+        <p:spPr>
+          <a:xfrm>
+            <a:off x="3352647" y="2258568"/>
+            <a:ext cx="2606040" cy="457200"/>
+          </a:xfrm>
+          <a:prstGeom prst="rect">
+            <a:avLst/>
+          </a:prstGeom>
+          <a:noFill/>
+        </p:spPr>
+        <p:txBody>
+          <a:bodyPr wrap="square" anchor="t">
+            <a:spAutoFit/>
+          </a:bodyPr>
+          <a:lstStyle/>
+          <a:p>
+            <a:pPr algn="ctr">
+              <a:defRPr sz="1400" b="1">
+                <a:solidFill>
+                  <a:srgbClr val="FAF9F5"/>
+                </a:solidFill>
+                <a:latin typeface="Poppins"/>
+              </a:defRPr>
+            </a:pPr>
+            <a:r>
+              <a:t>Week 2</a:t>
+            </a:r>
+          </a:p>
+        </p:txBody>
+      </p:sp>
+      <p:sp>
+        <p:nvSpPr>
+          <p:cNvPr id="17" name="TextBox 16"/>
+          <p:cNvSpPr txBox="1"/>
+          <p:nvPr/>
+        </p:nvSpPr>
+        <p:spPr>
+          <a:xfrm>
+            <a:off x="3535527" y="2926080"/>
+            <a:ext cx="2240280" cy="1371600"/>
+          </a:xfrm>
+          <a:prstGeom prst="rect">
+            <a:avLst/>
+          </a:prstGeom>
+          <a:noFill/>
+        </p:spPr>
+        <p:txBody>
+          <a:bodyPr wrap="square" anchor="t">
+            <a:spAutoFit/>
+          </a:bodyPr>
+          <a:lstStyle/>
+          <a:p>
+            <a:pPr algn="l">
+              <a:defRPr sz="1050" b="0">
+                <a:solidFill>
+                  <a:srgbClr val="141413"/>
+                </a:solidFill>
+                <a:latin typeface="Lora"/>
+              </a:defRPr>
+            </a:pPr>
+            <a:r>
+              <a:t>Functions + files · BRD section checker (5 sections)</a:t>
+            </a:r>
+          </a:p>
+        </p:txBody>
+      </p:sp>
+      <p:sp>
+        <p:nvSpPr>
+          <p:cNvPr id="18" name="Oval 17"/>
+          <p:cNvSpPr/>
+          <p:nvPr/>
+        </p:nvSpPr>
+        <p:spPr>
+          <a:xfrm>
+            <a:off x="7389723" y="1664208"/>
+            <a:ext cx="292608" cy="292608"/>
+          </a:xfrm>
+          <a:prstGeom prst="ellipse">
+            <a:avLst/>
+          </a:prstGeom>
+          <a:solidFill>
+            <a:srgbClr val="788C5D"/>
+          </a:solidFill>
+          <a:ln>
+            <a:noFill/>
+          </a:ln>
+          <a:effectLst/>
+        </p:spPr>
+        <p:style>
+          <a:lnRef idx="1">
+            <a:schemeClr val="accent1"/>
+          </a:lnRef>
+          <a:fillRef idx="3">
+            <a:schemeClr val="accent1"/>
+          </a:fillRef>
+          <a:effectRef idx="2">
+            <a:schemeClr val="accent1"/>
+          </a:effectRef>
+          <a:fontRef idx="minor">
+            <a:schemeClr val="lt1"/>
+          </a:fontRef>
+        </p:style>
+        <p:txBody>
+          <a:bodyPr rtlCol="0" anchor="ctr"/>
+          <a:lstStyle/>
+          <a:p>
+            <a:pPr algn="ctr"/>
+          </a:p>
+        </p:txBody>
+      </p:sp>
+      <p:sp>
+        <p:nvSpPr>
+          <p:cNvPr id="19" name="Rounded Rectangle 18"/>
+          <p:cNvSpPr/>
+          <p:nvPr/>
+        </p:nvSpPr>
+        <p:spPr>
+          <a:xfrm>
+            <a:off x="6233007" y="2194560"/>
+            <a:ext cx="2606040" cy="2286000"/>
+          </a:xfrm>
+          <a:prstGeom prst="roundRect">
+            <a:avLst/>
+          </a:prstGeom>
+          <a:solidFill>
+            <a:srgbClr val="FFFFFF"/>
+          </a:solidFill>
+          <a:ln w="12700">
+            <a:solidFill>
+              <a:srgbClr val="E8E6DC"/>
+            </a:solidFill>
+          </a:ln>
+          <a:effectLst/>
+        </p:spPr>
+        <p:style>
+          <a:lnRef idx="1">
+            <a:schemeClr val="accent1"/>
+          </a:lnRef>
+          <a:fillRef idx="3">
+            <a:schemeClr val="accent1"/>
+          </a:fillRef>
+          <a:effectRef idx="2">
+            <a:schemeClr val="accent1"/>
+          </a:effectRef>
+          <a:fontRef idx="minor">
+            <a:schemeClr val="lt1"/>
+          </a:fontRef>
+        </p:style>
+        <p:txBody>
+          <a:bodyPr rtlCol="0" anchor="ctr"/>
+          <a:lstStyle/>
+          <a:p>
+            <a:pPr algn="ctr"/>
+          </a:p>
+        </p:txBody>
+      </p:sp>
+      <p:sp>
+        <p:nvSpPr>
+          <p:cNvPr id="20" name="Rectangle 19"/>
+          <p:cNvSpPr/>
+          <p:nvPr/>
+        </p:nvSpPr>
+        <p:spPr>
+          <a:xfrm>
+            <a:off x="6233007" y="2194560"/>
+            <a:ext cx="2606040" cy="594360"/>
+          </a:xfrm>
+          <a:prstGeom prst="rect">
+            <a:avLst/>
+          </a:prstGeom>
+          <a:solidFill>
+            <a:srgbClr val="788C5D"/>
+          </a:solidFill>
+          <a:ln>
+            <a:noFill/>
+          </a:ln>
+          <a:effectLst/>
+        </p:spPr>
+        <p:style>
+          <a:lnRef idx="1">
+            <a:schemeClr val="accent1"/>
+          </a:lnRef>
+          <a:fillRef idx="3">
+            <a:schemeClr val="accent1"/>
+          </a:fillRef>
+          <a:effectRef idx="2">
+            <a:schemeClr val="accent1"/>
+          </a:effectRef>
+          <a:fontRef idx="minor">
+            <a:schemeClr val="lt1"/>
+          </a:fontRef>
+        </p:style>
+        <p:txBody>
+          <a:bodyPr rtlCol="0" anchor="ctr"/>
+          <a:lstStyle/>
+          <a:p>
+            <a:pPr algn="ctr"/>
+          </a:p>
+        </p:txBody>
+      </p:sp>
+      <p:sp>
+        <p:nvSpPr>
+          <p:cNvPr id="21" name="TextBox 20"/>
+          <p:cNvSpPr txBox="1"/>
+          <p:nvPr/>
+        </p:nvSpPr>
+        <p:spPr>
+          <a:xfrm>
+            <a:off x="6233007" y="2258568"/>
+            <a:ext cx="2606040" cy="457200"/>
+          </a:xfrm>
+          <a:prstGeom prst="rect">
+            <a:avLst/>
+          </a:prstGeom>
+          <a:noFill/>
+        </p:spPr>
+        <p:txBody>
+          <a:bodyPr wrap="square" anchor="t">
+            <a:spAutoFit/>
+          </a:bodyPr>
+          <a:lstStyle/>
+          <a:p>
+            <a:pPr algn="ctr">
+              <a:defRPr sz="1400" b="1">
+                <a:solidFill>
+                  <a:srgbClr val="FAF9F5"/>
+                </a:solidFill>
+                <a:latin typeface="Poppins"/>
+              </a:defRPr>
+            </a:pPr>
+            <a:r>
+              <a:t>Week 3</a:t>
+            </a:r>
+          </a:p>
+        </p:txBody>
+      </p:sp>
+      <p:sp>
+        <p:nvSpPr>
+          <p:cNvPr id="22" name="TextBox 21"/>
+          <p:cNvSpPr txBox="1"/>
+          <p:nvPr/>
+        </p:nvSpPr>
+        <p:spPr>
+          <a:xfrm>
+            <a:off x="6415887" y="2926080"/>
+            <a:ext cx="2240280" cy="1371600"/>
+          </a:xfrm>
+          <a:prstGeom prst="rect">
+            <a:avLst/>
+          </a:prstGeom>
+          <a:noFill/>
+        </p:spPr>
+        <p:txBody>
+          <a:bodyPr wrap="square" anchor="t">
+            <a:spAutoFit/>
+          </a:bodyPr>
+          <a:lstStyle/>
+          <a:p>
+            <a:pPr algn="l">
+              <a:defRPr sz="1050" b="0">
+                <a:solidFill>
+                  <a:srgbClr val="141413"/>
+                </a:solidFill>
+                <a:latin typeface="Lora"/>
+              </a:defRPr>
+            </a:pPr>
+            <a:r>
+              <a:t>SQLBolt 1–12 · SQLite + Python query</a:t>
+            </a:r>
+          </a:p>
+        </p:txBody>
+      </p:sp>
+      <p:sp>
+        <p:nvSpPr>
+          <p:cNvPr id="23" name="Oval 22"/>
+          <p:cNvSpPr/>
+          <p:nvPr/>
+        </p:nvSpPr>
+        <p:spPr>
+          <a:xfrm>
+            <a:off x="10270083" y="1664208"/>
+            <a:ext cx="292608" cy="292608"/>
+          </a:xfrm>
+          <a:prstGeom prst="ellipse">
+            <a:avLst/>
+          </a:prstGeom>
+          <a:solidFill>
+            <a:srgbClr val="C46686"/>
+          </a:solidFill>
+          <a:ln>
+            <a:noFill/>
+          </a:ln>
+          <a:effectLst/>
+        </p:spPr>
+        <p:style>
+          <a:lnRef idx="1">
+            <a:schemeClr val="accent1"/>
+          </a:lnRef>
+          <a:fillRef idx="3">
+            <a:schemeClr val="accent1"/>
+          </a:fillRef>
+          <a:effectRef idx="2">
+            <a:schemeClr val="accent1"/>
+          </a:effectRef>
+          <a:fontRef idx="minor">
+            <a:schemeClr val="lt1"/>
+          </a:fontRef>
+        </p:style>
+        <p:txBody>
+          <a:bodyPr rtlCol="0" anchor="ctr"/>
+          <a:lstStyle/>
+          <a:p>
+            <a:pPr algn="ctr"/>
+          </a:p>
+        </p:txBody>
+      </p:sp>
+      <p:sp>
+        <p:nvSpPr>
+          <p:cNvPr id="24" name="Rounded Rectangle 23"/>
+          <p:cNvSpPr/>
+          <p:nvPr/>
+        </p:nvSpPr>
+        <p:spPr>
+          <a:xfrm>
+            <a:off x="9113367" y="2194560"/>
+            <a:ext cx="2606040" cy="2286000"/>
+          </a:xfrm>
+          <a:prstGeom prst="roundRect">
+            <a:avLst/>
+          </a:prstGeom>
+          <a:solidFill>
+            <a:srgbClr val="FFFFFF"/>
+          </a:solidFill>
+          <a:ln w="12700">
+            <a:solidFill>
+              <a:srgbClr val="E8E6DC"/>
+            </a:solidFill>
+          </a:ln>
+          <a:effectLst/>
+        </p:spPr>
+        <p:style>
+          <a:lnRef idx="1">
+            <a:schemeClr val="accent1"/>
+          </a:lnRef>
+          <a:fillRef idx="3">
+            <a:schemeClr val="accent1"/>
+          </a:fillRef>
+          <a:effectRef idx="2">
+            <a:schemeClr val="accent1"/>
+          </a:effectRef>
+          <a:fontRef idx="minor">
+            <a:schemeClr val="lt1"/>
+          </a:fontRef>
+        </p:style>
+        <p:txBody>
+          <a:bodyPr rtlCol="0" anchor="ctr"/>
+          <a:lstStyle/>
+          <a:p>
+            <a:pPr algn="ctr"/>
+          </a:p>
+        </p:txBody>
+      </p:sp>
+      <p:sp>
+        <p:nvSpPr>
+          <p:cNvPr id="25" name="Rectangle 24"/>
+          <p:cNvSpPr/>
+          <p:nvPr/>
+        </p:nvSpPr>
+        <p:spPr>
+          <a:xfrm>
+            <a:off x="9113367" y="2194560"/>
+            <a:ext cx="2606040" cy="594360"/>
+          </a:xfrm>
+          <a:prstGeom prst="rect">
+            <a:avLst/>
+          </a:prstGeom>
+          <a:solidFill>
+            <a:srgbClr val="C46686"/>
+          </a:solidFill>
+          <a:ln>
+            <a:noFill/>
+          </a:ln>
+          <a:effectLst/>
+        </p:spPr>
+        <p:style>
+          <a:lnRef idx="1">
+            <a:schemeClr val="accent1"/>
+          </a:lnRef>
+          <a:fillRef idx="3">
+            <a:schemeClr val="accent1"/>
+          </a:fillRef>
+          <a:effectRef idx="2">
+            <a:schemeClr val="accent1"/>
+          </a:effectRef>
+          <a:fontRef idx="minor">
+            <a:schemeClr val="lt1"/>
+          </a:fontRef>
+        </p:style>
+        <p:txBody>
+          <a:bodyPr rtlCol="0" anchor="ctr"/>
+          <a:lstStyle/>
+          <a:p>
+            <a:pPr algn="ctr"/>
+          </a:p>
+        </p:txBody>
+      </p:sp>
+      <p:sp>
+        <p:nvSpPr>
+          <p:cNvPr id="26" name="TextBox 25"/>
+          <p:cNvSpPr txBox="1"/>
+          <p:nvPr/>
+        </p:nvSpPr>
+        <p:spPr>
+          <a:xfrm>
+            <a:off x="9113367" y="2258568"/>
+            <a:ext cx="2606040" cy="457200"/>
+          </a:xfrm>
+          <a:prstGeom prst="rect">
+            <a:avLst/>
+          </a:prstGeom>
+          <a:noFill/>
+        </p:spPr>
+        <p:txBody>
+          <a:bodyPr wrap="square" anchor="t">
+            <a:spAutoFit/>
+          </a:bodyPr>
+          <a:lstStyle/>
+          <a:p>
+            <a:pPr algn="ctr">
+              <a:defRPr sz="1400" b="1">
+                <a:solidFill>
+                  <a:srgbClr val="FAF9F5"/>
+                </a:solidFill>
+                <a:latin typeface="Poppins"/>
+              </a:defRPr>
+            </a:pPr>
+            <a:r>
+              <a:t>Week 4</a:t>
+            </a:r>
+          </a:p>
+        </p:txBody>
+      </p:sp>
+      <p:sp>
+        <p:nvSpPr>
+          <p:cNvPr id="27" name="TextBox 26"/>
+          <p:cNvSpPr txBox="1"/>
+          <p:nvPr/>
+        </p:nvSpPr>
+        <p:spPr>
+          <a:xfrm>
+            <a:off x="9296247" y="2926080"/>
+            <a:ext cx="2240280" cy="1371600"/>
+          </a:xfrm>
+          <a:prstGeom prst="rect">
+            <a:avLst/>
+          </a:prstGeom>
+          <a:noFill/>
+        </p:spPr>
+        <p:txBody>
+          <a:bodyPr wrap="square" anchor="t">
+            <a:spAutoFit/>
+          </a:bodyPr>
+          <a:lstStyle/>
+          <a:p>
+            <a:pPr algn="l">
+              <a:defRPr sz="1050" b="0">
+                <a:solidFill>
+                  <a:srgbClr val="141413"/>
+                </a:solidFill>
+                <a:latin typeface="Lora"/>
+              </a:defRPr>
+            </a:pPr>
+            <a:r>
+              <a:t>pandas read_csv · one lending KPI chart</a:t>
+            </a:r>
+          </a:p>
+        </p:txBody>
+      </p:sp>
+      <p:sp>
+        <p:nvSpPr>
+          <p:cNvPr id="28" name="TextBox 27"/>
+          <p:cNvSpPr txBox="1"/>
+          <p:nvPr/>
+        </p:nvSpPr>
+        <p:spPr>
+          <a:xfrm>
+            <a:off x="502920" y="4663440"/>
+            <a:ext cx="11155680" cy="457200"/>
+          </a:xfrm>
+          <a:prstGeom prst="rect">
+            <a:avLst/>
+          </a:prstGeom>
+          <a:noFill/>
+        </p:spPr>
+        <p:txBody>
+          <a:bodyPr wrap="square" anchor="t">
+            <a:spAutoFit/>
+          </a:bodyPr>
+          <a:lstStyle/>
+          <a:p>
+            <a:pPr algn="ctr">
+              <a:defRPr sz="1200" b="1">
+                <a:solidFill>
+                  <a:srgbClr val="141413"/>
+                </a:solidFill>
+                <a:latin typeface="Lora"/>
+              </a:defRPr>
+            </a:pPr>
+            <a:r>
+              <a:t>Full syllabus: curriculum/zero-to-ai-expert-syllabus.md</a:t>
+            </a:r>
+          </a:p>
+        </p:txBody>
+      </p:sp>
+      <p:sp>
+        <p:nvSpPr>
+          <p:cNvPr id="29" name="TextBox 28"/>
+          <p:cNvSpPr txBox="1"/>
+          <p:nvPr/>
+        </p:nvSpPr>
+        <p:spPr>
+          <a:xfrm>
+            <a:off x="502920" y="6446520"/>
+            <a:ext cx="8229600" cy="274320"/>
+          </a:xfrm>
+          <a:prstGeom prst="rect">
+            <a:avLst/>
+          </a:prstGeom>
+          <a:noFill/>
+        </p:spPr>
+        <p:txBody>
+          <a:bodyPr wrap="square" anchor="t">
+            <a:spAutoFit/>
+          </a:bodyPr>
+          <a:lstStyle/>
+          <a:p>
+            <a:pPr algn="l">
+              <a:defRPr sz="900" b="0">
+                <a:solidFill>
+                  <a:srgbClr val="5E5D59"/>
+                </a:solidFill>
+                <a:latin typeface="Lora"/>
+              </a:defRPr>
+            </a:pPr>
+            <a:r>
+              <a:t>Zero to AI Expert  ·  Banking domain path</a:t>
+            </a:r>
+          </a:p>
+        </p:txBody>
+      </p:sp>
+      <p:sp>
+        <p:nvSpPr>
+          <p:cNvPr id="30" name="TextBox 29"/>
+          <p:cNvSpPr txBox="1"/>
+          <p:nvPr/>
+        </p:nvSpPr>
+        <p:spPr>
+          <a:xfrm>
+            <a:off x="10789920" y="6446520"/>
+            <a:ext cx="914400" cy="274320"/>
+          </a:xfrm>
+          <a:prstGeom prst="rect">
+            <a:avLst/>
+          </a:prstGeom>
+          <a:noFill/>
+        </p:spPr>
+        <p:txBody>
+          <a:bodyPr wrap="square" anchor="t">
+            <a:spAutoFit/>
+          </a:bodyPr>
+          <a:lstStyle/>
+          <a:p>
+            <a:pPr algn="r">
+              <a:defRPr sz="900" b="1">
+                <a:solidFill>
+                  <a:srgbClr val="5E5D59"/>
+                </a:solidFill>
+                <a:latin typeface="Lora"/>
+              </a:defRPr>
+            </a:pPr>
+            <a:r>
+              <a:t>13</a:t>
+            </a:r>
+          </a:p>
+        </p:txBody>
+      </p:sp>
+    </p:spTree>
+  </p:cSld>
+  <p:clrMapOvr>
+    <a:masterClrMapping/>
+  </p:clrMapOvr>
+</p:sld>
+</file>
+
+<file path=ppt/slides/slide14.xml><?xml version="1.0" encoding="utf-8"?>
+<p:sld xmlns:a="http://schemas.openxmlformats.org/drawingml/2006/main" xmlns:p="http://schemas.openxmlformats.org/presentationml/2006/main" xmlns:r="http://schemas.openxmlformats.org/officeDocument/2006/relationships">
+  <p:cSld>
+    <p:spTree>
+      <p:nvGrpSpPr>
+        <p:cNvPr id="1" name=""/>
+        <p:cNvGrpSpPr/>
+        <p:nvPr/>
+      </p:nvGrpSpPr>
+      <p:grpSpPr/>
+      <p:sp>
+        <p:nvSpPr>
+          <p:cNvPr id="2" name="Rectangle 1"/>
+          <p:cNvSpPr/>
+          <p:nvPr/>
+        </p:nvSpPr>
+        <p:spPr>
+          <a:xfrm>
+            <a:off x="0" y="0"/>
+            <a:ext cx="12191695" cy="6858000"/>
+          </a:xfrm>
+          <a:prstGeom prst="rect">
+            <a:avLst/>
+          </a:prstGeom>
+          <a:solidFill>
             <a:srgbClr val="141413"/>
           </a:solidFill>
           <a:ln>
@@ -7859,7 +9126,7 @@
               </a:defRPr>
             </a:pPr>
             <a:r>
-              <a:t>Run: python3 ai-factory/generate_ai_roadmap_slides.py  ·  Read: zero-to-ai-expert-syllabus.md</a:t>
+              <a:t>Run: python3 curriculum/generate_ai_roadmap_slides.py  ·  Read: zero-to-ai-expert-syllabus.md</a:t>
             </a:r>
           </a:p>
         </p:txBody>
@@ -8477,7 +9744,7 @@
               </a:defRPr>
             </a:pPr>
             <a:r>
-              <a:t>2 banking AI projects · LangGraph copilot · ML model · GitHub portfolio</a:t>
+              <a:t>2 banking AI projects · LangGraph copilot · ML model · HoAI artifacts (Track B)</a:t>
             </a:r>
           </a:p>
         </p:txBody>
@@ -15301,7 +16568,7 @@
               </a:defRPr>
             </a:pPr>
             <a:r>
-              <a:t>SUSTAINABLE PACE</a:t>
+              <a:t>8H TRACK A · 2H TRACK B ON MILESTONE WEEKS</a:t>
             </a:r>
           </a:p>
         </p:txBody>
@@ -16525,7 +17792,7 @@
               </a:defRPr>
             </a:pPr>
             <a:r>
-              <a:t>Debug / stretch</a:t>
+              <a:t>Debug / Track B template</a:t>
             </a:r>
           </a:p>
         </p:txBody>
@@ -16553,7 +17820,7 @@
           <a:lstStyle/>
           <a:p>
             <a:pPr algn="ctr">
-              <a:defRPr sz="1300" b="1">
+              <a:defRPr sz="1200" b="1">
                 <a:solidFill>
                   <a:srgbClr val="141413"/>
                 </a:solidFill>
@@ -16561,7 +17828,7 @@
               </a:defRPr>
             </a:pPr>
             <a:r>
-              <a:t>Rule: never watch without coding the same day · Sun = rest</a:t>
+              <a:t>Rule: never watch without coding the same day · Track B on W8/16/28/40/52 · Sun = rest</a:t>
             </a:r>
           </a:p>
         </p:txBody>
@@ -16819,7 +18086,7 @@
               </a:defRPr>
             </a:pPr>
             <a:r>
-              <a:t>PROJECT MAP</a:t>
+              <a:t>2H/WEEK · VPBANK HOAI-ALIGNED</a:t>
             </a:r>
           </a:p>
         </p:txBody>
@@ -16855,7 +18122,7 @@
               </a:defRPr>
             </a:pPr>
             <a:r>
-              <a:t>Use banking domain as your edge</a:t>
+              <a:t>Track B — Head of AI Factory</a:t>
             </a:r>
           </a:p>
         </p:txBody>
@@ -16869,7 +18136,7 @@
         <p:spPr>
           <a:xfrm>
             <a:off x="540867" y="1737360"/>
-            <a:ext cx="3520440" cy="1325880"/>
+            <a:ext cx="5349240" cy="1234440"/>
           </a:xfrm>
           <a:prstGeom prst="roundRect">
             <a:avLst/>
@@ -16877,9 +18144,9 @@
           <a:solidFill>
             <a:srgbClr val="FFFFFF"/>
           </a:solidFill>
-          <a:ln w="12700">
+          <a:ln w="25400">
             <a:solidFill>
-              <a:srgbClr val="E8E6DC"/>
+              <a:srgbClr val="D97757"/>
             </a:solidFill>
           </a:ln>
           <a:effectLst/>
@@ -16908,23 +18175,133 @@
       </p:sp>
       <p:sp>
         <p:nvSpPr>
-          <p:cNvPr id="8" name="Rounded Rectangle 7"/>
+          <p:cNvPr id="8" name="TextBox 7"/>
+          <p:cNvSpPr txBox="1"/>
+          <p:nvPr/>
+        </p:nvSpPr>
+        <p:spPr>
+          <a:xfrm>
+            <a:off x="723747" y="1874519"/>
+            <a:ext cx="914400" cy="320040"/>
+          </a:xfrm>
+          <a:prstGeom prst="rect">
+            <a:avLst/>
+          </a:prstGeom>
+          <a:noFill/>
+        </p:spPr>
+        <p:txBody>
+          <a:bodyPr wrap="square" anchor="t">
+            <a:spAutoFit/>
+          </a:bodyPr>
+          <a:lstStyle/>
+          <a:p>
+            <a:pPr algn="l">
+              <a:defRPr sz="1200" b="1">
+                <a:solidFill>
+                  <a:srgbClr val="D97757"/>
+                </a:solidFill>
+                <a:latin typeface="Lora"/>
+              </a:defRPr>
+            </a:pPr>
+            <a:r>
+              <a:t>H0</a:t>
+            </a:r>
+          </a:p>
+        </p:txBody>
+      </p:sp>
+      <p:sp>
+        <p:nvSpPr>
+          <p:cNvPr id="9" name="TextBox 8"/>
+          <p:cNvSpPr txBox="1"/>
+          <p:nvPr/>
+        </p:nvSpPr>
+        <p:spPr>
+          <a:xfrm>
+            <a:off x="1638147" y="1874519"/>
+            <a:ext cx="4114800" cy="320040"/>
+          </a:xfrm>
+          <a:prstGeom prst="rect">
+            <a:avLst/>
+          </a:prstGeom>
+          <a:noFill/>
+        </p:spPr>
+        <p:txBody>
+          <a:bodyPr wrap="square" anchor="t">
+            <a:spAutoFit/>
+          </a:bodyPr>
+          <a:lstStyle/>
+          <a:p>
+            <a:pPr algn="l">
+              <a:defRPr sz="1000" b="0">
+                <a:solidFill>
+                  <a:srgbClr val="5E5D59"/>
+                </a:solidFill>
+                <a:latin typeface="Lora"/>
+              </a:defRPr>
+            </a:pPr>
+            <a:r>
+              <a:t>Week 8</a:t>
+            </a:r>
+          </a:p>
+        </p:txBody>
+      </p:sp>
+      <p:sp>
+        <p:nvSpPr>
+          <p:cNvPr id="10" name="TextBox 9"/>
+          <p:cNvSpPr txBox="1"/>
+          <p:nvPr/>
+        </p:nvSpPr>
+        <p:spPr>
+          <a:xfrm>
+            <a:off x="723747" y="2240280"/>
+            <a:ext cx="4983479" cy="640080"/>
+          </a:xfrm>
+          <a:prstGeom prst="rect">
+            <a:avLst/>
+          </a:prstGeom>
+          <a:noFill/>
+        </p:spPr>
+        <p:txBody>
+          <a:bodyPr wrap="square" anchor="t">
+            <a:spAutoFit/>
+          </a:bodyPr>
+          <a:lstStyle/>
+          <a:p>
+            <a:pPr algn="l">
+              <a:defRPr sz="1000" b="1">
+                <a:solidFill>
+                  <a:srgbClr val="141413"/>
+                </a:solidFill>
+                <a:latin typeface="Lora"/>
+              </a:defRPr>
+            </a:pPr>
+            <a:r>
+              <a:t>AI strategy on one page (5 pillars)</a:t>
+            </a:r>
+          </a:p>
+        </p:txBody>
+      </p:sp>
+      <p:sp>
+        <p:nvSpPr>
+          <p:cNvPr id="11" name="Rounded Rectangle 10"/>
           <p:cNvSpPr/>
           <p:nvPr/>
         </p:nvSpPr>
         <p:spPr>
           <a:xfrm>
-            <a:off x="540867" y="1737360"/>
-            <a:ext cx="109728" cy="1325880"/>
+            <a:off x="6301587" y="1737360"/>
+            <a:ext cx="5349240" cy="1234440"/>
           </a:xfrm>
           <a:prstGeom prst="roundRect">
             <a:avLst/>
           </a:prstGeom>
           <a:solidFill>
-            <a:srgbClr val="C46686"/>
+            <a:srgbClr val="FFFFFF"/>
           </a:solidFill>
-          <a:ln>
-            <a:noFill/>
+          <a:ln w="25400">
+            <a:solidFill>
+              <a:srgbClr val="6A9BCC"/>
+            </a:solidFill>
           </a:ln>
           <a:effectLst/>
         </p:spPr>
@@ -16952,14 +18329,14 @@
       </p:sp>
       <p:sp>
         <p:nvSpPr>
-          <p:cNvPr id="9" name="TextBox 8"/>
-          <p:cNvSpPr txBox="1"/>
-          <p:nvPr/>
-        </p:nvSpPr>
-        <p:spPr>
-          <a:xfrm>
-            <a:off x="796899" y="1901952"/>
-            <a:ext cx="3108960" cy="457200"/>
+          <p:cNvPr id="12" name="TextBox 11"/>
+          <p:cNvSpPr txBox="1"/>
+          <p:nvPr/>
+        </p:nvSpPr>
+        <p:spPr>
+          <a:xfrm>
+            <a:off x="6484467" y="1874519"/>
+            <a:ext cx="914400" cy="320040"/>
           </a:xfrm>
           <a:prstGeom prst="rect">
             <a:avLst/>
@@ -16973,65 +18350,101 @@
           <a:lstStyle/>
           <a:p>
             <a:pPr algn="l">
-              <a:defRPr sz="1400" b="1">
+              <a:defRPr sz="1200" b="1">
+                <a:solidFill>
+                  <a:srgbClr val="6A9BCC"/>
+                </a:solidFill>
+                <a:latin typeface="Lora"/>
+              </a:defRPr>
+            </a:pPr>
+            <a:r>
+              <a:t>H1</a:t>
+            </a:r>
+          </a:p>
+        </p:txBody>
+      </p:sp>
+      <p:sp>
+        <p:nvSpPr>
+          <p:cNvPr id="13" name="TextBox 12"/>
+          <p:cNvSpPr txBox="1"/>
+          <p:nvPr/>
+        </p:nvSpPr>
+        <p:spPr>
+          <a:xfrm>
+            <a:off x="7398867" y="1874519"/>
+            <a:ext cx="4114800" cy="320040"/>
+          </a:xfrm>
+          <a:prstGeom prst="rect">
+            <a:avLst/>
+          </a:prstGeom>
+          <a:noFill/>
+        </p:spPr>
+        <p:txBody>
+          <a:bodyPr wrap="square" anchor="t">
+            <a:spAutoFit/>
+          </a:bodyPr>
+          <a:lstStyle/>
+          <a:p>
+            <a:pPr algn="l">
+              <a:defRPr sz="1000" b="0">
+                <a:solidFill>
+                  <a:srgbClr val="5E5D59"/>
+                </a:solidFill>
+                <a:latin typeface="Lora"/>
+              </a:defRPr>
+            </a:pPr>
+            <a:r>
+              <a:t>Week 16</a:t>
+            </a:r>
+          </a:p>
+        </p:txBody>
+      </p:sp>
+      <p:sp>
+        <p:nvSpPr>
+          <p:cNvPr id="14" name="TextBox 13"/>
+          <p:cNvSpPr txBox="1"/>
+          <p:nvPr/>
+        </p:nvSpPr>
+        <p:spPr>
+          <a:xfrm>
+            <a:off x="6484467" y="2240280"/>
+            <a:ext cx="4983479" cy="640080"/>
+          </a:xfrm>
+          <a:prstGeom prst="rect">
+            <a:avLst/>
+          </a:prstGeom>
+          <a:noFill/>
+        </p:spPr>
+        <p:txBody>
+          <a:bodyPr wrap="square" anchor="t">
+            <a:spAutoFit/>
+          </a:bodyPr>
+          <a:lstStyle/>
+          <a:p>
+            <a:pPr algn="l">
+              <a:defRPr sz="1000" b="1">
                 <a:solidFill>
                   <a:srgbClr val="141413"/>
                 </a:solidFill>
-                <a:latin typeface="Poppins"/>
-              </a:defRPr>
-            </a:pPr>
-            <a:r>
-              <a:t>Credit PD model</a:t>
-            </a:r>
-          </a:p>
-        </p:txBody>
-      </p:sp>
-      <p:sp>
-        <p:nvSpPr>
-          <p:cNvPr id="10" name="TextBox 9"/>
-          <p:cNvSpPr txBox="1"/>
-          <p:nvPr/>
-        </p:nvSpPr>
-        <p:spPr>
-          <a:xfrm>
-            <a:off x="796899" y="2286000"/>
-            <a:ext cx="3108960" cy="704087"/>
-          </a:xfrm>
-          <a:prstGeom prst="rect">
-            <a:avLst/>
-          </a:prstGeom>
-          <a:noFill/>
-        </p:spPr>
-        <p:txBody>
-          <a:bodyPr wrap="square" anchor="t">
-            <a:spAutoFit/>
-          </a:bodyPr>
-          <a:lstStyle/>
-          <a:p>
-            <a:pPr algn="l">
-              <a:defRPr sz="1050" b="0">
-                <a:solidFill>
-                  <a:srgbClr val="5E5D59"/>
-                </a:solidFill>
                 <a:latin typeface="Lora"/>
               </a:defRPr>
             </a:pPr>
             <a:r>
-              <a:t>Classical ML · Month 4–5</a:t>
-            </a:r>
-          </a:p>
-        </p:txBody>
-      </p:sp>
-      <p:sp>
-        <p:nvSpPr>
-          <p:cNvPr id="11" name="Rounded Rectangle 10"/>
+              <a:t>PD model value case with VND/bps metric</a:t>
+            </a:r>
+          </a:p>
+        </p:txBody>
+      </p:sp>
+      <p:sp>
+        <p:nvSpPr>
+          <p:cNvPr id="15" name="Rounded Rectangle 14"/>
           <p:cNvSpPr/>
           <p:nvPr/>
         </p:nvSpPr>
         <p:spPr>
           <a:xfrm>
-            <a:off x="4335627" y="1737360"/>
-            <a:ext cx="3520440" cy="1325880"/>
+            <a:off x="540867" y="3227832"/>
+            <a:ext cx="5349240" cy="1234440"/>
           </a:xfrm>
           <a:prstGeom prst="roundRect">
             <a:avLst/>
@@ -17039,9 +18452,9 @@
           <a:solidFill>
             <a:srgbClr val="FFFFFF"/>
           </a:solidFill>
-          <a:ln w="12700">
+          <a:ln w="25400">
             <a:solidFill>
-              <a:srgbClr val="E8E6DC"/>
+              <a:srgbClr val="C46686"/>
             </a:solidFill>
           </a:ln>
           <a:effectLst/>
@@ -17070,23 +18483,133 @@
       </p:sp>
       <p:sp>
         <p:nvSpPr>
-          <p:cNvPr id="12" name="Rounded Rectangle 11"/>
+          <p:cNvPr id="16" name="TextBox 15"/>
+          <p:cNvSpPr txBox="1"/>
+          <p:nvPr/>
+        </p:nvSpPr>
+        <p:spPr>
+          <a:xfrm>
+            <a:off x="723747" y="3364992"/>
+            <a:ext cx="914400" cy="320040"/>
+          </a:xfrm>
+          <a:prstGeom prst="rect">
+            <a:avLst/>
+          </a:prstGeom>
+          <a:noFill/>
+        </p:spPr>
+        <p:txBody>
+          <a:bodyPr wrap="square" anchor="t">
+            <a:spAutoFit/>
+          </a:bodyPr>
+          <a:lstStyle/>
+          <a:p>
+            <a:pPr algn="l">
+              <a:defRPr sz="1200" b="1">
+                <a:solidFill>
+                  <a:srgbClr val="C46686"/>
+                </a:solidFill>
+                <a:latin typeface="Lora"/>
+              </a:defRPr>
+            </a:pPr>
+            <a:r>
+              <a:t>H2</a:t>
+            </a:r>
+          </a:p>
+        </p:txBody>
+      </p:sp>
+      <p:sp>
+        <p:nvSpPr>
+          <p:cNvPr id="17" name="TextBox 16"/>
+          <p:cNvSpPr txBox="1"/>
+          <p:nvPr/>
+        </p:nvSpPr>
+        <p:spPr>
+          <a:xfrm>
+            <a:off x="1638147" y="3364992"/>
+            <a:ext cx="4114800" cy="320040"/>
+          </a:xfrm>
+          <a:prstGeom prst="rect">
+            <a:avLst/>
+          </a:prstGeom>
+          <a:noFill/>
+        </p:spPr>
+        <p:txBody>
+          <a:bodyPr wrap="square" anchor="t">
+            <a:spAutoFit/>
+          </a:bodyPr>
+          <a:lstStyle/>
+          <a:p>
+            <a:pPr algn="l">
+              <a:defRPr sz="1000" b="0">
+                <a:solidFill>
+                  <a:srgbClr val="5E5D59"/>
+                </a:solidFill>
+                <a:latin typeface="Lora"/>
+              </a:defRPr>
+            </a:pPr>
+            <a:r>
+              <a:t>Week 28</a:t>
+            </a:r>
+          </a:p>
+        </p:txBody>
+      </p:sp>
+      <p:sp>
+        <p:nvSpPr>
+          <p:cNvPr id="18" name="TextBox 17"/>
+          <p:cNvSpPr txBox="1"/>
+          <p:nvPr/>
+        </p:nvSpPr>
+        <p:spPr>
+          <a:xfrm>
+            <a:off x="723747" y="3730752"/>
+            <a:ext cx="4983479" cy="640080"/>
+          </a:xfrm>
+          <a:prstGeom prst="rect">
+            <a:avLst/>
+          </a:prstGeom>
+          <a:noFill/>
+        </p:spPr>
+        <p:txBody>
+          <a:bodyPr wrap="square" anchor="t">
+            <a:spAutoFit/>
+          </a:bodyPr>
+          <a:lstStyle/>
+          <a:p>
+            <a:pPr algn="l">
+              <a:defRPr sz="1000" b="1">
+                <a:solidFill>
+                  <a:srgbClr val="141413"/>
+                </a:solidFill>
+                <a:latin typeface="Lora"/>
+              </a:defRPr>
+            </a:pPr>
+            <a:r>
+              <a:t>Policy copilot G1/G2/G3 governance checklist</a:t>
+            </a:r>
+          </a:p>
+        </p:txBody>
+      </p:sp>
+      <p:sp>
+        <p:nvSpPr>
+          <p:cNvPr id="19" name="Rounded Rectangle 18"/>
           <p:cNvSpPr/>
           <p:nvPr/>
         </p:nvSpPr>
         <p:spPr>
           <a:xfrm>
-            <a:off x="4335627" y="1737360"/>
-            <a:ext cx="109728" cy="1325880"/>
+            <a:off x="6301587" y="3227832"/>
+            <a:ext cx="5349240" cy="1234440"/>
           </a:xfrm>
           <a:prstGeom prst="roundRect">
             <a:avLst/>
           </a:prstGeom>
           <a:solidFill>
-            <a:srgbClr val="6A9BCC"/>
+            <a:srgbClr val="FFFFFF"/>
           </a:solidFill>
-          <a:ln>
-            <a:noFill/>
+          <a:ln w="25400">
+            <a:solidFill>
+              <a:srgbClr val="788C5D"/>
+            </a:solidFill>
           </a:ln>
           <a:effectLst/>
         </p:spPr>
@@ -17114,14 +18637,14 @@
       </p:sp>
       <p:sp>
         <p:nvSpPr>
-          <p:cNvPr id="13" name="TextBox 12"/>
-          <p:cNvSpPr txBox="1"/>
-          <p:nvPr/>
-        </p:nvSpPr>
-        <p:spPr>
-          <a:xfrm>
-            <a:off x="4591659" y="1901952"/>
-            <a:ext cx="3108960" cy="457200"/>
+          <p:cNvPr id="20" name="TextBox 19"/>
+          <p:cNvSpPr txBox="1"/>
+          <p:nvPr/>
+        </p:nvSpPr>
+        <p:spPr>
+          <a:xfrm>
+            <a:off x="6484467" y="3364992"/>
+            <a:ext cx="914400" cy="320040"/>
           </a:xfrm>
           <a:prstGeom prst="rect">
             <a:avLst/>
@@ -17135,65 +18658,101 @@
           <a:lstStyle/>
           <a:p>
             <a:pPr algn="l">
-              <a:defRPr sz="1400" b="1">
+              <a:defRPr sz="1200" b="1">
+                <a:solidFill>
+                  <a:srgbClr val="788C5D"/>
+                </a:solidFill>
+                <a:latin typeface="Lora"/>
+              </a:defRPr>
+            </a:pPr>
+            <a:r>
+              <a:t>H3</a:t>
+            </a:r>
+          </a:p>
+        </p:txBody>
+      </p:sp>
+      <p:sp>
+        <p:nvSpPr>
+          <p:cNvPr id="21" name="TextBox 20"/>
+          <p:cNvSpPr txBox="1"/>
+          <p:nvPr/>
+        </p:nvSpPr>
+        <p:spPr>
+          <a:xfrm>
+            <a:off x="7398867" y="3364992"/>
+            <a:ext cx="4114800" cy="320040"/>
+          </a:xfrm>
+          <a:prstGeom prst="rect">
+            <a:avLst/>
+          </a:prstGeom>
+          <a:noFill/>
+        </p:spPr>
+        <p:txBody>
+          <a:bodyPr wrap="square" anchor="t">
+            <a:spAutoFit/>
+          </a:bodyPr>
+          <a:lstStyle/>
+          <a:p>
+            <a:pPr algn="l">
+              <a:defRPr sz="1000" b="0">
+                <a:solidFill>
+                  <a:srgbClr val="5E5D59"/>
+                </a:solidFill>
+                <a:latin typeface="Lora"/>
+              </a:defRPr>
+            </a:pPr>
+            <a:r>
+              <a:t>Week 40</a:t>
+            </a:r>
+          </a:p>
+        </p:txBody>
+      </p:sp>
+      <p:sp>
+        <p:nvSpPr>
+          <p:cNvPr id="22" name="TextBox 21"/>
+          <p:cNvSpPr txBox="1"/>
+          <p:nvPr/>
+        </p:nvSpPr>
+        <p:spPr>
+          <a:xfrm>
+            <a:off x="6484467" y="3730752"/>
+            <a:ext cx="4983479" cy="640080"/>
+          </a:xfrm>
+          <a:prstGeom prst="rect">
+            <a:avLst/>
+          </a:prstGeom>
+          <a:noFill/>
+        </p:spPr>
+        <p:txBody>
+          <a:bodyPr wrap="square" anchor="t">
+            <a:spAutoFit/>
+          </a:bodyPr>
+          <a:lstStyle/>
+          <a:p>
+            <a:pPr algn="l">
+              <a:defRPr sz="1000" b="1">
                 <a:solidFill>
                   <a:srgbClr val="141413"/>
                 </a:solidFill>
-                <a:latin typeface="Poppins"/>
-              </a:defRPr>
-            </a:pPr>
-            <a:r>
-              <a:t>Policy RAG copilot</a:t>
-            </a:r>
-          </a:p>
-        </p:txBody>
-      </p:sp>
-      <p:sp>
-        <p:nvSpPr>
-          <p:cNvPr id="14" name="TextBox 13"/>
-          <p:cNvSpPr txBox="1"/>
-          <p:nvPr/>
-        </p:nvSpPr>
-        <p:spPr>
-          <a:xfrm>
-            <a:off x="4591659" y="2286000"/>
-            <a:ext cx="3108960" cy="704087"/>
-          </a:xfrm>
-          <a:prstGeom prst="rect">
-            <a:avLst/>
-          </a:prstGeom>
-          <a:noFill/>
-        </p:spPr>
-        <p:txBody>
-          <a:bodyPr wrap="square" anchor="t">
-            <a:spAutoFit/>
-          </a:bodyPr>
-          <a:lstStyle/>
-          <a:p>
-            <a:pPr algn="l">
-              <a:defRPr sz="1050" b="0">
-                <a:solidFill>
-                  <a:srgbClr val="5E5D59"/>
-                </a:solidFill>
                 <a:latin typeface="Lora"/>
               </a:defRPr>
             </a:pPr>
             <a:r>
-              <a:t>LangGraph · Month 7–8</a:t>
-            </a:r>
-          </a:p>
-        </p:txBody>
-      </p:sp>
-      <p:sp>
-        <p:nvSpPr>
-          <p:cNvPr id="15" name="Rounded Rectangle 14"/>
+              <a:t>90-day AI Factory pilot plan</a:t>
+            </a:r>
+          </a:p>
+        </p:txBody>
+      </p:sp>
+      <p:sp>
+        <p:nvSpPr>
+          <p:cNvPr id="23" name="Rounded Rectangle 22"/>
           <p:cNvSpPr/>
           <p:nvPr/>
         </p:nvSpPr>
         <p:spPr>
           <a:xfrm>
-            <a:off x="8130387" y="1737360"/>
-            <a:ext cx="3520440" cy="1325880"/>
+            <a:off x="540867" y="4718304"/>
+            <a:ext cx="5349240" cy="1234440"/>
           </a:xfrm>
           <a:prstGeom prst="roundRect">
             <a:avLst/>
@@ -17201,9 +18760,9 @@
           <a:solidFill>
             <a:srgbClr val="FFFFFF"/>
           </a:solidFill>
-          <a:ln w="12700">
+          <a:ln w="25400">
             <a:solidFill>
-              <a:srgbClr val="E8E6DC"/>
+              <a:srgbClr val="BCD1CA"/>
             </a:solidFill>
           </a:ln>
           <a:effectLst/>
@@ -17232,58 +18791,14 @@
       </p:sp>
       <p:sp>
         <p:nvSpPr>
-          <p:cNvPr id="16" name="Rounded Rectangle 15"/>
-          <p:cNvSpPr/>
-          <p:nvPr/>
-        </p:nvSpPr>
-        <p:spPr>
-          <a:xfrm>
-            <a:off x="8130387" y="1737360"/>
-            <a:ext cx="109728" cy="1325880"/>
-          </a:xfrm>
-          <a:prstGeom prst="roundRect">
-            <a:avLst/>
-          </a:prstGeom>
-          <a:solidFill>
-            <a:srgbClr val="788C5D"/>
-          </a:solidFill>
-          <a:ln>
-            <a:noFill/>
-          </a:ln>
-          <a:effectLst/>
-        </p:spPr>
-        <p:style>
-          <a:lnRef idx="1">
-            <a:schemeClr val="accent1"/>
-          </a:lnRef>
-          <a:fillRef idx="3">
-            <a:schemeClr val="accent1"/>
-          </a:fillRef>
-          <a:effectRef idx="2">
-            <a:schemeClr val="accent1"/>
-          </a:effectRef>
-          <a:fontRef idx="minor">
-            <a:schemeClr val="lt1"/>
-          </a:fontRef>
-        </p:style>
-        <p:txBody>
-          <a:bodyPr rtlCol="0" anchor="ctr"/>
-          <a:lstStyle/>
-          <a:p>
-            <a:pPr algn="ctr"/>
-          </a:p>
-        </p:txBody>
-      </p:sp>
-      <p:sp>
-        <p:nvSpPr>
-          <p:cNvPr id="17" name="TextBox 16"/>
-          <p:cNvSpPr txBox="1"/>
-          <p:nvPr/>
-        </p:nvSpPr>
-        <p:spPr>
-          <a:xfrm>
-            <a:off x="8386419" y="1901952"/>
-            <a:ext cx="3108960" cy="457200"/>
+          <p:cNvPr id="24" name="TextBox 23"/>
+          <p:cNvSpPr txBox="1"/>
+          <p:nvPr/>
+        </p:nvSpPr>
+        <p:spPr>
+          <a:xfrm>
+            <a:off x="723747" y="4855464"/>
+            <a:ext cx="914400" cy="320040"/>
           </a:xfrm>
           <a:prstGeom prst="rect">
             <a:avLst/>
@@ -17297,544 +18812,130 @@
           <a:lstStyle/>
           <a:p>
             <a:pPr algn="l">
-              <a:defRPr sz="1400" b="1">
+              <a:defRPr sz="1200" b="1">
+                <a:solidFill>
+                  <a:srgbClr val="BCD1CA"/>
+                </a:solidFill>
+                <a:latin typeface="Lora"/>
+              </a:defRPr>
+            </a:pPr>
+            <a:r>
+              <a:t>H4</a:t>
+            </a:r>
+          </a:p>
+        </p:txBody>
+      </p:sp>
+      <p:sp>
+        <p:nvSpPr>
+          <p:cNvPr id="25" name="TextBox 24"/>
+          <p:cNvSpPr txBox="1"/>
+          <p:nvPr/>
+        </p:nvSpPr>
+        <p:spPr>
+          <a:xfrm>
+            <a:off x="1638147" y="4855464"/>
+            <a:ext cx="4114800" cy="320040"/>
+          </a:xfrm>
+          <a:prstGeom prst="rect">
+            <a:avLst/>
+          </a:prstGeom>
+          <a:noFill/>
+        </p:spPr>
+        <p:txBody>
+          <a:bodyPr wrap="square" anchor="t">
+            <a:spAutoFit/>
+          </a:bodyPr>
+          <a:lstStyle/>
+          <a:p>
+            <a:pPr algn="l">
+              <a:defRPr sz="1000" b="0">
+                <a:solidFill>
+                  <a:srgbClr val="5E5D59"/>
+                </a:solidFill>
+                <a:latin typeface="Lora"/>
+              </a:defRPr>
+            </a:pPr>
+            <a:r>
+              <a:t>Week 52</a:t>
+            </a:r>
+          </a:p>
+        </p:txBody>
+      </p:sp>
+      <p:sp>
+        <p:nvSpPr>
+          <p:cNvPr id="26" name="TextBox 25"/>
+          <p:cNvSpPr txBox="1"/>
+          <p:nvPr/>
+        </p:nvSpPr>
+        <p:spPr>
+          <a:xfrm>
+            <a:off x="723747" y="5221224"/>
+            <a:ext cx="4983479" cy="640080"/>
+          </a:xfrm>
+          <a:prstGeom prst="rect">
+            <a:avLst/>
+          </a:prstGeom>
+          <a:noFill/>
+        </p:spPr>
+        <p:txBody>
+          <a:bodyPr wrap="square" anchor="t">
+            <a:spAutoFit/>
+          </a:bodyPr>
+          <a:lstStyle/>
+          <a:p>
+            <a:pPr algn="l">
+              <a:defRPr sz="1000" b="1">
                 <a:solidFill>
                   <a:srgbClr val="141413"/>
                 </a:solidFill>
-                <a:latin typeface="Poppins"/>
-              </a:defRPr>
-            </a:pPr>
-            <a:r>
-              <a:t>Loan doc classifier</a:t>
-            </a:r>
-          </a:p>
-        </p:txBody>
-      </p:sp>
-      <p:sp>
-        <p:nvSpPr>
-          <p:cNvPr id="18" name="TextBox 17"/>
-          <p:cNvSpPr txBox="1"/>
-          <p:nvPr/>
-        </p:nvSpPr>
-        <p:spPr>
-          <a:xfrm>
-            <a:off x="8386419" y="2286000"/>
-            <a:ext cx="3108960" cy="704087"/>
-          </a:xfrm>
-          <a:prstGeom prst="rect">
-            <a:avLst/>
-          </a:prstGeom>
-          <a:noFill/>
-        </p:spPr>
-        <p:txBody>
-          <a:bodyPr wrap="square" anchor="t">
-            <a:spAutoFit/>
-          </a:bodyPr>
-          <a:lstStyle/>
-          <a:p>
-            <a:pPr algn="l">
-              <a:defRPr sz="1050" b="0">
-                <a:solidFill>
-                  <a:srgbClr val="5E5D59"/>
-                </a:solidFill>
                 <a:latin typeface="Lora"/>
               </a:defRPr>
             </a:pPr>
             <a:r>
-              <a:t>NLP · Month 6</a:t>
-            </a:r>
-          </a:p>
-        </p:txBody>
-      </p:sp>
-      <p:sp>
-        <p:nvSpPr>
-          <p:cNvPr id="19" name="Rounded Rectangle 18"/>
-          <p:cNvSpPr/>
-          <p:nvPr/>
-        </p:nvSpPr>
-        <p:spPr>
-          <a:xfrm>
-            <a:off x="540867" y="3337560"/>
-            <a:ext cx="3520440" cy="1325880"/>
-          </a:xfrm>
-          <a:prstGeom prst="roundRect">
-            <a:avLst/>
-          </a:prstGeom>
-          <a:solidFill>
-            <a:srgbClr val="FFFFFF"/>
-          </a:solidFill>
-          <a:ln w="12700">
-            <a:solidFill>
-              <a:srgbClr val="E8E6DC"/>
-            </a:solidFill>
-          </a:ln>
-          <a:effectLst/>
-        </p:spPr>
-        <p:style>
-          <a:lnRef idx="1">
-            <a:schemeClr val="accent1"/>
-          </a:lnRef>
-          <a:fillRef idx="3">
-            <a:schemeClr val="accent1"/>
-          </a:fillRef>
-          <a:effectRef idx="2">
-            <a:schemeClr val="accent1"/>
-          </a:effectRef>
-          <a:fontRef idx="minor">
-            <a:schemeClr val="lt1"/>
-          </a:fontRef>
-        </p:style>
-        <p:txBody>
-          <a:bodyPr rtlCol="0" anchor="ctr"/>
-          <a:lstStyle/>
-          <a:p>
-            <a:pPr algn="ctr"/>
-          </a:p>
-        </p:txBody>
-      </p:sp>
-      <p:sp>
-        <p:nvSpPr>
-          <p:cNvPr id="20" name="Rounded Rectangle 19"/>
-          <p:cNvSpPr/>
-          <p:nvPr/>
-        </p:nvSpPr>
-        <p:spPr>
-          <a:xfrm>
-            <a:off x="540867" y="3337560"/>
-            <a:ext cx="109728" cy="1325880"/>
-          </a:xfrm>
-          <a:prstGeom prst="roundRect">
-            <a:avLst/>
-          </a:prstGeom>
-          <a:solidFill>
-            <a:srgbClr val="D97757"/>
-          </a:solidFill>
-          <a:ln>
-            <a:noFill/>
-          </a:ln>
-          <a:effectLst/>
-        </p:spPr>
-        <p:style>
-          <a:lnRef idx="1">
-            <a:schemeClr val="accent1"/>
-          </a:lnRef>
-          <a:fillRef idx="3">
-            <a:schemeClr val="accent1"/>
-          </a:fillRef>
-          <a:effectRef idx="2">
-            <a:schemeClr val="accent1"/>
-          </a:effectRef>
-          <a:fontRef idx="minor">
-            <a:schemeClr val="lt1"/>
-          </a:fontRef>
-        </p:style>
-        <p:txBody>
-          <a:bodyPr rtlCol="0" anchor="ctr"/>
-          <a:lstStyle/>
-          <a:p>
-            <a:pPr algn="ctr"/>
-          </a:p>
-        </p:txBody>
-      </p:sp>
-      <p:sp>
-        <p:nvSpPr>
-          <p:cNvPr id="21" name="TextBox 20"/>
-          <p:cNvSpPr txBox="1"/>
-          <p:nvPr/>
-        </p:nvSpPr>
-        <p:spPr>
-          <a:xfrm>
-            <a:off x="796899" y="3502152"/>
-            <a:ext cx="3108960" cy="457200"/>
-          </a:xfrm>
-          <a:prstGeom prst="rect">
-            <a:avLst/>
-          </a:prstGeom>
-          <a:noFill/>
-        </p:spPr>
-        <p:txBody>
-          <a:bodyPr wrap="square" anchor="t">
-            <a:spAutoFit/>
-          </a:bodyPr>
-          <a:lstStyle/>
-          <a:p>
-            <a:pPr algn="l">
-              <a:defRPr sz="1400" b="1">
+              <a:t>5-slide steering deck + portfolio narrative</a:t>
+            </a:r>
+          </a:p>
+        </p:txBody>
+      </p:sp>
+      <p:sp>
+        <p:nvSpPr>
+          <p:cNvPr id="27" name="TextBox 26"/>
+          <p:cNvSpPr txBox="1"/>
+          <p:nvPr/>
+        </p:nvSpPr>
+        <p:spPr>
+          <a:xfrm>
+            <a:off x="502920" y="4480560"/>
+            <a:ext cx="11155680" cy="411480"/>
+          </a:xfrm>
+          <a:prstGeom prst="rect">
+            <a:avLst/>
+          </a:prstGeom>
+          <a:noFill/>
+        </p:spPr>
+        <p:txBody>
+          <a:bodyPr wrap="square" anchor="t">
+            <a:spAutoFit/>
+          </a:bodyPr>
+          <a:lstStyle/>
+          <a:p>
+            <a:pPr algn="ctr">
+              <a:defRPr sz="1100" b="1">
                 <a:solidFill>
                   <a:srgbClr val="141413"/>
                 </a:solidFill>
-                <a:latin typeface="Poppins"/>
-              </a:defRPr>
-            </a:pPr>
-            <a:r>
-              <a:t>AML triage agent</a:t>
-            </a:r>
-          </a:p>
-        </p:txBody>
-      </p:sp>
-      <p:sp>
-        <p:nvSpPr>
-          <p:cNvPr id="22" name="TextBox 21"/>
-          <p:cNvSpPr txBox="1"/>
-          <p:nvPr/>
-        </p:nvSpPr>
-        <p:spPr>
-          <a:xfrm>
-            <a:off x="796899" y="3886200"/>
-            <a:ext cx="3108960" cy="704087"/>
-          </a:xfrm>
-          <a:prstGeom prst="rect">
-            <a:avLst/>
-          </a:prstGeom>
-          <a:noFill/>
-        </p:spPr>
-        <p:txBody>
-          <a:bodyPr wrap="square" anchor="t">
-            <a:spAutoFit/>
-          </a:bodyPr>
-          <a:lstStyle/>
-          <a:p>
-            <a:pPr algn="l">
-              <a:defRPr sz="1050" b="0">
-                <a:solidFill>
-                  <a:srgbClr val="5E5D59"/>
-                </a:solidFill>
                 <a:latin typeface="Lora"/>
               </a:defRPr>
             </a:pPr>
             <a:r>
-              <a:t>Optional · Month 11</a:t>
-            </a:r>
-          </a:p>
-        </p:txBody>
-      </p:sp>
-      <p:sp>
-        <p:nvSpPr>
-          <p:cNvPr id="23" name="Rounded Rectangle 22"/>
-          <p:cNvSpPr/>
-          <p:nvPr/>
-        </p:nvSpPr>
-        <p:spPr>
-          <a:xfrm>
-            <a:off x="4335627" y="3337560"/>
-            <a:ext cx="3520440" cy="1325880"/>
-          </a:xfrm>
-          <a:prstGeom prst="roundRect">
-            <a:avLst/>
-          </a:prstGeom>
-          <a:solidFill>
-            <a:srgbClr val="FFFFFF"/>
-          </a:solidFill>
-          <a:ln w="12700">
-            <a:solidFill>
-              <a:srgbClr val="E8E6DC"/>
-            </a:solidFill>
-          </a:ln>
-          <a:effectLst/>
-        </p:spPr>
-        <p:style>
-          <a:lnRef idx="1">
-            <a:schemeClr val="accent1"/>
-          </a:lnRef>
-          <a:fillRef idx="3">
-            <a:schemeClr val="accent1"/>
-          </a:fillRef>
-          <a:effectRef idx="2">
-            <a:schemeClr val="accent1"/>
-          </a:effectRef>
-          <a:fontRef idx="minor">
-            <a:schemeClr val="lt1"/>
-          </a:fontRef>
-        </p:style>
-        <p:txBody>
-          <a:bodyPr rtlCol="0" anchor="ctr"/>
-          <a:lstStyle/>
-          <a:p>
-            <a:pPr algn="ctr"/>
-          </a:p>
-        </p:txBody>
-      </p:sp>
-      <p:sp>
-        <p:nvSpPr>
-          <p:cNvPr id="24" name="Rounded Rectangle 23"/>
-          <p:cNvSpPr/>
-          <p:nvPr/>
-        </p:nvSpPr>
-        <p:spPr>
-          <a:xfrm>
-            <a:off x="4335627" y="3337560"/>
-            <a:ext cx="109728" cy="1325880"/>
-          </a:xfrm>
-          <a:prstGeom prst="roundRect">
-            <a:avLst/>
-          </a:prstGeom>
-          <a:solidFill>
-            <a:srgbClr val="BCD1CA"/>
-          </a:solidFill>
-          <a:ln>
-            <a:noFill/>
-          </a:ln>
-          <a:effectLst/>
-        </p:spPr>
-        <p:style>
-          <a:lnRef idx="1">
-            <a:schemeClr val="accent1"/>
-          </a:lnRef>
-          <a:fillRef idx="3">
-            <a:schemeClr val="accent1"/>
-          </a:fillRef>
-          <a:effectRef idx="2">
-            <a:schemeClr val="accent1"/>
-          </a:effectRef>
-          <a:fontRef idx="minor">
-            <a:schemeClr val="lt1"/>
-          </a:fontRef>
-        </p:style>
-        <p:txBody>
-          <a:bodyPr rtlCol="0" anchor="ctr"/>
-          <a:lstStyle/>
-          <a:p>
-            <a:pPr algn="ctr"/>
-          </a:p>
-        </p:txBody>
-      </p:sp>
-      <p:sp>
-        <p:nvSpPr>
-          <p:cNvPr id="25" name="TextBox 24"/>
-          <p:cNvSpPr txBox="1"/>
-          <p:nvPr/>
-        </p:nvSpPr>
-        <p:spPr>
-          <a:xfrm>
-            <a:off x="4591659" y="3502152"/>
-            <a:ext cx="3108960" cy="457200"/>
-          </a:xfrm>
-          <a:prstGeom prst="rect">
-            <a:avLst/>
-          </a:prstGeom>
-          <a:noFill/>
-        </p:spPr>
-        <p:txBody>
-          <a:bodyPr wrap="square" anchor="t">
-            <a:spAutoFit/>
-          </a:bodyPr>
-          <a:lstStyle/>
-          <a:p>
-            <a:pPr algn="l">
-              <a:defRPr sz="1400" b="1">
-                <a:solidFill>
-                  <a:srgbClr val="141413"/>
-                </a:solidFill>
-                <a:latin typeface="Poppins"/>
-              </a:defRPr>
-            </a:pPr>
-            <a:r>
-              <a:t>BRD quality scorer</a:t>
-            </a:r>
-          </a:p>
-        </p:txBody>
-      </p:sp>
-      <p:sp>
-        <p:nvSpPr>
-          <p:cNvPr id="26" name="TextBox 25"/>
-          <p:cNvSpPr txBox="1"/>
-          <p:nvPr/>
-        </p:nvSpPr>
-        <p:spPr>
-          <a:xfrm>
-            <a:off x="4591659" y="3886200"/>
-            <a:ext cx="3108960" cy="704087"/>
-          </a:xfrm>
-          <a:prstGeom prst="rect">
-            <a:avLst/>
-          </a:prstGeom>
-          <a:noFill/>
-        </p:spPr>
-        <p:txBody>
-          <a:bodyPr wrap="square" anchor="t">
-            <a:spAutoFit/>
-          </a:bodyPr>
-          <a:lstStyle/>
-          <a:p>
-            <a:pPr algn="l">
-              <a:defRPr sz="1050" b="0">
-                <a:solidFill>
-                  <a:srgbClr val="5E5D59"/>
-                </a:solidFill>
-                <a:latin typeface="Lora"/>
-              </a:defRPr>
-            </a:pPr>
-            <a:r>
-              <a:t>Python · Month 1</a:t>
-            </a:r>
-          </a:p>
-        </p:txBody>
-      </p:sp>
-      <p:sp>
-        <p:nvSpPr>
-          <p:cNvPr id="27" name="Rounded Rectangle 26"/>
-          <p:cNvSpPr/>
-          <p:nvPr/>
-        </p:nvSpPr>
-        <p:spPr>
-          <a:xfrm>
-            <a:off x="8130387" y="3337560"/>
-            <a:ext cx="3520440" cy="1325880"/>
-          </a:xfrm>
-          <a:prstGeom prst="roundRect">
-            <a:avLst/>
-          </a:prstGeom>
-          <a:solidFill>
-            <a:srgbClr val="FFFFFF"/>
-          </a:solidFill>
-          <a:ln w="12700">
-            <a:solidFill>
-              <a:srgbClr val="E8E6DC"/>
-            </a:solidFill>
-          </a:ln>
-          <a:effectLst/>
-        </p:spPr>
-        <p:style>
-          <a:lnRef idx="1">
-            <a:schemeClr val="accent1"/>
-          </a:lnRef>
-          <a:fillRef idx="3">
-            <a:schemeClr val="accent1"/>
-          </a:fillRef>
-          <a:effectRef idx="2">
-            <a:schemeClr val="accent1"/>
-          </a:effectRef>
-          <a:fontRef idx="minor">
-            <a:schemeClr val="lt1"/>
-          </a:fontRef>
-        </p:style>
-        <p:txBody>
-          <a:bodyPr rtlCol="0" anchor="ctr"/>
-          <a:lstStyle/>
-          <a:p>
-            <a:pPr algn="ctr"/>
-          </a:p>
-        </p:txBody>
-      </p:sp>
-      <p:sp>
-        <p:nvSpPr>
-          <p:cNvPr id="28" name="Rounded Rectangle 27"/>
-          <p:cNvSpPr/>
-          <p:nvPr/>
-        </p:nvSpPr>
-        <p:spPr>
-          <a:xfrm>
-            <a:off x="8130387" y="3337560"/>
-            <a:ext cx="109728" cy="1325880"/>
-          </a:xfrm>
-          <a:prstGeom prst="roundRect">
-            <a:avLst/>
-          </a:prstGeom>
-          <a:solidFill>
-            <a:srgbClr val="6A9BCC"/>
-          </a:solidFill>
-          <a:ln>
-            <a:noFill/>
-          </a:ln>
-          <a:effectLst/>
-        </p:spPr>
-        <p:style>
-          <a:lnRef idx="1">
-            <a:schemeClr val="accent1"/>
-          </a:lnRef>
-          <a:fillRef idx="3">
-            <a:schemeClr val="accent1"/>
-          </a:fillRef>
-          <a:effectRef idx="2">
-            <a:schemeClr val="accent1"/>
-          </a:effectRef>
-          <a:fontRef idx="minor">
-            <a:schemeClr val="lt1"/>
-          </a:fontRef>
-        </p:style>
-        <p:txBody>
-          <a:bodyPr rtlCol="0" anchor="ctr"/>
-          <a:lstStyle/>
-          <a:p>
-            <a:pPr algn="ctr"/>
-          </a:p>
-        </p:txBody>
-      </p:sp>
-      <p:sp>
-        <p:nvSpPr>
-          <p:cNvPr id="29" name="TextBox 28"/>
-          <p:cNvSpPr txBox="1"/>
-          <p:nvPr/>
-        </p:nvSpPr>
-        <p:spPr>
-          <a:xfrm>
-            <a:off x="8386419" y="3502152"/>
-            <a:ext cx="3108960" cy="457200"/>
-          </a:xfrm>
-          <a:prstGeom prst="rect">
-            <a:avLst/>
-          </a:prstGeom>
-          <a:noFill/>
-        </p:spPr>
-        <p:txBody>
-          <a:bodyPr wrap="square" anchor="t">
-            <a:spAutoFit/>
-          </a:bodyPr>
-          <a:lstStyle/>
-          <a:p>
-            <a:pPr algn="l">
-              <a:defRPr sz="1400" b="1">
-                <a:solidFill>
-                  <a:srgbClr val="141413"/>
-                </a:solidFill>
-                <a:latin typeface="Poppins"/>
-              </a:defRPr>
-            </a:pPr>
-            <a:r>
-              <a:t>Lending KPI SQL</a:t>
-            </a:r>
-          </a:p>
-        </p:txBody>
-      </p:sp>
-      <p:sp>
-        <p:nvSpPr>
-          <p:cNvPr id="30" name="TextBox 29"/>
-          <p:cNvSpPr txBox="1"/>
-          <p:nvPr/>
-        </p:nvSpPr>
-        <p:spPr>
-          <a:xfrm>
-            <a:off x="8386419" y="3886200"/>
-            <a:ext cx="3108960" cy="704087"/>
-          </a:xfrm>
-          <a:prstGeom prst="rect">
-            <a:avLst/>
-          </a:prstGeom>
-          <a:noFill/>
-        </p:spPr>
-        <p:txBody>
-          <a:bodyPr wrap="square" anchor="t">
-            <a:spAutoFit/>
-          </a:bodyPr>
-          <a:lstStyle/>
-          <a:p>
-            <a:pPr algn="l">
-              <a:defRPr sz="1050" b="0">
-                <a:solidFill>
-                  <a:srgbClr val="5E5D59"/>
-                </a:solidFill>
-                <a:latin typeface="Lora"/>
-              </a:defRPr>
-            </a:pPr>
-            <a:r>
-              <a:t>SQL · Month 2</a:t>
-            </a:r>
-          </a:p>
-        </p:txBody>
-      </p:sp>
-      <p:sp>
-        <p:nvSpPr>
-          <p:cNvPr id="31" name="TextBox 30"/>
+              <a:t>Deck: exports/learning/Learning-Track-B-Slides.pptx · Guide: head-of-ai-track.md</a:t>
+            </a:r>
+          </a:p>
+        </p:txBody>
+      </p:sp>
+      <p:sp>
+        <p:nvSpPr>
+          <p:cNvPr id="28" name="TextBox 27"/>
           <p:cNvSpPr txBox="1"/>
           <p:nvPr/>
         </p:nvSpPr>
@@ -17870,7 +18971,7 @@
       </p:sp>
       <p:sp>
         <p:nvSpPr>
-          <p:cNvPr id="32" name="TextBox 31"/>
+          <p:cNvPr id="29" name="TextBox 28"/>
           <p:cNvSpPr txBox="1"/>
           <p:nvPr/>
         </p:nvSpPr>
